--- a/slides/src/rag_iii_claims_german.pptx
+++ b/slides/src/rag_iii_claims_german.pptx
@@ -48775,12 +48775,20 @@
             <p:ph type="title"/>
           </p:nvPr>
         </p:nvSpPr>
-        <p:spPr/>
+        <p:spPr>
+          <a:effectLst/>
+        </p:spPr>
         <p:txBody>
           <a:bodyPr/>
           <a:lstStyle/>
           <a:p>
             <a:r>
+              <a:rPr b="0" sz="2800" cap="none">
+                <a:solidFill>
+                  <a:srgbClr val="212427"/>
+                </a:solidFill>
+                <a:latin typeface="Verdana"/>
+              </a:rPr>
               <a:t>Errate die Zahl</a:t>
             </a:r>
           </a:p>
@@ -48794,13 +48802,15 @@
         </p:nvSpPr>
         <p:spPr>
           <a:xfrm>
-            <a:off x="704088" y="1188720"/>
-            <a:ext cx="1097280" cy="1356360"/>
+            <a:off x="704088" y="1115568"/>
+            <a:ext cx="609600" cy="38100"/>
           </a:xfrm>
           <a:prstGeom prst="rect">
             <a:avLst/>
           </a:prstGeom>
-          <a:noFill/>
+          <a:solidFill>
+            <a:srgbClr val="B1063A"/>
+          </a:solidFill>
           <a:ln>
             <a:noFill/>
           </a:ln>
@@ -48821,40 +48831,152 @@
           </a:fontRef>
         </p:style>
         <p:txBody>
-          <a:bodyPr rtlCol="0" anchor="t" wrap="square" lIns="109728" rIns="109728" tIns="73152" bIns="73152"/>
+          <a:bodyPr rtlCol="0" anchor="ctr"/>
           <a:lstStyle/>
           <a:p>
-            <a:pPr algn="l"/>
+            <a:pPr algn="ctr"/>
+          </a:p>
+        </p:txBody>
+      </p:sp>
+      <p:sp>
+        <p:nvSpPr>
+          <p:cNvPr id="5" name="TextBox 4"/>
+          <p:cNvSpPr txBox="1"/>
+          <p:nvPr/>
+        </p:nvSpPr>
+        <p:spPr>
+          <a:xfrm>
+            <a:off x="704088" y="1234440"/>
+            <a:ext cx="10789920" cy="365760"/>
+          </a:xfrm>
+          <a:prstGeom prst="rect">
+            <a:avLst/>
+          </a:prstGeom>
+          <a:noFill/>
+          <a:effectLst/>
+        </p:spPr>
+        <p:txBody>
+          <a:bodyPr wrap="square" anchor="t" lIns="36576" rIns="36576" tIns="27432" bIns="27432">
+            <a:spAutoFit/>
+          </a:bodyPr>
+          <a:lstStyle/>
+          <a:p>
+            <a:pPr algn="l">
+              <a:spcAft>
+                <a:spcPts val="0"/>
+              </a:spcAft>
+            </a:pPr>
             <a:r>
-              <a:rPr sz="1400" b="1">
+              <a:rPr sz="1400" b="0">
                 <a:solidFill>
                   <a:srgbClr val="5A6065"/>
                 </a:solidFill>
+                <a:latin typeface="Verdana"/>
               </a:rPr>
-              <a:t>Text 1</a:t>
+              <a:t>Wie viele Aussagen stecken in jedem Text?</a:t>
             </a:r>
           </a:p>
         </p:txBody>
       </p:sp>
       <p:sp>
         <p:nvSpPr>
-          <p:cNvPr id="5" name="Rectangle 4"/>
+          <p:cNvPr id="6" name="TextBox 5"/>
+          <p:cNvSpPr txBox="1"/>
+          <p:nvPr/>
+        </p:nvSpPr>
+        <p:spPr>
+          <a:xfrm>
+            <a:off x="704088" y="1737360"/>
+            <a:ext cx="548640" cy="1341120"/>
+          </a:xfrm>
+          <a:prstGeom prst="rect">
+            <a:avLst/>
+          </a:prstGeom>
+          <a:noFill/>
+          <a:effectLst/>
+        </p:spPr>
+        <p:txBody>
+          <a:bodyPr wrap="square" anchor="ctr" lIns="36576" rIns="36576" tIns="27432" bIns="27432">
+            <a:spAutoFit/>
+          </a:bodyPr>
+          <a:lstStyle/>
+          <a:p>
+            <a:pPr algn="l">
+              <a:spcAft>
+                <a:spcPts val="0"/>
+              </a:spcAft>
+            </a:pPr>
+            <a:r>
+              <a:rPr sz="2000" b="0">
+                <a:solidFill>
+                  <a:srgbClr val="5A6065"/>
+                </a:solidFill>
+                <a:latin typeface="Verdana"/>
+              </a:rPr>
+              <a:t>A</a:t>
+            </a:r>
+          </a:p>
+        </p:txBody>
+      </p:sp>
+      <p:sp>
+        <p:nvSpPr>
+          <p:cNvPr id="7" name="TextBox 6"/>
+          <p:cNvSpPr txBox="1"/>
+          <p:nvPr/>
+        </p:nvSpPr>
+        <p:spPr>
+          <a:xfrm>
+            <a:off x="1344168" y="1737360"/>
+            <a:ext cx="10149840" cy="1341120"/>
+          </a:xfrm>
+          <a:prstGeom prst="rect">
+            <a:avLst/>
+          </a:prstGeom>
+          <a:noFill/>
+          <a:effectLst/>
+        </p:spPr>
+        <p:txBody>
+          <a:bodyPr wrap="square" anchor="ctr" lIns="36576" rIns="36576" tIns="27432" bIns="27432">
+            <a:spAutoFit/>
+          </a:bodyPr>
+          <a:lstStyle/>
+          <a:p>
+            <a:pPr algn="l">
+              <a:spcAft>
+                <a:spcPts val="0"/>
+              </a:spcAft>
+            </a:pPr>
+            <a:r>
+              <a:rPr sz="1600" b="0">
+                <a:solidFill>
+                  <a:srgbClr val="212427"/>
+                </a:solidFill>
+                <a:latin typeface="Verdana"/>
+              </a:rPr>
+              <a:t>Die Anforderungen müssen dokumentiert werden, damit sie identifiziert und bei Planung, Betrieb und Beschaffung berücksichtigt werden können.</a:t>
+            </a:r>
+          </a:p>
+        </p:txBody>
+      </p:sp>
+      <p:sp>
+        <p:nvSpPr>
+          <p:cNvPr id="8" name="Rectangle 7"/>
           <p:cNvSpPr/>
           <p:nvPr/>
         </p:nvSpPr>
         <p:spPr>
           <a:xfrm>
-            <a:off x="1828800" y="1188720"/>
-            <a:ext cx="9692640" cy="1356360"/>
+            <a:off x="704088" y="3078480"/>
+            <a:ext cx="10789920" cy="9525"/>
           </a:xfrm>
           <a:prstGeom prst="rect">
             <a:avLst/>
           </a:prstGeom>
-          <a:noFill/>
-          <a:ln w="9525">
-            <a:solidFill>
-              <a:srgbClr val="D6D7D8"/>
-            </a:solidFill>
+          <a:solidFill>
+            <a:srgbClr val="D6D7D8"/>
+          </a:solidFill>
+          <a:ln>
+            <a:noFill/>
           </a:ln>
           <a:effectLst/>
         </p:spPr>
@@ -48873,36 +48995,110 @@
           </a:fontRef>
         </p:style>
         <p:txBody>
-          <a:bodyPr rtlCol="0" anchor="ctr" wrap="square" lIns="109728" rIns="109728" tIns="73152" bIns="73152"/>
+          <a:bodyPr rtlCol="0" anchor="ctr"/>
           <a:lstStyle/>
           <a:p>
-            <a:pPr algn="l"/>
+            <a:pPr algn="ctr"/>
+          </a:p>
+        </p:txBody>
+      </p:sp>
+      <p:sp>
+        <p:nvSpPr>
+          <p:cNvPr id="9" name="TextBox 8"/>
+          <p:cNvSpPr txBox="1"/>
+          <p:nvPr/>
+        </p:nvSpPr>
+        <p:spPr>
+          <a:xfrm>
+            <a:off x="704088" y="3078480"/>
+            <a:ext cx="548640" cy="1341120"/>
+          </a:xfrm>
+          <a:prstGeom prst="rect">
+            <a:avLst/>
+          </a:prstGeom>
+          <a:noFill/>
+          <a:effectLst/>
+        </p:spPr>
+        <p:txBody>
+          <a:bodyPr wrap="square" anchor="ctr" lIns="36576" rIns="36576" tIns="27432" bIns="27432">
+            <a:spAutoFit/>
+          </a:bodyPr>
+          <a:lstStyle/>
+          <a:p>
+            <a:pPr algn="l">
+              <a:spcAft>
+                <a:spcPts val="0"/>
+              </a:spcAft>
+            </a:pPr>
             <a:r>
-              <a:rPr sz="1500" b="0">
+              <a:rPr sz="2000" b="0">
                 <a:solidFill>
-                  <a:srgbClr val="212427"/>
+                  <a:srgbClr val="5A6065"/>
                 </a:solidFill>
+                <a:latin typeface="Verdana"/>
               </a:rPr>
-              <a:t>Administrationskonten sollten durch Mehr-Faktor-Authentisierung geschützt werden, da sie ein besonders hohes Schadenspotenzial besitzen und bevorzugtes Angriffsziel darstellen.</a:t>
+              <a:t>B</a:t>
             </a:r>
           </a:p>
         </p:txBody>
       </p:sp>
       <p:sp>
         <p:nvSpPr>
-          <p:cNvPr id="6" name="Rectangle 5"/>
+          <p:cNvPr id="10" name="TextBox 9"/>
+          <p:cNvSpPr txBox="1"/>
+          <p:nvPr/>
+        </p:nvSpPr>
+        <p:spPr>
+          <a:xfrm>
+            <a:off x="1344168" y="3078480"/>
+            <a:ext cx="10149840" cy="1341120"/>
+          </a:xfrm>
+          <a:prstGeom prst="rect">
+            <a:avLst/>
+          </a:prstGeom>
+          <a:noFill/>
+          <a:effectLst/>
+        </p:spPr>
+        <p:txBody>
+          <a:bodyPr wrap="square" anchor="ctr" lIns="36576" rIns="36576" tIns="27432" bIns="27432">
+            <a:spAutoFit/>
+          </a:bodyPr>
+          <a:lstStyle/>
+          <a:p>
+            <a:pPr algn="l">
+              <a:spcAft>
+                <a:spcPts val="0"/>
+              </a:spcAft>
+            </a:pPr>
+            <a:r>
+              <a:rPr sz="1600" b="0">
+                <a:solidFill>
+                  <a:srgbClr val="212427"/>
+                </a:solidFill>
+                <a:latin typeface="Verdana"/>
+              </a:rPr>
+              <a:t>Ohne verbindliche Passwortregeln besteht die Gefahr schwacher oder mehrfach genutzter Passwörter, die leicht kompromittiert werden können.</a:t>
+            </a:r>
+          </a:p>
+        </p:txBody>
+      </p:sp>
+      <p:sp>
+        <p:nvSpPr>
+          <p:cNvPr id="11" name="Rectangle 10"/>
           <p:cNvSpPr/>
           <p:nvPr/>
         </p:nvSpPr>
         <p:spPr>
           <a:xfrm>
-            <a:off x="704088" y="2682240"/>
-            <a:ext cx="1097280" cy="1356360"/>
+            <a:off x="704088" y="4419600"/>
+            <a:ext cx="10789920" cy="9525"/>
           </a:xfrm>
           <a:prstGeom prst="rect">
             <a:avLst/>
           </a:prstGeom>
-          <a:noFill/>
+          <a:solidFill>
+            <a:srgbClr val="D6D7D8"/>
+          </a:solidFill>
           <a:ln>
             <a:noFill/>
           </a:ln>
@@ -48923,219 +49119,127 @@
           </a:fontRef>
         </p:style>
         <p:txBody>
-          <a:bodyPr rtlCol="0" anchor="t" wrap="square" lIns="109728" rIns="109728" tIns="73152" bIns="73152"/>
+          <a:bodyPr rtlCol="0" anchor="ctr"/>
           <a:lstStyle/>
           <a:p>
-            <a:pPr algn="l"/>
+            <a:pPr algn="ctr"/>
+          </a:p>
+        </p:txBody>
+      </p:sp>
+      <p:sp>
+        <p:nvSpPr>
+          <p:cNvPr id="12" name="TextBox 11"/>
+          <p:cNvSpPr txBox="1"/>
+          <p:nvPr/>
+        </p:nvSpPr>
+        <p:spPr>
+          <a:xfrm>
+            <a:off x="704088" y="4419600"/>
+            <a:ext cx="548640" cy="1341120"/>
+          </a:xfrm>
+          <a:prstGeom prst="rect">
+            <a:avLst/>
+          </a:prstGeom>
+          <a:noFill/>
+          <a:effectLst/>
+        </p:spPr>
+        <p:txBody>
+          <a:bodyPr wrap="square" anchor="ctr" lIns="36576" rIns="36576" tIns="27432" bIns="27432">
+            <a:spAutoFit/>
+          </a:bodyPr>
+          <a:lstStyle/>
+          <a:p>
+            <a:pPr algn="l">
+              <a:spcAft>
+                <a:spcPts val="0"/>
+              </a:spcAft>
+            </a:pPr>
             <a:r>
-              <a:rPr sz="1400" b="1">
+              <a:rPr sz="2000" b="0">
                 <a:solidFill>
                   <a:srgbClr val="5A6065"/>
                 </a:solidFill>
+                <a:latin typeface="Verdana"/>
               </a:rPr>
-              <a:t>Text 2</a:t>
+              <a:t>C</a:t>
             </a:r>
           </a:p>
         </p:txBody>
       </p:sp>
       <p:sp>
         <p:nvSpPr>
-          <p:cNvPr id="7" name="Rectangle 6"/>
-          <p:cNvSpPr/>
+          <p:cNvPr id="13" name="TextBox 12"/>
+          <p:cNvSpPr txBox="1"/>
           <p:nvPr/>
         </p:nvSpPr>
         <p:spPr>
           <a:xfrm>
-            <a:off x="1828800" y="2682240"/>
-            <a:ext cx="9692640" cy="1356360"/>
+            <a:off x="1344168" y="4419600"/>
+            <a:ext cx="10149840" cy="1341120"/>
           </a:xfrm>
           <a:prstGeom prst="rect">
             <a:avLst/>
           </a:prstGeom>
           <a:noFill/>
-          <a:ln w="9525">
-            <a:solidFill>
-              <a:srgbClr val="D6D7D8"/>
-            </a:solidFill>
-          </a:ln>
           <a:effectLst/>
         </p:spPr>
-        <p:style>
-          <a:lnRef idx="1">
-            <a:schemeClr val="accent1"/>
-          </a:lnRef>
-          <a:fillRef idx="3">
-            <a:schemeClr val="accent1"/>
-          </a:fillRef>
-          <a:effectRef idx="2">
-            <a:schemeClr val="accent1"/>
-          </a:effectRef>
-          <a:fontRef idx="minor">
-            <a:schemeClr val="lt1"/>
-          </a:fontRef>
-        </p:style>
         <p:txBody>
-          <a:bodyPr rtlCol="0" anchor="ctr" wrap="square" lIns="109728" rIns="109728" tIns="73152" bIns="73152"/>
+          <a:bodyPr wrap="square" anchor="ctr" lIns="36576" rIns="36576" tIns="27432" bIns="27432">
+            <a:spAutoFit/>
+          </a:bodyPr>
           <a:lstStyle/>
           <a:p>
-            <a:pPr algn="l"/>
+            <a:pPr algn="l">
+              <a:spcAft>
+                <a:spcPts val="0"/>
+              </a:spcAft>
+            </a:pPr>
             <a:r>
-              <a:rPr sz="1500" b="0">
+              <a:rPr sz="1600" b="0">
                 <a:solidFill>
                   <a:srgbClr val="212427"/>
                 </a:solidFill>
+                <a:latin typeface="Verdana"/>
               </a:rPr>
-              <a:t>Erstellen Sie eine Cloud-Nutzungsstrategie (A1), eine Sicherheitsrichtlinie (A2), Service-Definitionen (A3) und legen Sie Verantwortungsbereiche sowie Schnittstellen fest (A4). Diese vier Basis-Anforderungen müssen vorrangig erfüllt werden.</a:t>
+              <a:t>Ausgabe und Entzug von Zutritts-, Zugangs- und Zugriffsmitteln sind zu dokumentieren und bei Kompromittierung sofort zu ersetzen.</a:t>
             </a:r>
           </a:p>
         </p:txBody>
       </p:sp>
       <p:sp>
         <p:nvSpPr>
-          <p:cNvPr id="8" name="Rectangle 7"/>
-          <p:cNvSpPr/>
+          <p:cNvPr id="14" name="TextBox 13"/>
+          <p:cNvSpPr txBox="1"/>
           <p:nvPr/>
         </p:nvSpPr>
         <p:spPr>
           <a:xfrm>
-            <a:off x="704088" y="4175760"/>
-            <a:ext cx="1097280" cy="1356360"/>
+            <a:off x="7836408" y="5897880"/>
+            <a:ext cx="3657600" cy="365760"/>
           </a:xfrm>
           <a:prstGeom prst="rect">
             <a:avLst/>
           </a:prstGeom>
           <a:noFill/>
-          <a:ln>
-            <a:noFill/>
-          </a:ln>
           <a:effectLst/>
         </p:spPr>
-        <p:style>
-          <a:lnRef idx="1">
-            <a:schemeClr val="accent1"/>
-          </a:lnRef>
-          <a:fillRef idx="3">
-            <a:schemeClr val="accent1"/>
-          </a:fillRef>
-          <a:effectRef idx="2">
-            <a:schemeClr val="accent1"/>
-          </a:effectRef>
-          <a:fontRef idx="minor">
-            <a:schemeClr val="lt1"/>
-          </a:fontRef>
-        </p:style>
         <p:txBody>
-          <a:bodyPr rtlCol="0" anchor="t" wrap="square" lIns="109728" rIns="109728" tIns="73152" bIns="73152"/>
+          <a:bodyPr wrap="square" anchor="t" lIns="36576" rIns="36576" tIns="27432" bIns="27432">
+            <a:spAutoFit/>
+          </a:bodyPr>
           <a:lstStyle/>
           <a:p>
-            <a:pPr algn="l"/>
+            <a:pPr algn="r">
+              <a:spcAft>
+                <a:spcPts val="0"/>
+              </a:spcAft>
+            </a:pPr>
             <a:r>
-              <a:rPr sz="1400" b="1">
+              <a:rPr sz="1400" b="0">
                 <a:solidFill>
                   <a:srgbClr val="5A6065"/>
                 </a:solidFill>
-              </a:rPr>
-              <a:t>Text 3</a:t>
-            </a:r>
-          </a:p>
-        </p:txBody>
-      </p:sp>
-      <p:sp>
-        <p:nvSpPr>
-          <p:cNvPr id="9" name="Rectangle 8"/>
-          <p:cNvSpPr/>
-          <p:nvPr/>
-        </p:nvSpPr>
-        <p:spPr>
-          <a:xfrm>
-            <a:off x="1828800" y="4175760"/>
-            <a:ext cx="9692640" cy="1356360"/>
-          </a:xfrm>
-          <a:prstGeom prst="rect">
-            <a:avLst/>
-          </a:prstGeom>
-          <a:noFill/>
-          <a:ln w="9525">
-            <a:solidFill>
-              <a:srgbClr val="D6D7D8"/>
-            </a:solidFill>
-          </a:ln>
-          <a:effectLst/>
-        </p:spPr>
-        <p:style>
-          <a:lnRef idx="1">
-            <a:schemeClr val="accent1"/>
-          </a:lnRef>
-          <a:fillRef idx="3">
-            <a:schemeClr val="accent1"/>
-          </a:fillRef>
-          <a:effectRef idx="2">
-            <a:schemeClr val="accent1"/>
-          </a:effectRef>
-          <a:fontRef idx="minor">
-            <a:schemeClr val="lt1"/>
-          </a:fontRef>
-        </p:style>
-        <p:txBody>
-          <a:bodyPr rtlCol="0" anchor="ctr" wrap="square" lIns="109728" rIns="109728" tIns="73152" bIns="73152"/>
-          <a:lstStyle/>
-          <a:p>
-            <a:pPr algn="l"/>
-            <a:r>
-              <a:rPr sz="1500" b="0">
-                <a:solidFill>
-                  <a:srgbClr val="212427"/>
-                </a:solidFill>
-              </a:rPr>
-              <a:t>Bei personellen Veränderungen müssen nicht mehr benötigte Benutzendenkennungen und Berechtigungen unverzüglich entfernt werden, um unberechtigte Zugriffe ehemaliger oder versetzter Mitarbeitender zu vermeiden. Es dürfen Berechtigungen nur hinsichtlich des tatsächlichen Bedarfs zur Aufgabenerfüllung vergeben werden.</a:t>
-            </a:r>
-          </a:p>
-        </p:txBody>
-      </p:sp>
-      <p:sp>
-        <p:nvSpPr>
-          <p:cNvPr id="10" name="Rectangle 9"/>
-          <p:cNvSpPr/>
-          <p:nvPr/>
-        </p:nvSpPr>
-        <p:spPr>
-          <a:xfrm>
-            <a:off x="7863840" y="5806440"/>
-            <a:ext cx="3657600" cy="411480"/>
-          </a:xfrm>
-          <a:prstGeom prst="rect">
-            <a:avLst/>
-          </a:prstGeom>
-          <a:noFill/>
-          <a:ln>
-            <a:noFill/>
-          </a:ln>
-          <a:effectLst/>
-        </p:spPr>
-        <p:style>
-          <a:lnRef idx="1">
-            <a:schemeClr val="accent1"/>
-          </a:lnRef>
-          <a:fillRef idx="3">
-            <a:schemeClr val="accent1"/>
-          </a:fillRef>
-          <a:effectRef idx="2">
-            <a:schemeClr val="accent1"/>
-          </a:effectRef>
-          <a:fontRef idx="minor">
-            <a:schemeClr val="lt1"/>
-          </a:fontRef>
-        </p:style>
-        <p:txBody>
-          <a:bodyPr rtlCol="0" anchor="t" wrap="square" lIns="109728" rIns="109728" tIns="73152" bIns="73152"/>
-          <a:lstStyle/>
-          <a:p>
-            <a:pPr algn="r"/>
-            <a:r>
-              <a:rPr sz="1400" b="1">
-                <a:solidFill>
-                  <a:srgbClr val="B1063A"/>
-                </a:solidFill>
+                <a:latin typeface="Verdana"/>
               </a:rPr>
               <a:t>Mentimeter-Code: ____</a:t>
             </a:r>
@@ -49170,12 +49274,20 @@
             <p:ph type="title"/>
           </p:nvPr>
         </p:nvSpPr>
-        <p:spPr/>
+        <p:spPr>
+          <a:effectLst/>
+        </p:spPr>
         <p:txBody>
           <a:bodyPr/>
           <a:lstStyle/>
           <a:p>
             <a:r>
+              <a:rPr b="0" sz="2800" cap="none">
+                <a:solidFill>
+                  <a:srgbClr val="212427"/>
+                </a:solidFill>
+                <a:latin typeface="Verdana"/>
+              </a:rPr>
               <a:t>Was ist eine Aussage?</a:t>
             </a:r>
           </a:p>
@@ -49189,13 +49301,15 @@
         </p:nvSpPr>
         <p:spPr>
           <a:xfrm>
-            <a:off x="704088" y="1280160"/>
-            <a:ext cx="3429000" cy="548640"/>
+            <a:off x="704088" y="1115568"/>
+            <a:ext cx="609600" cy="38100"/>
           </a:xfrm>
           <a:prstGeom prst="rect">
             <a:avLst/>
           </a:prstGeom>
-          <a:noFill/>
+          <a:solidFill>
+            <a:srgbClr val="B1063A"/>
+          </a:solidFill>
           <a:ln>
             <a:noFill/>
           </a:ln>
@@ -49216,40 +49330,112 @@
           </a:fontRef>
         </p:style>
         <p:txBody>
-          <a:bodyPr rtlCol="0" anchor="t" wrap="square" lIns="109728" rIns="109728" tIns="73152" bIns="73152"/>
+          <a:bodyPr rtlCol="0" anchor="ctr"/>
           <a:lstStyle/>
           <a:p>
-            <a:pPr algn="l"/>
+            <a:pPr algn="ctr"/>
+          </a:p>
+        </p:txBody>
+      </p:sp>
+      <p:sp>
+        <p:nvSpPr>
+          <p:cNvPr id="5" name="TextBox 4"/>
+          <p:cNvSpPr txBox="1"/>
+          <p:nvPr/>
+        </p:nvSpPr>
+        <p:spPr>
+          <a:xfrm>
+            <a:off x="704088" y="1325880"/>
+            <a:ext cx="2651760" cy="1051560"/>
+          </a:xfrm>
+          <a:prstGeom prst="rect">
+            <a:avLst/>
+          </a:prstGeom>
+          <a:noFill/>
+          <a:effectLst/>
+        </p:spPr>
+        <p:txBody>
+          <a:bodyPr wrap="square" anchor="ctr" lIns="36576" rIns="36576" tIns="27432" bIns="27432">
+            <a:spAutoFit/>
+          </a:bodyPr>
+          <a:lstStyle/>
+          <a:p>
+            <a:pPr algn="l">
+              <a:spcAft>
+                <a:spcPts val="0"/>
+              </a:spcAft>
+            </a:pPr>
             <a:r>
-              <a:rPr sz="1800" b="1">
+              <a:rPr sz="1400" b="0">
                 <a:solidFill>
-                  <a:srgbClr val="212427"/>
+                  <a:srgbClr val="5A6065"/>
                 </a:solidFill>
+                <a:latin typeface="Verdana"/>
               </a:rPr>
-              <a:t>Alltag (Wörterbuch)</a:t>
+              <a:t>Alltag, ganz</a:t>
             </a:r>
           </a:p>
         </p:txBody>
       </p:sp>
       <p:sp>
         <p:nvSpPr>
-          <p:cNvPr id="5" name="Rectangle 4"/>
+          <p:cNvPr id="6" name="TextBox 5"/>
+          <p:cNvSpPr txBox="1"/>
+          <p:nvPr/>
+        </p:nvSpPr>
+        <p:spPr>
+          <a:xfrm>
+            <a:off x="3447288" y="1325880"/>
+            <a:ext cx="8046720" cy="1051560"/>
+          </a:xfrm>
+          <a:prstGeom prst="rect">
+            <a:avLst/>
+          </a:prstGeom>
+          <a:noFill/>
+          <a:effectLst/>
+        </p:spPr>
+        <p:txBody>
+          <a:bodyPr wrap="square" anchor="ctr" lIns="36576" rIns="36576" tIns="27432" bIns="27432">
+            <a:spAutoFit/>
+          </a:bodyPr>
+          <a:lstStyle/>
+          <a:p>
+            <a:pPr algn="l">
+              <a:spcAft>
+                <a:spcPts val="0"/>
+              </a:spcAft>
+            </a:pPr>
+            <a:r>
+              <a:rPr sz="1600" b="0">
+                <a:solidFill>
+                  <a:srgbClr val="212427"/>
+                </a:solidFill>
+                <a:latin typeface="Verdana"/>
+              </a:rPr>
+              <a:t>Eine Aussage ist ein Satz, der etwas feststellt.</a:t>
+            </a:r>
+          </a:p>
+        </p:txBody>
+      </p:sp>
+      <p:sp>
+        <p:nvSpPr>
+          <p:cNvPr id="7" name="Rectangle 6"/>
           <p:cNvSpPr/>
           <p:nvPr/>
         </p:nvSpPr>
         <p:spPr>
           <a:xfrm>
-            <a:off x="704088" y="1874519"/>
-            <a:ext cx="3429000" cy="1645920"/>
+            <a:off x="704088" y="2377439"/>
+            <a:ext cx="10789920" cy="9525"/>
           </a:xfrm>
           <a:prstGeom prst="rect">
             <a:avLst/>
           </a:prstGeom>
-          <a:noFill/>
-          <a:ln w="9525">
-            <a:solidFill>
-              <a:srgbClr val="D6D7D8"/>
-            </a:solidFill>
+          <a:solidFill>
+            <a:srgbClr val="D6D7D8"/>
+          </a:solidFill>
+          <a:ln>
+            <a:noFill/>
           </a:ln>
           <a:effectLst/>
         </p:spPr>
@@ -49268,36 +49454,110 @@
           </a:fontRef>
         </p:style>
         <p:txBody>
-          <a:bodyPr rtlCol="0" anchor="ctr" wrap="square" lIns="109728" rIns="109728" tIns="73152" bIns="73152"/>
+          <a:bodyPr rtlCol="0" anchor="ctr"/>
           <a:lstStyle/>
           <a:p>
-            <a:pPr algn="l"/>
+            <a:pPr algn="ctr"/>
+          </a:p>
+        </p:txBody>
+      </p:sp>
+      <p:sp>
+        <p:nvSpPr>
+          <p:cNvPr id="8" name="TextBox 7"/>
+          <p:cNvSpPr txBox="1"/>
+          <p:nvPr/>
+        </p:nvSpPr>
+        <p:spPr>
+          <a:xfrm>
+            <a:off x="704088" y="2377439"/>
+            <a:ext cx="2651760" cy="1051560"/>
+          </a:xfrm>
+          <a:prstGeom prst="rect">
+            <a:avLst/>
+          </a:prstGeom>
+          <a:noFill/>
+          <a:effectLst/>
+        </p:spPr>
+        <p:txBody>
+          <a:bodyPr wrap="square" anchor="ctr" lIns="36576" rIns="36576" tIns="27432" bIns="27432">
+            <a:spAutoFit/>
+          </a:bodyPr>
+          <a:lstStyle/>
+          <a:p>
+            <a:pPr algn="l">
+              <a:spcAft>
+                <a:spcPts val="0"/>
+              </a:spcAft>
+            </a:pPr>
             <a:r>
-              <a:rPr sz="1600" b="0">
+              <a:rPr sz="1400" b="0">
                 <a:solidFill>
-                  <a:srgbClr val="212427"/>
+                  <a:srgbClr val="5A6065"/>
                 </a:solidFill>
+                <a:latin typeface="Verdana"/>
               </a:rPr>
-              <a:t>Eine Aussage ist ein Satz, der etwas feststellt.</a:t>
+              <a:t>Alltag, feiner</a:t>
             </a:r>
           </a:p>
         </p:txBody>
       </p:sp>
       <p:sp>
         <p:nvSpPr>
-          <p:cNvPr id="6" name="Rectangle 5"/>
+          <p:cNvPr id="9" name="TextBox 8"/>
+          <p:cNvSpPr txBox="1"/>
+          <p:nvPr/>
+        </p:nvSpPr>
+        <p:spPr>
+          <a:xfrm>
+            <a:off x="3447288" y="2377439"/>
+            <a:ext cx="8046720" cy="1051560"/>
+          </a:xfrm>
+          <a:prstGeom prst="rect">
+            <a:avLst/>
+          </a:prstGeom>
+          <a:noFill/>
+          <a:effectLst/>
+        </p:spPr>
+        <p:txBody>
+          <a:bodyPr wrap="square" anchor="ctr" lIns="36576" rIns="36576" tIns="27432" bIns="27432">
+            <a:spAutoFit/>
+          </a:bodyPr>
+          <a:lstStyle/>
+          <a:p>
+            <a:pPr algn="l">
+              <a:spcAft>
+                <a:spcPts val="0"/>
+              </a:spcAft>
+            </a:pPr>
+            <a:r>
+              <a:rPr sz="1600" b="0">
+                <a:solidFill>
+                  <a:srgbClr val="212427"/>
+                </a:solidFill>
+                <a:latin typeface="Verdana"/>
+              </a:rPr>
+              <a:t>Jeder Teilsatz, der etwas feststellt, ist eine Aussage: Hauptsatz und Nebensatz zählen getrennt.</a:t>
+            </a:r>
+          </a:p>
+        </p:txBody>
+      </p:sp>
+      <p:sp>
+        <p:nvSpPr>
+          <p:cNvPr id="10" name="Rectangle 9"/>
           <p:cNvSpPr/>
           <p:nvPr/>
         </p:nvSpPr>
         <p:spPr>
           <a:xfrm>
-            <a:off x="704088" y="3657600"/>
-            <a:ext cx="3429000" cy="2011680"/>
+            <a:off x="704088" y="3428999"/>
+            <a:ext cx="10789920" cy="9525"/>
           </a:xfrm>
           <a:prstGeom prst="rect">
             <a:avLst/>
           </a:prstGeom>
-          <a:noFill/>
+          <a:solidFill>
+            <a:srgbClr val="D6D7D8"/>
+          </a:solidFill>
           <a:ln>
             <a:noFill/>
           </a:ln>
@@ -49318,36 +49578,110 @@
           </a:fontRef>
         </p:style>
         <p:txBody>
-          <a:bodyPr rtlCol="0" anchor="t" wrap="square" lIns="109728" rIns="109728" tIns="73152" bIns="73152"/>
+          <a:bodyPr rtlCol="0" anchor="ctr"/>
           <a:lstStyle/>
           <a:p>
-            <a:pPr algn="l"/>
+            <a:pPr algn="ctr"/>
+          </a:p>
+        </p:txBody>
+      </p:sp>
+      <p:sp>
+        <p:nvSpPr>
+          <p:cNvPr id="11" name="TextBox 10"/>
+          <p:cNvSpPr txBox="1"/>
+          <p:nvPr/>
+        </p:nvSpPr>
+        <p:spPr>
+          <a:xfrm>
+            <a:off x="704088" y="3428999"/>
+            <a:ext cx="2651760" cy="1051560"/>
+          </a:xfrm>
+          <a:prstGeom prst="rect">
+            <a:avLst/>
+          </a:prstGeom>
+          <a:noFill/>
+          <a:effectLst/>
+        </p:spPr>
+        <p:txBody>
+          <a:bodyPr wrap="square" anchor="ctr" lIns="36576" rIns="36576" tIns="27432" bIns="27432">
+            <a:spAutoFit/>
+          </a:bodyPr>
+          <a:lstStyle/>
+          <a:p>
+            <a:pPr algn="l">
+              <a:spcAft>
+                <a:spcPts val="0"/>
+              </a:spcAft>
+            </a:pPr>
             <a:r>
-              <a:rPr sz="1300" b="0">
+              <a:rPr sz="1400" b="0">
                 <a:solidFill>
                   <a:srgbClr val="5A6065"/>
                 </a:solidFill>
+                <a:latin typeface="Verdana"/>
               </a:rPr>
-              <a:t>Danach ist der Beispielsatz eine Aussage. Man kann auch zwei zählen: Hauptsatz und Nebensatz sind zwei Sätze.</a:t>
+              <a:t>Logik</a:t>
             </a:r>
           </a:p>
         </p:txBody>
       </p:sp>
       <p:sp>
         <p:nvSpPr>
-          <p:cNvPr id="7" name="Rectangle 6"/>
+          <p:cNvPr id="12" name="TextBox 11"/>
+          <p:cNvSpPr txBox="1"/>
+          <p:nvPr/>
+        </p:nvSpPr>
+        <p:spPr>
+          <a:xfrm>
+            <a:off x="3447288" y="3428999"/>
+            <a:ext cx="8046720" cy="1051560"/>
+          </a:xfrm>
+          <a:prstGeom prst="rect">
+            <a:avLst/>
+          </a:prstGeom>
+          <a:noFill/>
+          <a:effectLst/>
+        </p:spPr>
+        <p:txBody>
+          <a:bodyPr wrap="square" anchor="ctr" lIns="36576" rIns="36576" tIns="27432" bIns="27432">
+            <a:spAutoFit/>
+          </a:bodyPr>
+          <a:lstStyle/>
+          <a:p>
+            <a:pPr algn="l">
+              <a:spcAft>
+                <a:spcPts val="0"/>
+              </a:spcAft>
+            </a:pPr>
+            <a:r>
+              <a:rPr sz="1600" b="0">
+                <a:solidFill>
+                  <a:srgbClr val="212427"/>
+                </a:solidFill>
+                <a:latin typeface="Verdana"/>
+              </a:rPr>
+              <a:t>Eine Aussage ist etwas, das für sich allein wahr oder falsch sein kann. Jedes Element einer Aufzählung zählt für jede Handlung, zu der es gehört.</a:t>
+            </a:r>
+          </a:p>
+        </p:txBody>
+      </p:sp>
+      <p:sp>
+        <p:nvSpPr>
+          <p:cNvPr id="13" name="Rectangle 12"/>
           <p:cNvSpPr/>
           <p:nvPr/>
         </p:nvSpPr>
         <p:spPr>
           <a:xfrm>
-            <a:off x="4407408" y="1280160"/>
-            <a:ext cx="3429000" cy="548640"/>
+            <a:off x="704088" y="4480559"/>
+            <a:ext cx="10789920" cy="9525"/>
           </a:xfrm>
           <a:prstGeom prst="rect">
             <a:avLst/>
           </a:prstGeom>
-          <a:noFill/>
+          <a:solidFill>
+            <a:srgbClr val="D6D7D8"/>
+          </a:solidFill>
           <a:ln>
             <a:noFill/>
           </a:ln>
@@ -49368,271 +49702,89 @@
           </a:fontRef>
         </p:style>
         <p:txBody>
-          <a:bodyPr rtlCol="0" anchor="t" wrap="square" lIns="109728" rIns="109728" tIns="73152" bIns="73152"/>
+          <a:bodyPr rtlCol="0" anchor="ctr"/>
           <a:lstStyle/>
           <a:p>
-            <a:pPr algn="l"/>
+            <a:pPr algn="ctr"/>
+          </a:p>
+        </p:txBody>
+      </p:sp>
+      <p:sp>
+        <p:nvSpPr>
+          <p:cNvPr id="14" name="TextBox 13"/>
+          <p:cNvSpPr txBox="1"/>
+          <p:nvPr/>
+        </p:nvSpPr>
+        <p:spPr>
+          <a:xfrm>
+            <a:off x="704088" y="4480559"/>
+            <a:ext cx="2651760" cy="1051560"/>
+          </a:xfrm>
+          <a:prstGeom prst="rect">
+            <a:avLst/>
+          </a:prstGeom>
+          <a:noFill/>
+          <a:effectLst/>
+        </p:spPr>
+        <p:txBody>
+          <a:bodyPr wrap="square" anchor="ctr" lIns="36576" rIns="36576" tIns="27432" bIns="27432">
+            <a:spAutoFit/>
+          </a:bodyPr>
+          <a:lstStyle/>
+          <a:p>
+            <a:pPr algn="l">
+              <a:spcAft>
+                <a:spcPts val="0"/>
+              </a:spcAft>
+            </a:pPr>
             <a:r>
-              <a:rPr sz="1800" b="1">
+              <a:rPr sz="1400" b="0">
                 <a:solidFill>
-                  <a:srgbClr val="212427"/>
+                  <a:srgbClr val="5A6065"/>
                 </a:solidFill>
+                <a:latin typeface="Verdana"/>
               </a:rPr>
-              <a:t>Logik</a:t>
+              <a:t>Arbeitsdefinition</a:t>
             </a:r>
           </a:p>
         </p:txBody>
       </p:sp>
       <p:sp>
         <p:nvSpPr>
-          <p:cNvPr id="8" name="Rectangle 7"/>
-          <p:cNvSpPr/>
+          <p:cNvPr id="15" name="TextBox 14"/>
+          <p:cNvSpPr txBox="1"/>
           <p:nvPr/>
         </p:nvSpPr>
         <p:spPr>
           <a:xfrm>
-            <a:off x="4407408" y="1874519"/>
-            <a:ext cx="3429000" cy="1645920"/>
+            <a:off x="3447288" y="4480559"/>
+            <a:ext cx="8046720" cy="1051560"/>
           </a:xfrm>
           <a:prstGeom prst="rect">
             <a:avLst/>
           </a:prstGeom>
           <a:noFill/>
-          <a:ln w="9525">
-            <a:solidFill>
-              <a:srgbClr val="D6D7D8"/>
-            </a:solidFill>
-          </a:ln>
           <a:effectLst/>
         </p:spPr>
-        <p:style>
-          <a:lnRef idx="1">
-            <a:schemeClr val="accent1"/>
-          </a:lnRef>
-          <a:fillRef idx="3">
-            <a:schemeClr val="accent1"/>
-          </a:fillRef>
-          <a:effectRef idx="2">
-            <a:schemeClr val="accent1"/>
-          </a:effectRef>
-          <a:fontRef idx="minor">
-            <a:schemeClr val="lt1"/>
-          </a:fontRef>
-        </p:style>
         <p:txBody>
-          <a:bodyPr rtlCol="0" anchor="ctr" wrap="square" lIns="109728" rIns="109728" tIns="73152" bIns="73152"/>
+          <a:bodyPr wrap="square" anchor="ctr" lIns="36576" rIns="36576" tIns="27432" bIns="27432">
+            <a:spAutoFit/>
+          </a:bodyPr>
           <a:lstStyle/>
           <a:p>
-            <a:pPr algn="l"/>
+            <a:pPr algn="l">
+              <a:spcAft>
+                <a:spcPts val="0"/>
+              </a:spcAft>
+            </a:pPr>
             <a:r>
               <a:rPr sz="1600" b="0">
                 <a:solidFill>
                   <a:srgbClr val="212427"/>
                 </a:solidFill>
+                <a:latin typeface="Verdana"/>
               </a:rPr>
-              <a:t>Eine Aussage ist etwas, das für sich allein wahr oder falsch sein kann.</a:t>
-            </a:r>
-          </a:p>
-        </p:txBody>
-      </p:sp>
-      <p:sp>
-        <p:nvSpPr>
-          <p:cNvPr id="9" name="Rectangle 8"/>
-          <p:cNvSpPr/>
-          <p:nvPr/>
-        </p:nvSpPr>
-        <p:spPr>
-          <a:xfrm>
-            <a:off x="4407408" y="3657600"/>
-            <a:ext cx="3429000" cy="2011680"/>
-          </a:xfrm>
-          <a:prstGeom prst="rect">
-            <a:avLst/>
-          </a:prstGeom>
-          <a:noFill/>
-          <a:ln>
-            <a:noFill/>
-          </a:ln>
-          <a:effectLst/>
-        </p:spPr>
-        <p:style>
-          <a:lnRef idx="1">
-            <a:schemeClr val="accent1"/>
-          </a:lnRef>
-          <a:fillRef idx="3">
-            <a:schemeClr val="accent1"/>
-          </a:fillRef>
-          <a:effectRef idx="2">
-            <a:schemeClr val="accent1"/>
-          </a:effectRef>
-          <a:fontRef idx="minor">
-            <a:schemeClr val="lt1"/>
-          </a:fontRef>
-        </p:style>
-        <p:txBody>
-          <a:bodyPr rtlCol="0" anchor="t" wrap="square" lIns="109728" rIns="109728" tIns="73152" bIns="73152"/>
-          <a:lstStyle/>
-          <a:p>
-            <a:pPr algn="l"/>
-            <a:r>
-              <a:rPr sz="1300" b="0">
-                <a:solidFill>
-                  <a:srgbClr val="5A6065"/>
-                </a:solidFill>
-              </a:rPr>
-              <a:t>"A, weil B und C" sind drei Aussagen: A, B, C, und außerdem die Behauptung, dass B und C der Grund für A sind. Danach hat der Beispielsatz drei bis vier Aussagen.</a:t>
-            </a:r>
-          </a:p>
-        </p:txBody>
-      </p:sp>
-      <p:sp>
-        <p:nvSpPr>
-          <p:cNvPr id="10" name="Rectangle 9"/>
-          <p:cNvSpPr/>
-          <p:nvPr/>
-        </p:nvSpPr>
-        <p:spPr>
-          <a:xfrm>
-            <a:off x="8110727" y="1280160"/>
-            <a:ext cx="3429000" cy="548640"/>
-          </a:xfrm>
-          <a:prstGeom prst="rect">
-            <a:avLst/>
-          </a:prstGeom>
-          <a:noFill/>
-          <a:ln>
-            <a:noFill/>
-          </a:ln>
-          <a:effectLst/>
-        </p:spPr>
-        <p:style>
-          <a:lnRef idx="1">
-            <a:schemeClr val="accent1"/>
-          </a:lnRef>
-          <a:fillRef idx="3">
-            <a:schemeClr val="accent1"/>
-          </a:fillRef>
-          <a:effectRef idx="2">
-            <a:schemeClr val="accent1"/>
-          </a:effectRef>
-          <a:fontRef idx="minor">
-            <a:schemeClr val="lt1"/>
-          </a:fontRef>
-        </p:style>
-        <p:txBody>
-          <a:bodyPr rtlCol="0" anchor="t" wrap="square" lIns="109728" rIns="109728" tIns="73152" bIns="73152"/>
-          <a:lstStyle/>
-          <a:p>
-            <a:pPr algn="l"/>
-            <a:r>
-              <a:rPr sz="1800" b="1">
-                <a:solidFill>
-                  <a:srgbClr val="212427"/>
-                </a:solidFill>
-              </a:rPr>
-              <a:t>NLP-Forschung (FActScore)</a:t>
-            </a:r>
-          </a:p>
-        </p:txBody>
-      </p:sp>
-      <p:sp>
-        <p:nvSpPr>
-          <p:cNvPr id="11" name="Rectangle 10"/>
-          <p:cNvSpPr/>
-          <p:nvPr/>
-        </p:nvSpPr>
-        <p:spPr>
-          <a:xfrm>
-            <a:off x="8110727" y="1874519"/>
-            <a:ext cx="3429000" cy="1645920"/>
-          </a:xfrm>
-          <a:prstGeom prst="rect">
-            <a:avLst/>
-          </a:prstGeom>
-          <a:noFill/>
-          <a:ln w="9525">
-            <a:solidFill>
-              <a:srgbClr val="D6D7D8"/>
-            </a:solidFill>
-          </a:ln>
-          <a:effectLst/>
-        </p:spPr>
-        <p:style>
-          <a:lnRef idx="1">
-            <a:schemeClr val="accent1"/>
-          </a:lnRef>
-          <a:fillRef idx="3">
-            <a:schemeClr val="accent1"/>
-          </a:fillRef>
-          <a:effectRef idx="2">
-            <a:schemeClr val="accent1"/>
-          </a:effectRef>
-          <a:fontRef idx="minor">
-            <a:schemeClr val="lt1"/>
-          </a:fontRef>
-        </p:style>
-        <p:txBody>
-          <a:bodyPr rtlCol="0" anchor="ctr" wrap="square" lIns="109728" rIns="109728" tIns="73152" bIns="73152"/>
-          <a:lstStyle/>
-          <a:p>
-            <a:pPr algn="l"/>
-            <a:r>
-              <a:rPr sz="1600" b="0">
-                <a:solidFill>
-                  <a:srgbClr val="212427"/>
-                </a:solidFill>
-              </a:rPr>
-              <a:t>Eine Aussage ist die kleinste Einheit, die eine Information trägt und sich gegen eine Quelle prüfen lässt.</a:t>
-            </a:r>
-          </a:p>
-        </p:txBody>
-      </p:sp>
-      <p:sp>
-        <p:nvSpPr>
-          <p:cNvPr id="12" name="Rectangle 11"/>
-          <p:cNvSpPr/>
-          <p:nvPr/>
-        </p:nvSpPr>
-        <p:spPr>
-          <a:xfrm>
-            <a:off x="8110727" y="3657600"/>
-            <a:ext cx="3429000" cy="2011680"/>
-          </a:xfrm>
-          <a:prstGeom prst="rect">
-            <a:avLst/>
-          </a:prstGeom>
-          <a:noFill/>
-          <a:ln>
-            <a:noFill/>
-          </a:ln>
-          <a:effectLst/>
-        </p:spPr>
-        <p:style>
-          <a:lnRef idx="1">
-            <a:schemeClr val="accent1"/>
-          </a:lnRef>
-          <a:fillRef idx="3">
-            <a:schemeClr val="accent1"/>
-          </a:fillRef>
-          <a:effectRef idx="2">
-            <a:schemeClr val="accent1"/>
-          </a:effectRef>
-          <a:fontRef idx="minor">
-            <a:schemeClr val="lt1"/>
-          </a:fontRef>
-        </p:style>
-        <p:txBody>
-          <a:bodyPr rtlCol="0" anchor="t" wrap="square" lIns="109728" rIns="109728" tIns="73152" bIns="73152"/>
-          <a:lstStyle/>
-          <a:p>
-            <a:pPr algn="l"/>
-            <a:r>
-              <a:rPr sz="1300" b="0">
-                <a:solidFill>
-                  <a:srgbClr val="5A6065"/>
-                </a:solidFill>
-              </a:rPr>
-              <a:t>Jedes Element einer Aufzählung zählt. Danach hat der Beispielsatz drei Aussagen.</a:t>
+              <a:t>Eine Aussage ist der kleinste Teil der Referenzantwort, der sich an einer Stelle im Kompendium prüfen lässt.</a:t>
             </a:r>
           </a:p>
         </p:txBody>
@@ -49665,12 +49817,20 @@
             <p:ph type="title"/>
           </p:nvPr>
         </p:nvSpPr>
-        <p:spPr/>
+        <p:spPr>
+          <a:effectLst/>
+        </p:spPr>
         <p:txBody>
           <a:bodyPr/>
           <a:lstStyle/>
           <a:p>
             <a:r>
+              <a:rPr b="0" sz="2800" cap="none">
+                <a:solidFill>
+                  <a:srgbClr val="212427"/>
+                </a:solidFill>
+                <a:latin typeface="Verdana"/>
+              </a:rPr>
               <a:t>Arbeitsdefinition</a:t>
             </a:r>
           </a:p>
@@ -49684,14 +49844,14 @@
         </p:nvSpPr>
         <p:spPr>
           <a:xfrm>
-            <a:off x="704088" y="1371600"/>
-            <a:ext cx="10789920" cy="1188720"/>
+            <a:off x="704088" y="1115568"/>
+            <a:ext cx="609600" cy="38100"/>
           </a:xfrm>
           <a:prstGeom prst="rect">
             <a:avLst/>
           </a:prstGeom>
           <a:solidFill>
-            <a:srgbClr val="FDE9BF"/>
+            <a:srgbClr val="B1063A"/>
           </a:solidFill>
           <a:ln>
             <a:noFill/>
@@ -49713,36 +49873,70 @@
           </a:fontRef>
         </p:style>
         <p:txBody>
-          <a:bodyPr rtlCol="0" anchor="ctr" wrap="square" lIns="109728" rIns="109728" tIns="73152" bIns="73152"/>
+          <a:bodyPr rtlCol="0" anchor="ctr"/>
           <a:lstStyle/>
           <a:p>
-            <a:pPr algn="l"/>
+            <a:pPr algn="ctr"/>
+          </a:p>
+        </p:txBody>
+      </p:sp>
+      <p:sp>
+        <p:nvSpPr>
+          <p:cNvPr id="5" name="TextBox 4"/>
+          <p:cNvSpPr txBox="1"/>
+          <p:nvPr/>
+        </p:nvSpPr>
+        <p:spPr>
+          <a:xfrm>
+            <a:off x="704088" y="1371600"/>
+            <a:ext cx="10789920" cy="1097280"/>
+          </a:xfrm>
+          <a:prstGeom prst="rect">
+            <a:avLst/>
+          </a:prstGeom>
+          <a:noFill/>
+          <a:effectLst/>
+        </p:spPr>
+        <p:txBody>
+          <a:bodyPr wrap="square" anchor="ctr" lIns="36576" rIns="36576" tIns="27432" bIns="27432">
+            <a:spAutoFit/>
+          </a:bodyPr>
+          <a:lstStyle/>
+          <a:p>
+            <a:pPr algn="l">
+              <a:spcAft>
+                <a:spcPts val="0"/>
+              </a:spcAft>
+            </a:pPr>
             <a:r>
               <a:rPr sz="2200" b="0">
                 <a:solidFill>
                   <a:srgbClr val="212427"/>
                 </a:solidFill>
+                <a:latin typeface="Verdana"/>
               </a:rPr>
-              <a:t>Eine Aussage ist der kleinste Teil der Referenzantwort, der sich für sich allein gegen das Kompendium prüfen lässt.</a:t>
+              <a:t>Eine Aussage ist der kleinste Teil der Referenzantwort, der sich an einer Stelle im Kompendium prüfen lässt.</a:t>
             </a:r>
           </a:p>
         </p:txBody>
       </p:sp>
       <p:sp>
         <p:nvSpPr>
-          <p:cNvPr id="5" name="Rectangle 4"/>
+          <p:cNvPr id="6" name="Rectangle 5"/>
           <p:cNvSpPr/>
           <p:nvPr/>
         </p:nvSpPr>
         <p:spPr>
           <a:xfrm>
-            <a:off x="704088" y="2926080"/>
-            <a:ext cx="457200" cy="548640"/>
+            <a:off x="704088" y="2606040"/>
+            <a:ext cx="10789920" cy="9525"/>
           </a:xfrm>
           <a:prstGeom prst="rect">
             <a:avLst/>
           </a:prstGeom>
-          <a:noFill/>
+          <a:solidFill>
+            <a:srgbClr val="D6D7D8"/>
+          </a:solidFill>
           <a:ln>
             <a:noFill/>
           </a:ln>
@@ -49763,15 +49957,47 @@
           </a:fontRef>
         </p:style>
         <p:txBody>
-          <a:bodyPr rtlCol="0" anchor="t" wrap="square" lIns="109728" rIns="109728" tIns="73152" bIns="73152"/>
+          <a:bodyPr rtlCol="0" anchor="ctr"/>
           <a:lstStyle/>
           <a:p>
-            <a:pPr algn="l"/>
+            <a:pPr algn="ctr"/>
+          </a:p>
+        </p:txBody>
+      </p:sp>
+      <p:sp>
+        <p:nvSpPr>
+          <p:cNvPr id="7" name="TextBox 6"/>
+          <p:cNvSpPr txBox="1"/>
+          <p:nvPr/>
+        </p:nvSpPr>
+        <p:spPr>
+          <a:xfrm>
+            <a:off x="704088" y="2788920"/>
+            <a:ext cx="457200" cy="640080"/>
+          </a:xfrm>
+          <a:prstGeom prst="rect">
+            <a:avLst/>
+          </a:prstGeom>
+          <a:noFill/>
+          <a:effectLst/>
+        </p:spPr>
+        <p:txBody>
+          <a:bodyPr wrap="square" anchor="ctr" lIns="36576" rIns="36576" tIns="27432" bIns="27432">
+            <a:spAutoFit/>
+          </a:bodyPr>
+          <a:lstStyle/>
+          <a:p>
+            <a:pPr algn="l">
+              <a:spcAft>
+                <a:spcPts val="0"/>
+              </a:spcAft>
+            </a:pPr>
             <a:r>
-              <a:rPr sz="1800" b="1">
+              <a:rPr sz="1800" b="0">
                 <a:solidFill>
                   <a:srgbClr val="5A6065"/>
                 </a:solidFill>
+                <a:latin typeface="Verdana"/>
               </a:rPr>
               <a:t>1</a:t>
             </a:r>
@@ -49780,98 +50006,78 @@
       </p:sp>
       <p:sp>
         <p:nvSpPr>
-          <p:cNvPr id="6" name="Rectangle 5"/>
-          <p:cNvSpPr/>
+          <p:cNvPr id="8" name="TextBox 7"/>
+          <p:cNvSpPr txBox="1"/>
           <p:nvPr/>
         </p:nvSpPr>
         <p:spPr>
           <a:xfrm>
-            <a:off x="1188720" y="2926080"/>
-            <a:ext cx="10241280" cy="548640"/>
+            <a:off x="1252728" y="2788920"/>
+            <a:ext cx="10241280" cy="640080"/>
           </a:xfrm>
           <a:prstGeom prst="rect">
             <a:avLst/>
           </a:prstGeom>
           <a:noFill/>
-          <a:ln>
-            <a:noFill/>
-          </a:ln>
           <a:effectLst/>
         </p:spPr>
-        <p:style>
-          <a:lnRef idx="1">
-            <a:schemeClr val="accent1"/>
-          </a:lnRef>
-          <a:fillRef idx="3">
-            <a:schemeClr val="accent1"/>
-          </a:fillRef>
-          <a:effectRef idx="2">
-            <a:schemeClr val="accent1"/>
-          </a:effectRef>
-          <a:fontRef idx="minor">
-            <a:schemeClr val="lt1"/>
-          </a:fontRef>
-        </p:style>
         <p:txBody>
-          <a:bodyPr rtlCol="0" anchor="ctr" wrap="square" lIns="109728" rIns="109728" tIns="73152" bIns="73152"/>
+          <a:bodyPr wrap="square" anchor="ctr" lIns="36576" rIns="36576" tIns="27432" bIns="27432">
+            <a:spAutoFit/>
+          </a:bodyPr>
           <a:lstStyle/>
           <a:p>
-            <a:pPr algn="l"/>
+            <a:pPr algn="l">
+              <a:spcAft>
+                <a:spcPts val="0"/>
+              </a:spcAft>
+            </a:pPr>
             <a:r>
               <a:rPr sz="1600" b="0">
                 <a:solidFill>
                   <a:srgbClr val="212427"/>
                 </a:solidFill>
+                <a:latin typeface="Verdana"/>
               </a:rPr>
-              <a:t>Jedes Element einer Aufzählung ist eine eigene Aussage.</a:t>
+              <a:t>Jede Handlung (dokumentieren, ersetzen) ist eine eigene Aussage.</a:t>
             </a:r>
           </a:p>
         </p:txBody>
       </p:sp>
       <p:sp>
         <p:nvSpPr>
-          <p:cNvPr id="7" name="Rectangle 6"/>
-          <p:cNvSpPr/>
+          <p:cNvPr id="9" name="TextBox 8"/>
+          <p:cNvSpPr txBox="1"/>
           <p:nvPr/>
         </p:nvSpPr>
         <p:spPr>
           <a:xfrm>
-            <a:off x="704088" y="3657600"/>
-            <a:ext cx="457200" cy="548640"/>
+            <a:off x="704088" y="3520439"/>
+            <a:ext cx="457200" cy="640080"/>
           </a:xfrm>
           <a:prstGeom prst="rect">
             <a:avLst/>
           </a:prstGeom>
           <a:noFill/>
-          <a:ln>
-            <a:noFill/>
-          </a:ln>
           <a:effectLst/>
         </p:spPr>
-        <p:style>
-          <a:lnRef idx="1">
-            <a:schemeClr val="accent1"/>
-          </a:lnRef>
-          <a:fillRef idx="3">
-            <a:schemeClr val="accent1"/>
-          </a:fillRef>
-          <a:effectRef idx="2">
-            <a:schemeClr val="accent1"/>
-          </a:effectRef>
-          <a:fontRef idx="minor">
-            <a:schemeClr val="lt1"/>
-          </a:fontRef>
-        </p:style>
         <p:txBody>
-          <a:bodyPr rtlCol="0" anchor="t" wrap="square" lIns="109728" rIns="109728" tIns="73152" bIns="73152"/>
+          <a:bodyPr wrap="square" anchor="ctr" lIns="36576" rIns="36576" tIns="27432" bIns="27432">
+            <a:spAutoFit/>
+          </a:bodyPr>
           <a:lstStyle/>
           <a:p>
-            <a:pPr algn="l"/>
+            <a:pPr algn="l">
+              <a:spcAft>
+                <a:spcPts val="0"/>
+              </a:spcAft>
+            </a:pPr>
             <a:r>
-              <a:rPr sz="1800" b="1">
+              <a:rPr sz="1800" b="0">
                 <a:solidFill>
                   <a:srgbClr val="5A6065"/>
                 </a:solidFill>
+                <a:latin typeface="Verdana"/>
               </a:rPr>
               <a:t>2</a:t>
             </a:r>
@@ -49880,98 +50086,78 @@
       </p:sp>
       <p:sp>
         <p:nvSpPr>
-          <p:cNvPr id="8" name="Rectangle 7"/>
-          <p:cNvSpPr/>
+          <p:cNvPr id="10" name="TextBox 9"/>
+          <p:cNvSpPr txBox="1"/>
           <p:nvPr/>
         </p:nvSpPr>
         <p:spPr>
           <a:xfrm>
-            <a:off x="1188720" y="3657600"/>
-            <a:ext cx="10241280" cy="548640"/>
+            <a:off x="1252728" y="3520439"/>
+            <a:ext cx="10241280" cy="640080"/>
           </a:xfrm>
           <a:prstGeom prst="rect">
             <a:avLst/>
           </a:prstGeom>
           <a:noFill/>
-          <a:ln>
-            <a:noFill/>
-          </a:ln>
           <a:effectLst/>
         </p:spPr>
-        <p:style>
-          <a:lnRef idx="1">
-            <a:schemeClr val="accent1"/>
-          </a:lnRef>
-          <a:fillRef idx="3">
-            <a:schemeClr val="accent1"/>
-          </a:fillRef>
-          <a:effectRef idx="2">
-            <a:schemeClr val="accent1"/>
-          </a:effectRef>
-          <a:fontRef idx="minor">
-            <a:schemeClr val="lt1"/>
-          </a:fontRef>
-        </p:style>
         <p:txBody>
-          <a:bodyPr rtlCol="0" anchor="ctr" wrap="square" lIns="109728" rIns="109728" tIns="73152" bIns="73152"/>
+          <a:bodyPr wrap="square" anchor="ctr" lIns="36576" rIns="36576" tIns="27432" bIns="27432">
+            <a:spAutoFit/>
+          </a:bodyPr>
           <a:lstStyle/>
           <a:p>
-            <a:pPr algn="l"/>
+            <a:pPr algn="l">
+              <a:spcAft>
+                <a:spcPts val="0"/>
+              </a:spcAft>
+            </a:pPr>
             <a:r>
               <a:rPr sz="1600" b="0">
                 <a:solidFill>
                   <a:srgbClr val="212427"/>
                 </a:solidFill>
+                <a:latin typeface="Verdana"/>
               </a:rPr>
-              <a:t>Jede Begründung (weil, da) und jeder Zweck (um zu) ist eine eigene Aussage.</a:t>
+              <a:t>Jede Begründung (weil, da) und jeder Zweck (damit, um zu) ist eine eigene Aussage.</a:t>
             </a:r>
           </a:p>
         </p:txBody>
       </p:sp>
       <p:sp>
         <p:nvSpPr>
-          <p:cNvPr id="9" name="Rectangle 8"/>
-          <p:cNvSpPr/>
+          <p:cNvPr id="11" name="TextBox 10"/>
+          <p:cNvSpPr txBox="1"/>
           <p:nvPr/>
         </p:nvSpPr>
         <p:spPr>
           <a:xfrm>
-            <a:off x="704088" y="4389120"/>
-            <a:ext cx="457200" cy="548640"/>
+            <a:off x="704088" y="4251960"/>
+            <a:ext cx="457200" cy="640080"/>
           </a:xfrm>
           <a:prstGeom prst="rect">
             <a:avLst/>
           </a:prstGeom>
           <a:noFill/>
-          <a:ln>
-            <a:noFill/>
-          </a:ln>
           <a:effectLst/>
         </p:spPr>
-        <p:style>
-          <a:lnRef idx="1">
-            <a:schemeClr val="accent1"/>
-          </a:lnRef>
-          <a:fillRef idx="3">
-            <a:schemeClr val="accent1"/>
-          </a:fillRef>
-          <a:effectRef idx="2">
-            <a:schemeClr val="accent1"/>
-          </a:effectRef>
-          <a:fontRef idx="minor">
-            <a:schemeClr val="lt1"/>
-          </a:fontRef>
-        </p:style>
         <p:txBody>
-          <a:bodyPr rtlCol="0" anchor="t" wrap="square" lIns="109728" rIns="109728" tIns="73152" bIns="73152"/>
+          <a:bodyPr wrap="square" anchor="ctr" lIns="36576" rIns="36576" tIns="27432" bIns="27432">
+            <a:spAutoFit/>
+          </a:bodyPr>
           <a:lstStyle/>
           <a:p>
-            <a:pPr algn="l"/>
+            <a:pPr algn="l">
+              <a:spcAft>
+                <a:spcPts val="0"/>
+              </a:spcAft>
+            </a:pPr>
             <a:r>
-              <a:rPr sz="1800" b="1">
+              <a:rPr sz="1800" b="0">
                 <a:solidFill>
                   <a:srgbClr val="5A6065"/>
                 </a:solidFill>
+                <a:latin typeface="Verdana"/>
               </a:rPr>
               <a:t>3</a:t>
             </a:r>
@@ -49980,48 +50166,118 @@
       </p:sp>
       <p:sp>
         <p:nvSpPr>
-          <p:cNvPr id="10" name="Rectangle 9"/>
-          <p:cNvSpPr/>
+          <p:cNvPr id="12" name="TextBox 11"/>
+          <p:cNvSpPr txBox="1"/>
           <p:nvPr/>
         </p:nvSpPr>
         <p:spPr>
           <a:xfrm>
-            <a:off x="1188720" y="4389120"/>
-            <a:ext cx="10241280" cy="548640"/>
+            <a:off x="1252728" y="4251960"/>
+            <a:ext cx="10241280" cy="640080"/>
           </a:xfrm>
           <a:prstGeom prst="rect">
             <a:avLst/>
           </a:prstGeom>
           <a:noFill/>
-          <a:ln>
-            <a:noFill/>
-          </a:ln>
           <a:effectLst/>
         </p:spPr>
-        <p:style>
-          <a:lnRef idx="1">
-            <a:schemeClr val="accent1"/>
-          </a:lnRef>
-          <a:fillRef idx="3">
-            <a:schemeClr val="accent1"/>
-          </a:fillRef>
-          <a:effectRef idx="2">
-            <a:schemeClr val="accent1"/>
-          </a:effectRef>
-          <a:fontRef idx="minor">
-            <a:schemeClr val="lt1"/>
-          </a:fontRef>
-        </p:style>
         <p:txBody>
-          <a:bodyPr rtlCol="0" anchor="ctr" wrap="square" lIns="109728" rIns="109728" tIns="73152" bIns="73152"/>
+          <a:bodyPr wrap="square" anchor="ctr" lIns="36576" rIns="36576" tIns="27432" bIns="27432">
+            <a:spAutoFit/>
+          </a:bodyPr>
           <a:lstStyle/>
           <a:p>
-            <a:pPr algn="l"/>
+            <a:pPr algn="l">
+              <a:spcAft>
+                <a:spcPts val="0"/>
+              </a:spcAft>
+            </a:pPr>
             <a:r>
               <a:rPr sz="1600" b="0">
                 <a:solidFill>
                   <a:srgbClr val="212427"/>
                 </a:solidFill>
+                <a:latin typeface="Verdana"/>
+              </a:rPr>
+              <a:t>Eine Aufzählung, die das Kompendium als eine Liste nennt, bleibt eine Aussage.</a:t>
+            </a:r>
+          </a:p>
+        </p:txBody>
+      </p:sp>
+      <p:sp>
+        <p:nvSpPr>
+          <p:cNvPr id="13" name="TextBox 12"/>
+          <p:cNvSpPr txBox="1"/>
+          <p:nvPr/>
+        </p:nvSpPr>
+        <p:spPr>
+          <a:xfrm>
+            <a:off x="704088" y="4983480"/>
+            <a:ext cx="457200" cy="640080"/>
+          </a:xfrm>
+          <a:prstGeom prst="rect">
+            <a:avLst/>
+          </a:prstGeom>
+          <a:noFill/>
+          <a:effectLst/>
+        </p:spPr>
+        <p:txBody>
+          <a:bodyPr wrap="square" anchor="ctr" lIns="36576" rIns="36576" tIns="27432" bIns="27432">
+            <a:spAutoFit/>
+          </a:bodyPr>
+          <a:lstStyle/>
+          <a:p>
+            <a:pPr algn="l">
+              <a:spcAft>
+                <a:spcPts val="0"/>
+              </a:spcAft>
+            </a:pPr>
+            <a:r>
+              <a:rPr sz="1800" b="0">
+                <a:solidFill>
+                  <a:srgbClr val="5A6065"/>
+                </a:solidFill>
+                <a:latin typeface="Verdana"/>
+              </a:rPr>
+              <a:t>4</a:t>
+            </a:r>
+          </a:p>
+        </p:txBody>
+      </p:sp>
+      <p:sp>
+        <p:nvSpPr>
+          <p:cNvPr id="14" name="TextBox 13"/>
+          <p:cNvSpPr txBox="1"/>
+          <p:nvPr/>
+        </p:nvSpPr>
+        <p:spPr>
+          <a:xfrm>
+            <a:off x="1252728" y="4983480"/>
+            <a:ext cx="10241280" cy="640080"/>
+          </a:xfrm>
+          <a:prstGeom prst="rect">
+            <a:avLst/>
+          </a:prstGeom>
+          <a:noFill/>
+          <a:effectLst/>
+        </p:spPr>
+        <p:txBody>
+          <a:bodyPr wrap="square" anchor="ctr" lIns="36576" rIns="36576" tIns="27432" bIns="27432">
+            <a:spAutoFit/>
+          </a:bodyPr>
+          <a:lstStyle/>
+          <a:p>
+            <a:pPr algn="l">
+              <a:spcAft>
+                <a:spcPts val="0"/>
+              </a:spcAft>
+            </a:pPr>
+            <a:r>
+              <a:rPr sz="1600" b="0">
+                <a:solidFill>
+                  <a:srgbClr val="212427"/>
+                </a:solidFill>
+                <a:latin typeface="Verdana"/>
               </a:rPr>
               <a:t>Wiederholungen und Füllwörter zählen nicht.</a:t>
             </a:r>
@@ -50056,13 +50312,21 @@
             <p:ph type="title"/>
           </p:nvPr>
         </p:nvSpPr>
-        <p:spPr/>
+        <p:spPr>
+          <a:effectLst/>
+        </p:spPr>
         <p:txBody>
           <a:bodyPr/>
           <a:lstStyle/>
           <a:p>
             <a:r>
-              <a:t>Beispiel 1: Wie viele Aussagen?</a:t>
+              <a:rPr b="0" sz="2800" cap="none">
+                <a:solidFill>
+                  <a:srgbClr val="212427"/>
+                </a:solidFill>
+                <a:latin typeface="Verdana"/>
+              </a:rPr>
+              <a:t>Beispiel A: Wie viele Aussagen?</a:t>
             </a:r>
           </a:p>
         </p:txBody>
@@ -50075,17 +50339,17 @@
         </p:nvSpPr>
         <p:spPr>
           <a:xfrm>
-            <a:off x="704088" y="1143000"/>
-            <a:ext cx="10789920" cy="960120"/>
+            <a:off x="704088" y="1115568"/>
+            <a:ext cx="609600" cy="38100"/>
           </a:xfrm>
           <a:prstGeom prst="rect">
             <a:avLst/>
           </a:prstGeom>
-          <a:noFill/>
-          <a:ln w="9525">
-            <a:solidFill>
-              <a:srgbClr val="D6D7D8"/>
-            </a:solidFill>
+          <a:solidFill>
+            <a:srgbClr val="B1063A"/>
+          </a:solidFill>
+          <a:ln>
+            <a:noFill/>
           </a:ln>
           <a:effectLst/>
         </p:spPr>
@@ -50104,36 +50368,70 @@
           </a:fontRef>
         </p:style>
         <p:txBody>
-          <a:bodyPr rtlCol="0" anchor="ctr" wrap="square" lIns="109728" rIns="109728" tIns="73152" bIns="73152"/>
+          <a:bodyPr rtlCol="0" anchor="ctr"/>
           <a:lstStyle/>
           <a:p>
-            <a:pPr algn="l"/>
+            <a:pPr algn="ctr"/>
+          </a:p>
+        </p:txBody>
+      </p:sp>
+      <p:sp>
+        <p:nvSpPr>
+          <p:cNvPr id="5" name="TextBox 4"/>
+          <p:cNvSpPr txBox="1"/>
+          <p:nvPr/>
+        </p:nvSpPr>
+        <p:spPr>
+          <a:xfrm>
+            <a:off x="704088" y="1188720"/>
+            <a:ext cx="10789920" cy="685800"/>
+          </a:xfrm>
+          <a:prstGeom prst="rect">
+            <a:avLst/>
+          </a:prstGeom>
+          <a:noFill/>
+          <a:effectLst/>
+        </p:spPr>
+        <p:txBody>
+          <a:bodyPr wrap="square" anchor="ctr" lIns="36576" rIns="36576" tIns="27432" bIns="27432">
+            <a:spAutoFit/>
+          </a:bodyPr>
+          <a:lstStyle/>
+          <a:p>
+            <a:pPr algn="l">
+              <a:spcAft>
+                <a:spcPts val="0"/>
+              </a:spcAft>
+            </a:pPr>
             <a:r>
-              <a:rPr sz="1400" b="0">
+              <a:rPr sz="1500" b="0">
                 <a:solidFill>
                   <a:srgbClr val="212427"/>
                 </a:solidFill>
+                <a:latin typeface="Verdana"/>
               </a:rPr>
-              <a:t>Administrationskonten sollten durch Mehr-Faktor-Authentisierung geschützt werden, da sie ein besonders hohes Schadenspotenzial besitzen und bevorzugtes Angriffsziel darstellen.</a:t>
+              <a:t>Die Anforderungen müssen dokumentiert werden, damit sie identifiziert und bei Planung, Betrieb und Beschaffung berücksichtigt werden können.</a:t>
             </a:r>
           </a:p>
         </p:txBody>
       </p:sp>
       <p:sp>
         <p:nvSpPr>
-          <p:cNvPr id="5" name="Rectangle 4"/>
+          <p:cNvPr id="6" name="Rectangle 5"/>
           <p:cNvSpPr/>
           <p:nvPr/>
         </p:nvSpPr>
         <p:spPr>
           <a:xfrm>
-            <a:off x="704088" y="2331720"/>
-            <a:ext cx="1828800" cy="1051560"/>
+            <a:off x="704088" y="1920240"/>
+            <a:ext cx="10789920" cy="9525"/>
           </a:xfrm>
           <a:prstGeom prst="rect">
             <a:avLst/>
           </a:prstGeom>
-          <a:noFill/>
+          <a:solidFill>
+            <a:srgbClr val="D6D7D8"/>
+          </a:solidFill>
           <a:ln>
             <a:noFill/>
           </a:ln>
@@ -50154,40 +50452,152 @@
           </a:fontRef>
         </p:style>
         <p:txBody>
-          <a:bodyPr rtlCol="0" anchor="ctr" wrap="square" lIns="109728" rIns="109728" tIns="73152" bIns="73152"/>
+          <a:bodyPr rtlCol="0" anchor="ctr"/>
           <a:lstStyle/>
           <a:p>
-            <a:pPr algn="l"/>
+            <a:pPr algn="ctr"/>
+          </a:p>
+        </p:txBody>
+      </p:sp>
+      <p:sp>
+        <p:nvSpPr>
+          <p:cNvPr id="7" name="TextBox 6"/>
+          <p:cNvSpPr txBox="1"/>
+          <p:nvPr/>
+        </p:nvSpPr>
+        <p:spPr>
+          <a:xfrm>
+            <a:off x="704088" y="1965960"/>
+            <a:ext cx="2103120" cy="457200"/>
+          </a:xfrm>
+          <a:prstGeom prst="rect">
+            <a:avLst/>
+          </a:prstGeom>
+          <a:noFill/>
+          <a:effectLst/>
+        </p:spPr>
+        <p:txBody>
+          <a:bodyPr wrap="square" anchor="ctr" lIns="36576" rIns="36576" tIns="27432" bIns="27432">
+            <a:spAutoFit/>
+          </a:bodyPr>
+          <a:lstStyle/>
+          <a:p>
+            <a:pPr algn="l">
+              <a:spcAft>
+                <a:spcPts val="0"/>
+              </a:spcAft>
+            </a:pPr>
             <a:r>
-              <a:rPr sz="1200" b="1">
+              <a:rPr sz="1200" b="0">
                 <a:solidFill>
                   <a:srgbClr val="5A6065"/>
                 </a:solidFill>
+                <a:latin typeface="Verdana"/>
               </a:rPr>
-              <a:t>Alltag</a:t>
+              <a:t>Alltag, ganz</a:t>
             </a:r>
           </a:p>
         </p:txBody>
       </p:sp>
       <p:sp>
         <p:nvSpPr>
-          <p:cNvPr id="6" name="Rectangle 5"/>
+          <p:cNvPr id="8" name="TextBox 7"/>
+          <p:cNvSpPr txBox="1"/>
+          <p:nvPr/>
+        </p:nvSpPr>
+        <p:spPr>
+          <a:xfrm>
+            <a:off x="2898648" y="1965960"/>
+            <a:ext cx="7589520" cy="457200"/>
+          </a:xfrm>
+          <a:prstGeom prst="rect">
+            <a:avLst/>
+          </a:prstGeom>
+          <a:noFill/>
+          <a:effectLst/>
+        </p:spPr>
+        <p:txBody>
+          <a:bodyPr wrap="square" anchor="ctr" lIns="36576" rIns="36576" tIns="27432" bIns="27432">
+            <a:spAutoFit/>
+          </a:bodyPr>
+          <a:lstStyle/>
+          <a:p>
+            <a:pPr algn="l">
+              <a:spcAft>
+                <a:spcPts val="100"/>
+              </a:spcAft>
+            </a:pPr>
+            <a:r>
+              <a:rPr sz="1100" b="0">
+                <a:solidFill>
+                  <a:srgbClr val="212427"/>
+                </a:solidFill>
+                <a:latin typeface="Verdana"/>
+              </a:rPr>
+              <a:t>der ganze Satz</a:t>
+            </a:r>
+          </a:p>
+        </p:txBody>
+      </p:sp>
+      <p:sp>
+        <p:nvSpPr>
+          <p:cNvPr id="9" name="TextBox 8"/>
+          <p:cNvSpPr txBox="1"/>
+          <p:nvPr/>
+        </p:nvSpPr>
+        <p:spPr>
+          <a:xfrm>
+            <a:off x="10579608" y="1965960"/>
+            <a:ext cx="914400" cy="457200"/>
+          </a:xfrm>
+          <a:prstGeom prst="rect">
+            <a:avLst/>
+          </a:prstGeom>
+          <a:noFill/>
+          <a:effectLst/>
+        </p:spPr>
+        <p:txBody>
+          <a:bodyPr wrap="square" anchor="ctr" lIns="36576" rIns="36576" tIns="27432" bIns="27432">
+            <a:spAutoFit/>
+          </a:bodyPr>
+          <a:lstStyle/>
+          <a:p>
+            <a:pPr algn="r">
+              <a:spcAft>
+                <a:spcPts val="0"/>
+              </a:spcAft>
+            </a:pPr>
+            <a:r>
+              <a:rPr sz="2600" b="0">
+                <a:solidFill>
+                  <a:srgbClr val="5A6065"/>
+                </a:solidFill>
+                <a:latin typeface="Verdana"/>
+              </a:rPr>
+              <a:t>1</a:t>
+            </a:r>
+          </a:p>
+        </p:txBody>
+      </p:sp>
+      <p:sp>
+        <p:nvSpPr>
+          <p:cNvPr id="10" name="Rectangle 9"/>
           <p:cNvSpPr/>
           <p:nvPr/>
         </p:nvSpPr>
         <p:spPr>
           <a:xfrm>
-            <a:off x="2514600" y="2441448"/>
-            <a:ext cx="7680960" cy="832103"/>
+            <a:off x="704088" y="2423160"/>
+            <a:ext cx="10789920" cy="9525"/>
           </a:xfrm>
           <a:prstGeom prst="rect">
             <a:avLst/>
           </a:prstGeom>
-          <a:noFill/>
-          <a:ln w="9525">
-            <a:solidFill>
-              <a:srgbClr val="212427"/>
-            </a:solidFill>
+          <a:solidFill>
+            <a:srgbClr val="D6D7D8"/>
+          </a:solidFill>
+          <a:ln>
+            <a:noFill/>
           </a:ln>
           <a:effectLst/>
         </p:spPr>
@@ -50206,36 +50616,166 @@
           </a:fontRef>
         </p:style>
         <p:txBody>
-          <a:bodyPr rtlCol="0" anchor="ctr" wrap="square" lIns="109728" rIns="109728" tIns="73152" bIns="73152"/>
+          <a:bodyPr rtlCol="0" anchor="ctr"/>
           <a:lstStyle/>
           <a:p>
             <a:pPr algn="ctr"/>
+          </a:p>
+        </p:txBody>
+      </p:sp>
+      <p:sp>
+        <p:nvSpPr>
+          <p:cNvPr id="11" name="TextBox 10"/>
+          <p:cNvSpPr txBox="1"/>
+          <p:nvPr/>
+        </p:nvSpPr>
+        <p:spPr>
+          <a:xfrm>
+            <a:off x="704088" y="2423160"/>
+            <a:ext cx="2103120" cy="731520"/>
+          </a:xfrm>
+          <a:prstGeom prst="rect">
+            <a:avLst/>
+          </a:prstGeom>
+          <a:noFill/>
+          <a:effectLst/>
+        </p:spPr>
+        <p:txBody>
+          <a:bodyPr wrap="square" anchor="ctr" lIns="36576" rIns="36576" tIns="27432" bIns="27432">
+            <a:spAutoFit/>
+          </a:bodyPr>
+          <a:lstStyle/>
+          <a:p>
+            <a:pPr algn="l">
+              <a:spcAft>
+                <a:spcPts val="0"/>
+              </a:spcAft>
+            </a:pPr>
             <a:r>
               <a:rPr sz="1200" b="0">
                 <a:solidFill>
-                  <a:srgbClr val="212427"/>
+                  <a:srgbClr val="5A6065"/>
                 </a:solidFill>
+                <a:latin typeface="Verdana"/>
               </a:rPr>
-              <a:t>Administrationskonten sollten durch MFA geschützt werden, da sie ein hohes Schadenspotenzial besitzen und bevorzugtes Angriffsziel darstellen.</a:t>
+              <a:t>Alltag, feiner</a:t>
             </a:r>
           </a:p>
         </p:txBody>
       </p:sp>
       <p:sp>
         <p:nvSpPr>
-          <p:cNvPr id="7" name="Rectangle 6"/>
+          <p:cNvPr id="12" name="TextBox 11"/>
+          <p:cNvSpPr txBox="1"/>
+          <p:nvPr/>
+        </p:nvSpPr>
+        <p:spPr>
+          <a:xfrm>
+            <a:off x="2898648" y="2423160"/>
+            <a:ext cx="7589520" cy="731520"/>
+          </a:xfrm>
+          <a:prstGeom prst="rect">
+            <a:avLst/>
+          </a:prstGeom>
+          <a:noFill/>
+          <a:effectLst/>
+        </p:spPr>
+        <p:txBody>
+          <a:bodyPr wrap="square" anchor="ctr" lIns="36576" rIns="36576" tIns="27432" bIns="27432">
+            <a:spAutoFit/>
+          </a:bodyPr>
+          <a:lstStyle/>
+          <a:p>
+            <a:pPr algn="l">
+              <a:spcAft>
+                <a:spcPts val="100"/>
+              </a:spcAft>
+            </a:pPr>
+            <a:r>
+              <a:rPr sz="1100" b="0">
+                <a:solidFill>
+                  <a:srgbClr val="212427"/>
+                </a:solidFill>
+                <a:latin typeface="Verdana"/>
+              </a:rPr>
+              <a:t>1) Die Anforderungen müssen dokumentiert werden</a:t>
+            </a:r>
+          </a:p>
+          <a:p>
+            <a:pPr algn="l">
+              <a:spcAft>
+                <a:spcPts val="100"/>
+              </a:spcAft>
+            </a:pPr>
+            <a:r>
+              <a:rPr sz="1100" b="0">
+                <a:solidFill>
+                  <a:srgbClr val="212427"/>
+                </a:solidFill>
+                <a:latin typeface="Verdana"/>
+              </a:rPr>
+              <a:t>2) damit sie identifiziert und bei Planung, Betrieb und Beschaffung berücksichtigt werden können</a:t>
+            </a:r>
+          </a:p>
+        </p:txBody>
+      </p:sp>
+      <p:sp>
+        <p:nvSpPr>
+          <p:cNvPr id="13" name="TextBox 12"/>
+          <p:cNvSpPr txBox="1"/>
+          <p:nvPr/>
+        </p:nvSpPr>
+        <p:spPr>
+          <a:xfrm>
+            <a:off x="10579608" y="2423160"/>
+            <a:ext cx="914400" cy="731520"/>
+          </a:xfrm>
+          <a:prstGeom prst="rect">
+            <a:avLst/>
+          </a:prstGeom>
+          <a:noFill/>
+          <a:effectLst/>
+        </p:spPr>
+        <p:txBody>
+          <a:bodyPr wrap="square" anchor="ctr" lIns="36576" rIns="36576" tIns="27432" bIns="27432">
+            <a:spAutoFit/>
+          </a:bodyPr>
+          <a:lstStyle/>
+          <a:p>
+            <a:pPr algn="r">
+              <a:spcAft>
+                <a:spcPts val="0"/>
+              </a:spcAft>
+            </a:pPr>
+            <a:r>
+              <a:rPr sz="2600" b="0">
+                <a:solidFill>
+                  <a:srgbClr val="5A6065"/>
+                </a:solidFill>
+                <a:latin typeface="Verdana"/>
+              </a:rPr>
+              <a:t>2</a:t>
+            </a:r>
+          </a:p>
+        </p:txBody>
+      </p:sp>
+      <p:sp>
+        <p:nvSpPr>
+          <p:cNvPr id="14" name="Rectangle 13"/>
           <p:cNvSpPr/>
           <p:nvPr/>
         </p:nvSpPr>
         <p:spPr>
           <a:xfrm>
-            <a:off x="10332720" y="2331720"/>
-            <a:ext cx="1188720" cy="1051560"/>
+            <a:off x="704088" y="3154680"/>
+            <a:ext cx="10789920" cy="9525"/>
           </a:xfrm>
           <a:prstGeom prst="rect">
             <a:avLst/>
           </a:prstGeom>
-          <a:noFill/>
+          <a:solidFill>
+            <a:srgbClr val="D6D7D8"/>
+          </a:solidFill>
           <a:ln>
             <a:noFill/>
           </a:ln>
@@ -50256,36 +50796,214 @@
           </a:fontRef>
         </p:style>
         <p:txBody>
-          <a:bodyPr rtlCol="0" anchor="ctr" wrap="square" lIns="109728" rIns="109728" tIns="73152" bIns="73152"/>
+          <a:bodyPr rtlCol="0" anchor="ctr"/>
           <a:lstStyle/>
           <a:p>
-            <a:pPr algn="r"/>
+            <a:pPr algn="ctr"/>
+          </a:p>
+        </p:txBody>
+      </p:sp>
+      <p:sp>
+        <p:nvSpPr>
+          <p:cNvPr id="15" name="TextBox 14"/>
+          <p:cNvSpPr txBox="1"/>
+          <p:nvPr/>
+        </p:nvSpPr>
+        <p:spPr>
+          <a:xfrm>
+            <a:off x="704088" y="3154680"/>
+            <a:ext cx="2103120" cy="1554480"/>
+          </a:xfrm>
+          <a:prstGeom prst="rect">
+            <a:avLst/>
+          </a:prstGeom>
+          <a:noFill/>
+          <a:effectLst/>
+        </p:spPr>
+        <p:txBody>
+          <a:bodyPr wrap="square" anchor="ctr" lIns="36576" rIns="36576" tIns="27432" bIns="27432">
+            <a:spAutoFit/>
+          </a:bodyPr>
+          <a:lstStyle/>
+          <a:p>
+            <a:pPr algn="l">
+              <a:spcAft>
+                <a:spcPts val="0"/>
+              </a:spcAft>
+            </a:pPr>
             <a:r>
-              <a:rPr sz="2400" b="1">
+              <a:rPr sz="1200" b="0">
                 <a:solidFill>
-                  <a:srgbClr val="212427"/>
+                  <a:srgbClr val="5A6065"/>
                 </a:solidFill>
+                <a:latin typeface="Verdana"/>
               </a:rPr>
-              <a:t>1 (oder 2)</a:t>
+              <a:t>Logik</a:t>
             </a:r>
           </a:p>
         </p:txBody>
       </p:sp>
       <p:sp>
         <p:nvSpPr>
-          <p:cNvPr id="8" name="Rectangle 7"/>
+          <p:cNvPr id="16" name="TextBox 15"/>
+          <p:cNvSpPr txBox="1"/>
+          <p:nvPr/>
+        </p:nvSpPr>
+        <p:spPr>
+          <a:xfrm>
+            <a:off x="2898648" y="3154680"/>
+            <a:ext cx="7589520" cy="1554480"/>
+          </a:xfrm>
+          <a:prstGeom prst="rect">
+            <a:avLst/>
+          </a:prstGeom>
+          <a:noFill/>
+          <a:effectLst/>
+        </p:spPr>
+        <p:txBody>
+          <a:bodyPr wrap="square" anchor="ctr" lIns="36576" rIns="36576" tIns="27432" bIns="27432">
+            <a:spAutoFit/>
+          </a:bodyPr>
+          <a:lstStyle/>
+          <a:p>
+            <a:pPr algn="l">
+              <a:spcAft>
+                <a:spcPts val="100"/>
+              </a:spcAft>
+            </a:pPr>
+            <a:r>
+              <a:rPr sz="1000" b="0">
+                <a:solidFill>
+                  <a:srgbClr val="212427"/>
+                </a:solidFill>
+                <a:latin typeface="Verdana"/>
+              </a:rPr>
+              <a:t>1) Die Anforderungen müssen dokumentiert werden.</a:t>
+            </a:r>
+          </a:p>
+          <a:p>
+            <a:pPr algn="l">
+              <a:spcAft>
+                <a:spcPts val="100"/>
+              </a:spcAft>
+            </a:pPr>
+            <a:r>
+              <a:rPr sz="1000" b="0">
+                <a:solidFill>
+                  <a:srgbClr val="212427"/>
+                </a:solidFill>
+                <a:latin typeface="Verdana"/>
+              </a:rPr>
+              <a:t>2) Dokumentierte Anforderungen können identifiziert werden.</a:t>
+            </a:r>
+          </a:p>
+          <a:p>
+            <a:pPr algn="l">
+              <a:spcAft>
+                <a:spcPts val="100"/>
+              </a:spcAft>
+            </a:pPr>
+            <a:r>
+              <a:rPr sz="1000" b="0">
+                <a:solidFill>
+                  <a:srgbClr val="212427"/>
+                </a:solidFill>
+                <a:latin typeface="Verdana"/>
+              </a:rPr>
+              <a:t>3) Dokumentierte Anforderungen können bei der Planung berücksichtigt werden.</a:t>
+            </a:r>
+          </a:p>
+          <a:p>
+            <a:pPr algn="l">
+              <a:spcAft>
+                <a:spcPts val="100"/>
+              </a:spcAft>
+            </a:pPr>
+            <a:r>
+              <a:rPr sz="1000" b="0">
+                <a:solidFill>
+                  <a:srgbClr val="212427"/>
+                </a:solidFill>
+                <a:latin typeface="Verdana"/>
+              </a:rPr>
+              <a:t>4) ... beim Betrieb ...</a:t>
+            </a:r>
+          </a:p>
+          <a:p>
+            <a:pPr algn="l">
+              <a:spcAft>
+                <a:spcPts val="100"/>
+              </a:spcAft>
+            </a:pPr>
+            <a:r>
+              <a:rPr sz="1000" b="0">
+                <a:solidFill>
+                  <a:srgbClr val="212427"/>
+                </a:solidFill>
+                <a:latin typeface="Verdana"/>
+              </a:rPr>
+              <a:t>5) ... bei der Beschaffung ...</a:t>
+            </a:r>
+          </a:p>
+        </p:txBody>
+      </p:sp>
+      <p:sp>
+        <p:nvSpPr>
+          <p:cNvPr id="17" name="TextBox 16"/>
+          <p:cNvSpPr txBox="1"/>
+          <p:nvPr/>
+        </p:nvSpPr>
+        <p:spPr>
+          <a:xfrm>
+            <a:off x="10579608" y="3154680"/>
+            <a:ext cx="914400" cy="1554480"/>
+          </a:xfrm>
+          <a:prstGeom prst="rect">
+            <a:avLst/>
+          </a:prstGeom>
+          <a:noFill/>
+          <a:effectLst/>
+        </p:spPr>
+        <p:txBody>
+          <a:bodyPr wrap="square" anchor="ctr" lIns="36576" rIns="36576" tIns="27432" bIns="27432">
+            <a:spAutoFit/>
+          </a:bodyPr>
+          <a:lstStyle/>
+          <a:p>
+            <a:pPr algn="r">
+              <a:spcAft>
+                <a:spcPts val="0"/>
+              </a:spcAft>
+            </a:pPr>
+            <a:r>
+              <a:rPr sz="2600" b="0">
+                <a:solidFill>
+                  <a:srgbClr val="5A6065"/>
+                </a:solidFill>
+                <a:latin typeface="Verdana"/>
+              </a:rPr>
+              <a:t>5</a:t>
+            </a:r>
+          </a:p>
+        </p:txBody>
+      </p:sp>
+      <p:sp>
+        <p:nvSpPr>
+          <p:cNvPr id="18" name="Rectangle 17"/>
           <p:cNvSpPr/>
           <p:nvPr/>
         </p:nvSpPr>
         <p:spPr>
           <a:xfrm>
-            <a:off x="704088" y="3493008"/>
-            <a:ext cx="1828800" cy="1051560"/>
+            <a:off x="704088" y="4709160"/>
+            <a:ext cx="10789920" cy="9525"/>
           </a:xfrm>
           <a:prstGeom prst="rect">
             <a:avLst/>
           </a:prstGeom>
-          <a:noFill/>
+          <a:solidFill>
+            <a:srgbClr val="D6D7D8"/>
+          </a:solidFill>
           <a:ln>
             <a:noFill/>
           </a:ln>
@@ -50306,40 +51024,216 @@
           </a:fontRef>
         </p:style>
         <p:txBody>
-          <a:bodyPr rtlCol="0" anchor="ctr" wrap="square" lIns="109728" rIns="109728" tIns="73152" bIns="73152"/>
+          <a:bodyPr rtlCol="0" anchor="ctr"/>
           <a:lstStyle/>
           <a:p>
-            <a:pPr algn="l"/>
+            <a:pPr algn="ctr"/>
+          </a:p>
+        </p:txBody>
+      </p:sp>
+      <p:sp>
+        <p:nvSpPr>
+          <p:cNvPr id="19" name="TextBox 18"/>
+          <p:cNvSpPr txBox="1"/>
+          <p:nvPr/>
+        </p:nvSpPr>
+        <p:spPr>
+          <a:xfrm>
+            <a:off x="704088" y="4709160"/>
+            <a:ext cx="2103120" cy="960120"/>
+          </a:xfrm>
+          <a:prstGeom prst="rect">
+            <a:avLst/>
+          </a:prstGeom>
+          <a:noFill/>
+          <a:effectLst/>
+        </p:spPr>
+        <p:txBody>
+          <a:bodyPr wrap="square" anchor="ctr" lIns="36576" rIns="36576" tIns="27432" bIns="27432">
+            <a:spAutoFit/>
+          </a:bodyPr>
+          <a:lstStyle/>
+          <a:p>
+            <a:pPr algn="l">
+              <a:spcAft>
+                <a:spcPts val="0"/>
+              </a:spcAft>
+            </a:pPr>
             <a:r>
-              <a:rPr sz="1200" b="1">
+              <a:rPr sz="1200" b="0">
                 <a:solidFill>
                   <a:srgbClr val="5A6065"/>
                 </a:solidFill>
+                <a:latin typeface="Verdana"/>
               </a:rPr>
-              <a:t>Logik</a:t>
+              <a:t>Arbeitsdefinition</a:t>
             </a:r>
           </a:p>
         </p:txBody>
       </p:sp>
       <p:sp>
         <p:nvSpPr>
-          <p:cNvPr id="9" name="Rectangle 8"/>
+          <p:cNvPr id="20" name="TextBox 19"/>
+          <p:cNvSpPr txBox="1"/>
+          <p:nvPr/>
+        </p:nvSpPr>
+        <p:spPr>
+          <a:xfrm>
+            <a:off x="2898648" y="4709160"/>
+            <a:ext cx="7589520" cy="960120"/>
+          </a:xfrm>
+          <a:prstGeom prst="rect">
+            <a:avLst/>
+          </a:prstGeom>
+          <a:noFill/>
+          <a:effectLst/>
+        </p:spPr>
+        <p:txBody>
+          <a:bodyPr wrap="square" anchor="ctr" lIns="36576" rIns="36576" tIns="27432" bIns="27432">
+            <a:spAutoFit/>
+          </a:bodyPr>
+          <a:lstStyle/>
+          <a:p>
+            <a:pPr algn="l">
+              <a:spcAft>
+                <a:spcPts val="100"/>
+              </a:spcAft>
+            </a:pPr>
+            <a:r>
+              <a:rPr sz="1000" b="0">
+                <a:solidFill>
+                  <a:srgbClr val="212427"/>
+                </a:solidFill>
+                <a:latin typeface="Verdana"/>
+              </a:rPr>
+              <a:t>1) Anforderungen müssen dokumentiert werden.</a:t>
+            </a:r>
+          </a:p>
+          <a:p>
+            <a:pPr algn="l">
+              <a:spcAft>
+                <a:spcPts val="100"/>
+              </a:spcAft>
+            </a:pPr>
+            <a:r>
+              <a:rPr sz="1000" b="0">
+                <a:solidFill>
+                  <a:srgbClr val="212427"/>
+                </a:solidFill>
+                <a:latin typeface="Verdana"/>
+              </a:rPr>
+              <a:t>2) Zweck: Anforderungen identifizieren.</a:t>
+            </a:r>
+          </a:p>
+          <a:p>
+            <a:pPr algn="l">
+              <a:spcAft>
+                <a:spcPts val="100"/>
+              </a:spcAft>
+            </a:pPr>
+            <a:r>
+              <a:rPr sz="1000" b="0">
+                <a:solidFill>
+                  <a:srgbClr val="212427"/>
+                </a:solidFill>
+                <a:latin typeface="Verdana"/>
+              </a:rPr>
+              <a:t>3) Zweck: bei der Planung berücksichtigen.</a:t>
+            </a:r>
+          </a:p>
+          <a:p>
+            <a:pPr algn="l">
+              <a:spcAft>
+                <a:spcPts val="100"/>
+              </a:spcAft>
+            </a:pPr>
+            <a:r>
+              <a:rPr sz="1000" b="0">
+                <a:solidFill>
+                  <a:srgbClr val="212427"/>
+                </a:solidFill>
+                <a:latin typeface="Verdana"/>
+              </a:rPr>
+              <a:t>4) Zweck: beim Betrieb berücksichtigen.</a:t>
+            </a:r>
+          </a:p>
+          <a:p>
+            <a:pPr algn="l">
+              <a:spcAft>
+                <a:spcPts val="100"/>
+              </a:spcAft>
+            </a:pPr>
+            <a:r>
+              <a:rPr sz="1000" b="0">
+                <a:solidFill>
+                  <a:srgbClr val="212427"/>
+                </a:solidFill>
+                <a:latin typeface="Verdana"/>
+              </a:rPr>
+              <a:t>5) Zweck: bei der Beschaffung berücksichtigen.</a:t>
+            </a:r>
+          </a:p>
+        </p:txBody>
+      </p:sp>
+      <p:sp>
+        <p:nvSpPr>
+          <p:cNvPr id="21" name="TextBox 20"/>
+          <p:cNvSpPr txBox="1"/>
+          <p:nvPr/>
+        </p:nvSpPr>
+        <p:spPr>
+          <a:xfrm>
+            <a:off x="10579608" y="4709160"/>
+            <a:ext cx="914400" cy="960120"/>
+          </a:xfrm>
+          <a:prstGeom prst="rect">
+            <a:avLst/>
+          </a:prstGeom>
+          <a:noFill/>
+          <a:effectLst/>
+        </p:spPr>
+        <p:txBody>
+          <a:bodyPr wrap="square" anchor="ctr" lIns="36576" rIns="36576" tIns="27432" bIns="27432">
+            <a:spAutoFit/>
+          </a:bodyPr>
+          <a:lstStyle/>
+          <a:p>
+            <a:pPr algn="r">
+              <a:spcAft>
+                <a:spcPts val="0"/>
+              </a:spcAft>
+            </a:pPr>
+            <a:r>
+              <a:rPr sz="2600" b="0">
+                <a:solidFill>
+                  <a:srgbClr val="5A6065"/>
+                </a:solidFill>
+                <a:latin typeface="Verdana"/>
+              </a:rPr>
+              <a:t>5</a:t>
+            </a:r>
+          </a:p>
+        </p:txBody>
+      </p:sp>
+      <p:sp>
+        <p:nvSpPr>
+          <p:cNvPr id="22" name="Rectangle 21"/>
           <p:cNvSpPr/>
           <p:nvPr/>
         </p:nvSpPr>
         <p:spPr>
           <a:xfrm>
-            <a:off x="2514600" y="3602736"/>
-            <a:ext cx="1851660" cy="832103"/>
+            <a:off x="704088" y="5669280"/>
+            <a:ext cx="10789920" cy="9525"/>
           </a:xfrm>
           <a:prstGeom prst="rect">
             <a:avLst/>
           </a:prstGeom>
-          <a:noFill/>
-          <a:ln w="9525">
-            <a:solidFill>
-              <a:srgbClr val="212427"/>
-            </a:solidFill>
+          <a:solidFill>
+            <a:srgbClr val="D6D7D8"/>
+          </a:solidFill>
+          <a:ln>
+            <a:noFill/>
           </a:ln>
           <a:effectLst/>
         </p:spPr>
@@ -50358,480 +51252,10 @@
           </a:fontRef>
         </p:style>
         <p:txBody>
-          <a:bodyPr rtlCol="0" anchor="ctr" wrap="square" lIns="109728" rIns="109728" tIns="73152" bIns="73152"/>
+          <a:bodyPr rtlCol="0" anchor="ctr"/>
           <a:lstStyle/>
           <a:p>
             <a:pPr algn="ctr"/>
-            <a:r>
-              <a:rPr sz="1100" b="0">
-                <a:solidFill>
-                  <a:srgbClr val="212427"/>
-                </a:solidFill>
-              </a:rPr>
-              <a:t>Adminkonten sollten durch MFA geschützt werden</a:t>
-            </a:r>
-          </a:p>
-        </p:txBody>
-      </p:sp>
-      <p:sp>
-        <p:nvSpPr>
-          <p:cNvPr id="10" name="Rectangle 9"/>
-          <p:cNvSpPr/>
-          <p:nvPr/>
-        </p:nvSpPr>
-        <p:spPr>
-          <a:xfrm>
-            <a:off x="4457700" y="3602736"/>
-            <a:ext cx="1851660" cy="832103"/>
-          </a:xfrm>
-          <a:prstGeom prst="rect">
-            <a:avLst/>
-          </a:prstGeom>
-          <a:noFill/>
-          <a:ln w="9525">
-            <a:solidFill>
-              <a:srgbClr val="212427"/>
-            </a:solidFill>
-          </a:ln>
-          <a:effectLst/>
-        </p:spPr>
-        <p:style>
-          <a:lnRef idx="1">
-            <a:schemeClr val="accent1"/>
-          </a:lnRef>
-          <a:fillRef idx="3">
-            <a:schemeClr val="accent1"/>
-          </a:fillRef>
-          <a:effectRef idx="2">
-            <a:schemeClr val="accent1"/>
-          </a:effectRef>
-          <a:fontRef idx="minor">
-            <a:schemeClr val="lt1"/>
-          </a:fontRef>
-        </p:style>
-        <p:txBody>
-          <a:bodyPr rtlCol="0" anchor="ctr" wrap="square" lIns="109728" rIns="109728" tIns="73152" bIns="73152"/>
-          <a:lstStyle/>
-          <a:p>
-            <a:pPr algn="ctr"/>
-            <a:r>
-              <a:rPr sz="1100" b="0">
-                <a:solidFill>
-                  <a:srgbClr val="212427"/>
-                </a:solidFill>
-              </a:rPr>
-              <a:t>sie besitzen ein hohes Schadenspotenzial</a:t>
-            </a:r>
-          </a:p>
-        </p:txBody>
-      </p:sp>
-      <p:sp>
-        <p:nvSpPr>
-          <p:cNvPr id="11" name="Rectangle 10"/>
-          <p:cNvSpPr/>
-          <p:nvPr/>
-        </p:nvSpPr>
-        <p:spPr>
-          <a:xfrm>
-            <a:off x="6400800" y="3602736"/>
-            <a:ext cx="1851660" cy="832103"/>
-          </a:xfrm>
-          <a:prstGeom prst="rect">
-            <a:avLst/>
-          </a:prstGeom>
-          <a:noFill/>
-          <a:ln w="9525">
-            <a:solidFill>
-              <a:srgbClr val="212427"/>
-            </a:solidFill>
-          </a:ln>
-          <a:effectLst/>
-        </p:spPr>
-        <p:style>
-          <a:lnRef idx="1">
-            <a:schemeClr val="accent1"/>
-          </a:lnRef>
-          <a:fillRef idx="3">
-            <a:schemeClr val="accent1"/>
-          </a:fillRef>
-          <a:effectRef idx="2">
-            <a:schemeClr val="accent1"/>
-          </a:effectRef>
-          <a:fontRef idx="minor">
-            <a:schemeClr val="lt1"/>
-          </a:fontRef>
-        </p:style>
-        <p:txBody>
-          <a:bodyPr rtlCol="0" anchor="ctr" wrap="square" lIns="109728" rIns="109728" tIns="73152" bIns="73152"/>
-          <a:lstStyle/>
-          <a:p>
-            <a:pPr algn="ctr"/>
-            <a:r>
-              <a:rPr sz="1100" b="0">
-                <a:solidFill>
-                  <a:srgbClr val="212427"/>
-                </a:solidFill>
-              </a:rPr>
-              <a:t>sie sind bevorzugtes Angriffsziel</a:t>
-            </a:r>
-          </a:p>
-        </p:txBody>
-      </p:sp>
-      <p:sp>
-        <p:nvSpPr>
-          <p:cNvPr id="12" name="Rectangle 11"/>
-          <p:cNvSpPr/>
-          <p:nvPr/>
-        </p:nvSpPr>
-        <p:spPr>
-          <a:xfrm>
-            <a:off x="8343900" y="3602736"/>
-            <a:ext cx="1851660" cy="832103"/>
-          </a:xfrm>
-          <a:prstGeom prst="rect">
-            <a:avLst/>
-          </a:prstGeom>
-          <a:noFill/>
-          <a:ln w="9525">
-            <a:solidFill>
-              <a:srgbClr val="212427"/>
-            </a:solidFill>
-          </a:ln>
-          <a:effectLst/>
-        </p:spPr>
-        <p:style>
-          <a:lnRef idx="1">
-            <a:schemeClr val="accent1"/>
-          </a:lnRef>
-          <a:fillRef idx="3">
-            <a:schemeClr val="accent1"/>
-          </a:fillRef>
-          <a:effectRef idx="2">
-            <a:schemeClr val="accent1"/>
-          </a:effectRef>
-          <a:fontRef idx="minor">
-            <a:schemeClr val="lt1"/>
-          </a:fontRef>
-        </p:style>
-        <p:txBody>
-          <a:bodyPr rtlCol="0" anchor="ctr" wrap="square" lIns="109728" rIns="109728" tIns="73152" bIns="73152"/>
-          <a:lstStyle/>
-          <a:p>
-            <a:pPr algn="ctr"/>
-            <a:r>
-              <a:rPr sz="1100" b="0">
-                <a:solidFill>
-                  <a:srgbClr val="212427"/>
-                </a:solidFill>
-              </a:rPr>
-              <a:t>weil: das ist der Grund</a:t>
-            </a:r>
-          </a:p>
-        </p:txBody>
-      </p:sp>
-      <p:sp>
-        <p:nvSpPr>
-          <p:cNvPr id="13" name="Rectangle 12"/>
-          <p:cNvSpPr/>
-          <p:nvPr/>
-        </p:nvSpPr>
-        <p:spPr>
-          <a:xfrm>
-            <a:off x="10332720" y="3493008"/>
-            <a:ext cx="1188720" cy="1051560"/>
-          </a:xfrm>
-          <a:prstGeom prst="rect">
-            <a:avLst/>
-          </a:prstGeom>
-          <a:noFill/>
-          <a:ln>
-            <a:noFill/>
-          </a:ln>
-          <a:effectLst/>
-        </p:spPr>
-        <p:style>
-          <a:lnRef idx="1">
-            <a:schemeClr val="accent1"/>
-          </a:lnRef>
-          <a:fillRef idx="3">
-            <a:schemeClr val="accent1"/>
-          </a:fillRef>
-          <a:effectRef idx="2">
-            <a:schemeClr val="accent1"/>
-          </a:effectRef>
-          <a:fontRef idx="minor">
-            <a:schemeClr val="lt1"/>
-          </a:fontRef>
-        </p:style>
-        <p:txBody>
-          <a:bodyPr rtlCol="0" anchor="ctr" wrap="square" lIns="109728" rIns="109728" tIns="73152" bIns="73152"/>
-          <a:lstStyle/>
-          <a:p>
-            <a:pPr algn="r"/>
-            <a:r>
-              <a:rPr sz="2400" b="1">
-                <a:solidFill>
-                  <a:srgbClr val="212427"/>
-                </a:solidFill>
-              </a:rPr>
-              <a:t>3 bis 4</a:t>
-            </a:r>
-          </a:p>
-        </p:txBody>
-      </p:sp>
-      <p:sp>
-        <p:nvSpPr>
-          <p:cNvPr id="14" name="Rectangle 13"/>
-          <p:cNvSpPr/>
-          <p:nvPr/>
-        </p:nvSpPr>
-        <p:spPr>
-          <a:xfrm>
-            <a:off x="704088" y="4654296"/>
-            <a:ext cx="1828800" cy="1051560"/>
-          </a:xfrm>
-          <a:prstGeom prst="rect">
-            <a:avLst/>
-          </a:prstGeom>
-          <a:noFill/>
-          <a:ln>
-            <a:noFill/>
-          </a:ln>
-          <a:effectLst/>
-        </p:spPr>
-        <p:style>
-          <a:lnRef idx="1">
-            <a:schemeClr val="accent1"/>
-          </a:lnRef>
-          <a:fillRef idx="3">
-            <a:schemeClr val="accent1"/>
-          </a:fillRef>
-          <a:effectRef idx="2">
-            <a:schemeClr val="accent1"/>
-          </a:effectRef>
-          <a:fontRef idx="minor">
-            <a:schemeClr val="lt1"/>
-          </a:fontRef>
-        </p:style>
-        <p:txBody>
-          <a:bodyPr rtlCol="0" anchor="ctr" wrap="square" lIns="109728" rIns="109728" tIns="73152" bIns="73152"/>
-          <a:lstStyle/>
-          <a:p>
-            <a:pPr algn="l"/>
-            <a:r>
-              <a:rPr sz="1200" b="1">
-                <a:solidFill>
-                  <a:srgbClr val="5A6065"/>
-                </a:solidFill>
-              </a:rPr>
-              <a:t>Arbeitsdefinition</a:t>
-            </a:r>
-          </a:p>
-        </p:txBody>
-      </p:sp>
-      <p:sp>
-        <p:nvSpPr>
-          <p:cNvPr id="15" name="Rectangle 14"/>
-          <p:cNvSpPr/>
-          <p:nvPr/>
-        </p:nvSpPr>
-        <p:spPr>
-          <a:xfrm>
-            <a:off x="2514600" y="4764024"/>
-            <a:ext cx="2499360" cy="832103"/>
-          </a:xfrm>
-          <a:prstGeom prst="rect">
-            <a:avLst/>
-          </a:prstGeom>
-          <a:noFill/>
-          <a:ln w="9525">
-            <a:solidFill>
-              <a:srgbClr val="212427"/>
-            </a:solidFill>
-          </a:ln>
-          <a:effectLst/>
-        </p:spPr>
-        <p:style>
-          <a:lnRef idx="1">
-            <a:schemeClr val="accent1"/>
-          </a:lnRef>
-          <a:fillRef idx="3">
-            <a:schemeClr val="accent1"/>
-          </a:fillRef>
-          <a:effectRef idx="2">
-            <a:schemeClr val="accent1"/>
-          </a:effectRef>
-          <a:fontRef idx="minor">
-            <a:schemeClr val="lt1"/>
-          </a:fontRef>
-        </p:style>
-        <p:txBody>
-          <a:bodyPr rtlCol="0" anchor="ctr" wrap="square" lIns="109728" rIns="109728" tIns="73152" bIns="73152"/>
-          <a:lstStyle/>
-          <a:p>
-            <a:pPr algn="ctr"/>
-            <a:r>
-              <a:rPr sz="1200" b="0">
-                <a:solidFill>
-                  <a:srgbClr val="212427"/>
-                </a:solidFill>
-              </a:rPr>
-              <a:t>Adminkonten sollten durch MFA geschützt werden</a:t>
-            </a:r>
-          </a:p>
-        </p:txBody>
-      </p:sp>
-      <p:sp>
-        <p:nvSpPr>
-          <p:cNvPr id="16" name="Rectangle 15"/>
-          <p:cNvSpPr/>
-          <p:nvPr/>
-        </p:nvSpPr>
-        <p:spPr>
-          <a:xfrm>
-            <a:off x="5105400" y="4764024"/>
-            <a:ext cx="2499360" cy="832103"/>
-          </a:xfrm>
-          <a:prstGeom prst="rect">
-            <a:avLst/>
-          </a:prstGeom>
-          <a:noFill/>
-          <a:ln w="9525">
-            <a:solidFill>
-              <a:srgbClr val="212427"/>
-            </a:solidFill>
-          </a:ln>
-          <a:effectLst/>
-        </p:spPr>
-        <p:style>
-          <a:lnRef idx="1">
-            <a:schemeClr val="accent1"/>
-          </a:lnRef>
-          <a:fillRef idx="3">
-            <a:schemeClr val="accent1"/>
-          </a:fillRef>
-          <a:effectRef idx="2">
-            <a:schemeClr val="accent1"/>
-          </a:effectRef>
-          <a:fontRef idx="minor">
-            <a:schemeClr val="lt1"/>
-          </a:fontRef>
-        </p:style>
-        <p:txBody>
-          <a:bodyPr rtlCol="0" anchor="ctr" wrap="square" lIns="109728" rIns="109728" tIns="73152" bIns="73152"/>
-          <a:lstStyle/>
-          <a:p>
-            <a:pPr algn="ctr"/>
-            <a:r>
-              <a:rPr sz="1200" b="0">
-                <a:solidFill>
-                  <a:srgbClr val="212427"/>
-                </a:solidFill>
-              </a:rPr>
-              <a:t>Grund: hohes Schadenspotenzial</a:t>
-            </a:r>
-          </a:p>
-        </p:txBody>
-      </p:sp>
-      <p:sp>
-        <p:nvSpPr>
-          <p:cNvPr id="17" name="Rectangle 16"/>
-          <p:cNvSpPr/>
-          <p:nvPr/>
-        </p:nvSpPr>
-        <p:spPr>
-          <a:xfrm>
-            <a:off x="7696200" y="4764024"/>
-            <a:ext cx="2499360" cy="832103"/>
-          </a:xfrm>
-          <a:prstGeom prst="rect">
-            <a:avLst/>
-          </a:prstGeom>
-          <a:noFill/>
-          <a:ln w="9525">
-            <a:solidFill>
-              <a:srgbClr val="212427"/>
-            </a:solidFill>
-          </a:ln>
-          <a:effectLst/>
-        </p:spPr>
-        <p:style>
-          <a:lnRef idx="1">
-            <a:schemeClr val="accent1"/>
-          </a:lnRef>
-          <a:fillRef idx="3">
-            <a:schemeClr val="accent1"/>
-          </a:fillRef>
-          <a:effectRef idx="2">
-            <a:schemeClr val="accent1"/>
-          </a:effectRef>
-          <a:fontRef idx="minor">
-            <a:schemeClr val="lt1"/>
-          </a:fontRef>
-        </p:style>
-        <p:txBody>
-          <a:bodyPr rtlCol="0" anchor="ctr" wrap="square" lIns="109728" rIns="109728" tIns="73152" bIns="73152"/>
-          <a:lstStyle/>
-          <a:p>
-            <a:pPr algn="ctr"/>
-            <a:r>
-              <a:rPr sz="1200" b="0">
-                <a:solidFill>
-                  <a:srgbClr val="212427"/>
-                </a:solidFill>
-              </a:rPr>
-              <a:t>Grund: bevorzugtes Angriffsziel</a:t>
-            </a:r>
-          </a:p>
-        </p:txBody>
-      </p:sp>
-      <p:sp>
-        <p:nvSpPr>
-          <p:cNvPr id="18" name="Rectangle 17"/>
-          <p:cNvSpPr/>
-          <p:nvPr/>
-        </p:nvSpPr>
-        <p:spPr>
-          <a:xfrm>
-            <a:off x="10332720" y="4654296"/>
-            <a:ext cx="1188720" cy="1051560"/>
-          </a:xfrm>
-          <a:prstGeom prst="rect">
-            <a:avLst/>
-          </a:prstGeom>
-          <a:noFill/>
-          <a:ln>
-            <a:noFill/>
-          </a:ln>
-          <a:effectLst/>
-        </p:spPr>
-        <p:style>
-          <a:lnRef idx="1">
-            <a:schemeClr val="accent1"/>
-          </a:lnRef>
-          <a:fillRef idx="3">
-            <a:schemeClr val="accent1"/>
-          </a:fillRef>
-          <a:effectRef idx="2">
-            <a:schemeClr val="accent1"/>
-          </a:effectRef>
-          <a:fontRef idx="minor">
-            <a:schemeClr val="lt1"/>
-          </a:fontRef>
-        </p:style>
-        <p:txBody>
-          <a:bodyPr rtlCol="0" anchor="ctr" wrap="square" lIns="109728" rIns="109728" tIns="73152" bIns="73152"/>
-          <a:lstStyle/>
-          <a:p>
-            <a:pPr algn="r"/>
-            <a:r>
-              <a:rPr sz="2400" b="1">
-                <a:solidFill>
-                  <a:srgbClr val="212427"/>
-                </a:solidFill>
-              </a:rPr>
-              <a:t>3</a:t>
-            </a:r>
           </a:p>
         </p:txBody>
       </p:sp>
@@ -50863,13 +51287,21 @@
             <p:ph type="title"/>
           </p:nvPr>
         </p:nvSpPr>
-        <p:spPr/>
+        <p:spPr>
+          <a:effectLst/>
+        </p:spPr>
         <p:txBody>
           <a:bodyPr/>
           <a:lstStyle/>
           <a:p>
             <a:r>
-              <a:t>Beispiel 2: Wie viele Aussagen?</a:t>
+              <a:rPr b="0" sz="2800" cap="none">
+                <a:solidFill>
+                  <a:srgbClr val="212427"/>
+                </a:solidFill>
+                <a:latin typeface="Verdana"/>
+              </a:rPr>
+              <a:t>Beispiel B: Wie viele Aussagen?</a:t>
             </a:r>
           </a:p>
         </p:txBody>
@@ -50882,17 +51314,17 @@
         </p:nvSpPr>
         <p:spPr>
           <a:xfrm>
-            <a:off x="704088" y="1143000"/>
-            <a:ext cx="10789920" cy="960120"/>
+            <a:off x="704088" y="1115568"/>
+            <a:ext cx="609600" cy="38100"/>
           </a:xfrm>
           <a:prstGeom prst="rect">
             <a:avLst/>
           </a:prstGeom>
-          <a:noFill/>
-          <a:ln w="9525">
-            <a:solidFill>
-              <a:srgbClr val="D6D7D8"/>
-            </a:solidFill>
+          <a:solidFill>
+            <a:srgbClr val="B1063A"/>
+          </a:solidFill>
+          <a:ln>
+            <a:noFill/>
           </a:ln>
           <a:effectLst/>
         </p:spPr>
@@ -50911,36 +51343,70 @@
           </a:fontRef>
         </p:style>
         <p:txBody>
-          <a:bodyPr rtlCol="0" anchor="ctr" wrap="square" lIns="109728" rIns="109728" tIns="73152" bIns="73152"/>
+          <a:bodyPr rtlCol="0" anchor="ctr"/>
           <a:lstStyle/>
           <a:p>
-            <a:pPr algn="l"/>
+            <a:pPr algn="ctr"/>
+          </a:p>
+        </p:txBody>
+      </p:sp>
+      <p:sp>
+        <p:nvSpPr>
+          <p:cNvPr id="5" name="TextBox 4"/>
+          <p:cNvSpPr txBox="1"/>
+          <p:nvPr/>
+        </p:nvSpPr>
+        <p:spPr>
+          <a:xfrm>
+            <a:off x="704088" y="1188720"/>
+            <a:ext cx="10789920" cy="685800"/>
+          </a:xfrm>
+          <a:prstGeom prst="rect">
+            <a:avLst/>
+          </a:prstGeom>
+          <a:noFill/>
+          <a:effectLst/>
+        </p:spPr>
+        <p:txBody>
+          <a:bodyPr wrap="square" anchor="ctr" lIns="36576" rIns="36576" tIns="27432" bIns="27432">
+            <a:spAutoFit/>
+          </a:bodyPr>
+          <a:lstStyle/>
+          <a:p>
+            <a:pPr algn="l">
+              <a:spcAft>
+                <a:spcPts val="0"/>
+              </a:spcAft>
+            </a:pPr>
             <a:r>
-              <a:rPr sz="1400" b="0">
+              <a:rPr sz="1500" b="0">
                 <a:solidFill>
                   <a:srgbClr val="212427"/>
                 </a:solidFill>
+                <a:latin typeface="Verdana"/>
               </a:rPr>
-              <a:t>Erstellen Sie eine Cloud-Nutzungsstrategie (A1), eine Sicherheitsrichtlinie (A2), Service-Definitionen (A3) und legen Sie Verantwortungsbereiche sowie Schnittstellen fest (A4). Diese vier Basis-Anforderungen müssen vorrangig erfüllt werden.</a:t>
+              <a:t>Ohne verbindliche Passwortregeln besteht die Gefahr schwacher oder mehrfach genutzter Passwörter, die leicht kompromittiert werden können.</a:t>
             </a:r>
           </a:p>
         </p:txBody>
       </p:sp>
       <p:sp>
         <p:nvSpPr>
-          <p:cNvPr id="5" name="Rectangle 4"/>
+          <p:cNvPr id="6" name="Rectangle 5"/>
           <p:cNvSpPr/>
           <p:nvPr/>
         </p:nvSpPr>
         <p:spPr>
           <a:xfrm>
-            <a:off x="704088" y="2331720"/>
-            <a:ext cx="1828800" cy="1051560"/>
+            <a:off x="704088" y="1920240"/>
+            <a:ext cx="10789920" cy="9525"/>
           </a:xfrm>
           <a:prstGeom prst="rect">
             <a:avLst/>
           </a:prstGeom>
-          <a:noFill/>
+          <a:solidFill>
+            <a:srgbClr val="D6D7D8"/>
+          </a:solidFill>
           <a:ln>
             <a:noFill/>
           </a:ln>
@@ -50961,40 +51427,152 @@
           </a:fontRef>
         </p:style>
         <p:txBody>
-          <a:bodyPr rtlCol="0" anchor="ctr" wrap="square" lIns="109728" rIns="109728" tIns="73152" bIns="73152"/>
+          <a:bodyPr rtlCol="0" anchor="ctr"/>
           <a:lstStyle/>
           <a:p>
-            <a:pPr algn="l"/>
+            <a:pPr algn="ctr"/>
+          </a:p>
+        </p:txBody>
+      </p:sp>
+      <p:sp>
+        <p:nvSpPr>
+          <p:cNvPr id="7" name="TextBox 6"/>
+          <p:cNvSpPr txBox="1"/>
+          <p:nvPr/>
+        </p:nvSpPr>
+        <p:spPr>
+          <a:xfrm>
+            <a:off x="704088" y="1965960"/>
+            <a:ext cx="2103120" cy="457200"/>
+          </a:xfrm>
+          <a:prstGeom prst="rect">
+            <a:avLst/>
+          </a:prstGeom>
+          <a:noFill/>
+          <a:effectLst/>
+        </p:spPr>
+        <p:txBody>
+          <a:bodyPr wrap="square" anchor="ctr" lIns="36576" rIns="36576" tIns="27432" bIns="27432">
+            <a:spAutoFit/>
+          </a:bodyPr>
+          <a:lstStyle/>
+          <a:p>
+            <a:pPr algn="l">
+              <a:spcAft>
+                <a:spcPts val="0"/>
+              </a:spcAft>
+            </a:pPr>
             <a:r>
-              <a:rPr sz="1200" b="1">
+              <a:rPr sz="1200" b="0">
                 <a:solidFill>
                   <a:srgbClr val="5A6065"/>
                 </a:solidFill>
+                <a:latin typeface="Verdana"/>
               </a:rPr>
-              <a:t>Alltag</a:t>
+              <a:t>Alltag, ganz</a:t>
             </a:r>
           </a:p>
         </p:txBody>
       </p:sp>
       <p:sp>
         <p:nvSpPr>
-          <p:cNvPr id="6" name="Rectangle 5"/>
+          <p:cNvPr id="8" name="TextBox 7"/>
+          <p:cNvSpPr txBox="1"/>
+          <p:nvPr/>
+        </p:nvSpPr>
+        <p:spPr>
+          <a:xfrm>
+            <a:off x="2898648" y="1965960"/>
+            <a:ext cx="7589520" cy="457200"/>
+          </a:xfrm>
+          <a:prstGeom prst="rect">
+            <a:avLst/>
+          </a:prstGeom>
+          <a:noFill/>
+          <a:effectLst/>
+        </p:spPr>
+        <p:txBody>
+          <a:bodyPr wrap="square" anchor="ctr" lIns="36576" rIns="36576" tIns="27432" bIns="27432">
+            <a:spAutoFit/>
+          </a:bodyPr>
+          <a:lstStyle/>
+          <a:p>
+            <a:pPr algn="l">
+              <a:spcAft>
+                <a:spcPts val="100"/>
+              </a:spcAft>
+            </a:pPr>
+            <a:r>
+              <a:rPr sz="1100" b="0">
+                <a:solidFill>
+                  <a:srgbClr val="212427"/>
+                </a:solidFill>
+                <a:latin typeface="Verdana"/>
+              </a:rPr>
+              <a:t>der ganze Satz</a:t>
+            </a:r>
+          </a:p>
+        </p:txBody>
+      </p:sp>
+      <p:sp>
+        <p:nvSpPr>
+          <p:cNvPr id="9" name="TextBox 8"/>
+          <p:cNvSpPr txBox="1"/>
+          <p:nvPr/>
+        </p:nvSpPr>
+        <p:spPr>
+          <a:xfrm>
+            <a:off x="10579608" y="1965960"/>
+            <a:ext cx="914400" cy="457200"/>
+          </a:xfrm>
+          <a:prstGeom prst="rect">
+            <a:avLst/>
+          </a:prstGeom>
+          <a:noFill/>
+          <a:effectLst/>
+        </p:spPr>
+        <p:txBody>
+          <a:bodyPr wrap="square" anchor="ctr" lIns="36576" rIns="36576" tIns="27432" bIns="27432">
+            <a:spAutoFit/>
+          </a:bodyPr>
+          <a:lstStyle/>
+          <a:p>
+            <a:pPr algn="r">
+              <a:spcAft>
+                <a:spcPts val="0"/>
+              </a:spcAft>
+            </a:pPr>
+            <a:r>
+              <a:rPr sz="2600" b="0">
+                <a:solidFill>
+                  <a:srgbClr val="5A6065"/>
+                </a:solidFill>
+                <a:latin typeface="Verdana"/>
+              </a:rPr>
+              <a:t>1</a:t>
+            </a:r>
+          </a:p>
+        </p:txBody>
+      </p:sp>
+      <p:sp>
+        <p:nvSpPr>
+          <p:cNvPr id="10" name="Rectangle 9"/>
           <p:cNvSpPr/>
           <p:nvPr/>
         </p:nvSpPr>
         <p:spPr>
           <a:xfrm>
-            <a:off x="2514600" y="2441448"/>
-            <a:ext cx="3794760" cy="832103"/>
+            <a:off x="704088" y="2423160"/>
+            <a:ext cx="10789920" cy="9525"/>
           </a:xfrm>
           <a:prstGeom prst="rect">
             <a:avLst/>
           </a:prstGeom>
-          <a:noFill/>
-          <a:ln w="9525">
-            <a:solidFill>
-              <a:srgbClr val="212427"/>
-            </a:solidFill>
+          <a:solidFill>
+            <a:srgbClr val="D6D7D8"/>
+          </a:solidFill>
+          <a:ln>
+            <a:noFill/>
           </a:ln>
           <a:effectLst/>
         </p:spPr>
@@ -51013,40 +51591,168 @@
           </a:fontRef>
         </p:style>
         <p:txBody>
-          <a:bodyPr rtlCol="0" anchor="ctr" wrap="square" lIns="109728" rIns="109728" tIns="73152" bIns="73152"/>
+          <a:bodyPr rtlCol="0" anchor="ctr"/>
           <a:lstStyle/>
           <a:p>
             <a:pPr algn="ctr"/>
+          </a:p>
+        </p:txBody>
+      </p:sp>
+      <p:sp>
+        <p:nvSpPr>
+          <p:cNvPr id="11" name="TextBox 10"/>
+          <p:cNvSpPr txBox="1"/>
+          <p:nvPr/>
+        </p:nvSpPr>
+        <p:spPr>
+          <a:xfrm>
+            <a:off x="704088" y="2423160"/>
+            <a:ext cx="2103120" cy="731520"/>
+          </a:xfrm>
+          <a:prstGeom prst="rect">
+            <a:avLst/>
+          </a:prstGeom>
+          <a:noFill/>
+          <a:effectLst/>
+        </p:spPr>
+        <p:txBody>
+          <a:bodyPr wrap="square" anchor="ctr" lIns="36576" rIns="36576" tIns="27432" bIns="27432">
+            <a:spAutoFit/>
+          </a:bodyPr>
+          <a:lstStyle/>
+          <a:p>
+            <a:pPr algn="l">
+              <a:spcAft>
+                <a:spcPts val="0"/>
+              </a:spcAft>
+            </a:pPr>
             <a:r>
               <a:rPr sz="1200" b="0">
                 <a:solidFill>
-                  <a:srgbClr val="212427"/>
+                  <a:srgbClr val="5A6065"/>
                 </a:solidFill>
+                <a:latin typeface="Verdana"/>
               </a:rPr>
-              <a:t>Erstellen Sie ... (A4).</a:t>
+              <a:t>Alltag, feiner</a:t>
             </a:r>
           </a:p>
         </p:txBody>
       </p:sp>
       <p:sp>
         <p:nvSpPr>
-          <p:cNvPr id="7" name="Rectangle 6"/>
+          <p:cNvPr id="12" name="TextBox 11"/>
+          <p:cNvSpPr txBox="1"/>
+          <p:nvPr/>
+        </p:nvSpPr>
+        <p:spPr>
+          <a:xfrm>
+            <a:off x="2898648" y="2423160"/>
+            <a:ext cx="7589520" cy="731520"/>
+          </a:xfrm>
+          <a:prstGeom prst="rect">
+            <a:avLst/>
+          </a:prstGeom>
+          <a:noFill/>
+          <a:effectLst/>
+        </p:spPr>
+        <p:txBody>
+          <a:bodyPr wrap="square" anchor="ctr" lIns="36576" rIns="36576" tIns="27432" bIns="27432">
+            <a:spAutoFit/>
+          </a:bodyPr>
+          <a:lstStyle/>
+          <a:p>
+            <a:pPr algn="l">
+              <a:spcAft>
+                <a:spcPts val="100"/>
+              </a:spcAft>
+            </a:pPr>
+            <a:r>
+              <a:rPr sz="1100" b="0">
+                <a:solidFill>
+                  <a:srgbClr val="212427"/>
+                </a:solidFill>
+                <a:latin typeface="Verdana"/>
+              </a:rPr>
+              <a:t>1) Ohne verbindliche Passwortregeln besteht die Gefahr schwacher oder mehrfach genutzter Passwörter</a:t>
+            </a:r>
+          </a:p>
+          <a:p>
+            <a:pPr algn="l">
+              <a:spcAft>
+                <a:spcPts val="100"/>
+              </a:spcAft>
+            </a:pPr>
+            <a:r>
+              <a:rPr sz="1100" b="0">
+                <a:solidFill>
+                  <a:srgbClr val="212427"/>
+                </a:solidFill>
+                <a:latin typeface="Verdana"/>
+              </a:rPr>
+              <a:t>2) die leicht kompromittiert werden können</a:t>
+            </a:r>
+          </a:p>
+        </p:txBody>
+      </p:sp>
+      <p:sp>
+        <p:nvSpPr>
+          <p:cNvPr id="13" name="TextBox 12"/>
+          <p:cNvSpPr txBox="1"/>
+          <p:nvPr/>
+        </p:nvSpPr>
+        <p:spPr>
+          <a:xfrm>
+            <a:off x="10579608" y="2423160"/>
+            <a:ext cx="914400" cy="731520"/>
+          </a:xfrm>
+          <a:prstGeom prst="rect">
+            <a:avLst/>
+          </a:prstGeom>
+          <a:noFill/>
+          <a:effectLst/>
+        </p:spPr>
+        <p:txBody>
+          <a:bodyPr wrap="square" anchor="ctr" lIns="36576" rIns="36576" tIns="27432" bIns="27432">
+            <a:spAutoFit/>
+          </a:bodyPr>
+          <a:lstStyle/>
+          <a:p>
+            <a:pPr algn="r">
+              <a:spcAft>
+                <a:spcPts val="0"/>
+              </a:spcAft>
+            </a:pPr>
+            <a:r>
+              <a:rPr sz="2600" b="0">
+                <a:solidFill>
+                  <a:srgbClr val="5A6065"/>
+                </a:solidFill>
+                <a:latin typeface="Verdana"/>
+              </a:rPr>
+              <a:t>2</a:t>
+            </a:r>
+          </a:p>
+        </p:txBody>
+      </p:sp>
+      <p:sp>
+        <p:nvSpPr>
+          <p:cNvPr id="14" name="Rectangle 13"/>
           <p:cNvSpPr/>
           <p:nvPr/>
         </p:nvSpPr>
         <p:spPr>
           <a:xfrm>
-            <a:off x="6400800" y="2441448"/>
-            <a:ext cx="3794760" cy="832103"/>
+            <a:off x="704088" y="3154680"/>
+            <a:ext cx="10789920" cy="9525"/>
           </a:xfrm>
           <a:prstGeom prst="rect">
             <a:avLst/>
           </a:prstGeom>
-          <a:noFill/>
-          <a:ln w="9525">
-            <a:solidFill>
-              <a:srgbClr val="212427"/>
-            </a:solidFill>
+          <a:solidFill>
+            <a:srgbClr val="D6D7D8"/>
+          </a:solidFill>
+          <a:ln>
+            <a:noFill/>
           </a:ln>
           <a:effectLst/>
         </p:spPr>
@@ -51065,36 +51771,198 @@
           </a:fontRef>
         </p:style>
         <p:txBody>
-          <a:bodyPr rtlCol="0" anchor="ctr" wrap="square" lIns="109728" rIns="109728" tIns="73152" bIns="73152"/>
+          <a:bodyPr rtlCol="0" anchor="ctr"/>
           <a:lstStyle/>
           <a:p>
             <a:pPr algn="ctr"/>
+          </a:p>
+        </p:txBody>
+      </p:sp>
+      <p:sp>
+        <p:nvSpPr>
+          <p:cNvPr id="15" name="TextBox 14"/>
+          <p:cNvSpPr txBox="1"/>
+          <p:nvPr/>
+        </p:nvSpPr>
+        <p:spPr>
+          <a:xfrm>
+            <a:off x="704088" y="3154680"/>
+            <a:ext cx="2103120" cy="1554480"/>
+          </a:xfrm>
+          <a:prstGeom prst="rect">
+            <a:avLst/>
+          </a:prstGeom>
+          <a:noFill/>
+          <a:effectLst/>
+        </p:spPr>
+        <p:txBody>
+          <a:bodyPr wrap="square" anchor="ctr" lIns="36576" rIns="36576" tIns="27432" bIns="27432">
+            <a:spAutoFit/>
+          </a:bodyPr>
+          <a:lstStyle/>
+          <a:p>
+            <a:pPr algn="l">
+              <a:spcAft>
+                <a:spcPts val="0"/>
+              </a:spcAft>
+            </a:pPr>
             <a:r>
               <a:rPr sz="1200" b="0">
                 <a:solidFill>
-                  <a:srgbClr val="212427"/>
+                  <a:srgbClr val="5A6065"/>
                 </a:solidFill>
+                <a:latin typeface="Verdana"/>
               </a:rPr>
-              <a:t>Diese vier Basis-Anforderungen müssen vorrangig erfüllt werden.</a:t>
+              <a:t>Logik</a:t>
             </a:r>
           </a:p>
         </p:txBody>
       </p:sp>
       <p:sp>
         <p:nvSpPr>
-          <p:cNvPr id="8" name="Rectangle 7"/>
+          <p:cNvPr id="16" name="TextBox 15"/>
+          <p:cNvSpPr txBox="1"/>
+          <p:nvPr/>
+        </p:nvSpPr>
+        <p:spPr>
+          <a:xfrm>
+            <a:off x="2898648" y="3154680"/>
+            <a:ext cx="7589520" cy="1554480"/>
+          </a:xfrm>
+          <a:prstGeom prst="rect">
+            <a:avLst/>
+          </a:prstGeom>
+          <a:noFill/>
+          <a:effectLst/>
+        </p:spPr>
+        <p:txBody>
+          <a:bodyPr wrap="square" anchor="ctr" lIns="36576" rIns="36576" tIns="27432" bIns="27432">
+            <a:spAutoFit/>
+          </a:bodyPr>
+          <a:lstStyle/>
+          <a:p>
+            <a:pPr algn="l">
+              <a:spcAft>
+                <a:spcPts val="100"/>
+              </a:spcAft>
+            </a:pPr>
+            <a:r>
+              <a:rPr sz="1000" b="0">
+                <a:solidFill>
+                  <a:srgbClr val="212427"/>
+                </a:solidFill>
+                <a:latin typeface="Verdana"/>
+              </a:rPr>
+              <a:t>1) Ohne verbindliche Passwortregeln besteht die Gefahr schwacher Passwörter.</a:t>
+            </a:r>
+          </a:p>
+          <a:p>
+            <a:pPr algn="l">
+              <a:spcAft>
+                <a:spcPts val="100"/>
+              </a:spcAft>
+            </a:pPr>
+            <a:r>
+              <a:rPr sz="1000" b="0">
+                <a:solidFill>
+                  <a:srgbClr val="212427"/>
+                </a:solidFill>
+                <a:latin typeface="Verdana"/>
+              </a:rPr>
+              <a:t>2) Ohne verbindliche Passwortregeln besteht die Gefahr mehrfach genutzter Passwörter.</a:t>
+            </a:r>
+          </a:p>
+          <a:p>
+            <a:pPr algn="l">
+              <a:spcAft>
+                <a:spcPts val="100"/>
+              </a:spcAft>
+            </a:pPr>
+            <a:r>
+              <a:rPr sz="1000" b="0">
+                <a:solidFill>
+                  <a:srgbClr val="212427"/>
+                </a:solidFill>
+                <a:latin typeface="Verdana"/>
+              </a:rPr>
+              <a:t>3) Schwache Passwörter können leicht kompromittiert werden.</a:t>
+            </a:r>
+          </a:p>
+          <a:p>
+            <a:pPr algn="l">
+              <a:spcAft>
+                <a:spcPts val="100"/>
+              </a:spcAft>
+            </a:pPr>
+            <a:r>
+              <a:rPr sz="1000" b="0">
+                <a:solidFill>
+                  <a:srgbClr val="212427"/>
+                </a:solidFill>
+                <a:latin typeface="Verdana"/>
+              </a:rPr>
+              <a:t>4) Mehrfach genutzte Passwörter können leicht kompromittiert werden.</a:t>
+            </a:r>
+          </a:p>
+        </p:txBody>
+      </p:sp>
+      <p:sp>
+        <p:nvSpPr>
+          <p:cNvPr id="17" name="TextBox 16"/>
+          <p:cNvSpPr txBox="1"/>
+          <p:nvPr/>
+        </p:nvSpPr>
+        <p:spPr>
+          <a:xfrm>
+            <a:off x="10579608" y="3154680"/>
+            <a:ext cx="914400" cy="1554480"/>
+          </a:xfrm>
+          <a:prstGeom prst="rect">
+            <a:avLst/>
+          </a:prstGeom>
+          <a:noFill/>
+          <a:effectLst/>
+        </p:spPr>
+        <p:txBody>
+          <a:bodyPr wrap="square" anchor="ctr" lIns="36576" rIns="36576" tIns="27432" bIns="27432">
+            <a:spAutoFit/>
+          </a:bodyPr>
+          <a:lstStyle/>
+          <a:p>
+            <a:pPr algn="r">
+              <a:spcAft>
+                <a:spcPts val="0"/>
+              </a:spcAft>
+            </a:pPr>
+            <a:r>
+              <a:rPr sz="2600" b="0">
+                <a:solidFill>
+                  <a:srgbClr val="5A6065"/>
+                </a:solidFill>
+                <a:latin typeface="Verdana"/>
+              </a:rPr>
+              <a:t>4</a:t>
+            </a:r>
+          </a:p>
+        </p:txBody>
+      </p:sp>
+      <p:sp>
+        <p:nvSpPr>
+          <p:cNvPr id="18" name="Rectangle 17"/>
           <p:cNvSpPr/>
           <p:nvPr/>
         </p:nvSpPr>
         <p:spPr>
           <a:xfrm>
-            <a:off x="10332720" y="2331720"/>
-            <a:ext cx="1188720" cy="1051560"/>
+            <a:off x="704088" y="4709160"/>
+            <a:ext cx="10789920" cy="9525"/>
           </a:xfrm>
           <a:prstGeom prst="rect">
             <a:avLst/>
           </a:prstGeom>
-          <a:noFill/>
+          <a:solidFill>
+            <a:srgbClr val="D6D7D8"/>
+          </a:solidFill>
           <a:ln>
             <a:noFill/>
           </a:ln>
@@ -51115,36 +51983,182 @@
           </a:fontRef>
         </p:style>
         <p:txBody>
-          <a:bodyPr rtlCol="0" anchor="ctr" wrap="square" lIns="109728" rIns="109728" tIns="73152" bIns="73152"/>
+          <a:bodyPr rtlCol="0" anchor="ctr"/>
           <a:lstStyle/>
           <a:p>
-            <a:pPr algn="r"/>
+            <a:pPr algn="ctr"/>
+          </a:p>
+        </p:txBody>
+      </p:sp>
+      <p:sp>
+        <p:nvSpPr>
+          <p:cNvPr id="19" name="TextBox 18"/>
+          <p:cNvSpPr txBox="1"/>
+          <p:nvPr/>
+        </p:nvSpPr>
+        <p:spPr>
+          <a:xfrm>
+            <a:off x="704088" y="4709160"/>
+            <a:ext cx="2103120" cy="960120"/>
+          </a:xfrm>
+          <a:prstGeom prst="rect">
+            <a:avLst/>
+          </a:prstGeom>
+          <a:noFill/>
+          <a:effectLst/>
+        </p:spPr>
+        <p:txBody>
+          <a:bodyPr wrap="square" anchor="ctr" lIns="36576" rIns="36576" tIns="27432" bIns="27432">
+            <a:spAutoFit/>
+          </a:bodyPr>
+          <a:lstStyle/>
+          <a:p>
+            <a:pPr algn="l">
+              <a:spcAft>
+                <a:spcPts val="0"/>
+              </a:spcAft>
+            </a:pPr>
             <a:r>
-              <a:rPr sz="2400" b="1">
+              <a:rPr sz="1200" b="0">
                 <a:solidFill>
-                  <a:srgbClr val="212427"/>
+                  <a:srgbClr val="5A6065"/>
                 </a:solidFill>
+                <a:latin typeface="Verdana"/>
               </a:rPr>
-              <a:t>2</a:t>
+              <a:t>Arbeitsdefinition</a:t>
             </a:r>
           </a:p>
         </p:txBody>
       </p:sp>
       <p:sp>
         <p:nvSpPr>
-          <p:cNvPr id="9" name="Rectangle 8"/>
+          <p:cNvPr id="20" name="TextBox 19"/>
+          <p:cNvSpPr txBox="1"/>
+          <p:nvPr/>
+        </p:nvSpPr>
+        <p:spPr>
+          <a:xfrm>
+            <a:off x="2898648" y="4709160"/>
+            <a:ext cx="7589520" cy="960120"/>
+          </a:xfrm>
+          <a:prstGeom prst="rect">
+            <a:avLst/>
+          </a:prstGeom>
+          <a:noFill/>
+          <a:effectLst/>
+        </p:spPr>
+        <p:txBody>
+          <a:bodyPr wrap="square" anchor="ctr" lIns="36576" rIns="36576" tIns="27432" bIns="27432">
+            <a:spAutoFit/>
+          </a:bodyPr>
+          <a:lstStyle/>
+          <a:p>
+            <a:pPr algn="l">
+              <a:spcAft>
+                <a:spcPts val="100"/>
+              </a:spcAft>
+            </a:pPr>
+            <a:r>
+              <a:rPr sz="1100" b="0">
+                <a:solidFill>
+                  <a:srgbClr val="212427"/>
+                </a:solidFill>
+                <a:latin typeface="Verdana"/>
+              </a:rPr>
+              <a:t>1) Ohne Passwortregeln: Gefahr schwacher Passwörter.</a:t>
+            </a:r>
+          </a:p>
+          <a:p>
+            <a:pPr algn="l">
+              <a:spcAft>
+                <a:spcPts val="100"/>
+              </a:spcAft>
+            </a:pPr>
+            <a:r>
+              <a:rPr sz="1100" b="0">
+                <a:solidFill>
+                  <a:srgbClr val="212427"/>
+                </a:solidFill>
+                <a:latin typeface="Verdana"/>
+              </a:rPr>
+              <a:t>2) Ohne Passwortregeln: Gefahr mehrfach genutzter Passwörter.</a:t>
+            </a:r>
+          </a:p>
+          <a:p>
+            <a:pPr algn="l">
+              <a:spcAft>
+                <a:spcPts val="100"/>
+              </a:spcAft>
+            </a:pPr>
+            <a:r>
+              <a:rPr sz="1100" b="0">
+                <a:solidFill>
+                  <a:srgbClr val="212427"/>
+                </a:solidFill>
+                <a:latin typeface="Verdana"/>
+              </a:rPr>
+              <a:t>3) Schwache oder mehrfach genutzte Passwörter sind leicht zu kompromittieren.</a:t>
+            </a:r>
+          </a:p>
+        </p:txBody>
+      </p:sp>
+      <p:sp>
+        <p:nvSpPr>
+          <p:cNvPr id="21" name="TextBox 20"/>
+          <p:cNvSpPr txBox="1"/>
+          <p:nvPr/>
+        </p:nvSpPr>
+        <p:spPr>
+          <a:xfrm>
+            <a:off x="10579608" y="4709160"/>
+            <a:ext cx="914400" cy="960120"/>
+          </a:xfrm>
+          <a:prstGeom prst="rect">
+            <a:avLst/>
+          </a:prstGeom>
+          <a:noFill/>
+          <a:effectLst/>
+        </p:spPr>
+        <p:txBody>
+          <a:bodyPr wrap="square" anchor="ctr" lIns="36576" rIns="36576" tIns="27432" bIns="27432">
+            <a:spAutoFit/>
+          </a:bodyPr>
+          <a:lstStyle/>
+          <a:p>
+            <a:pPr algn="r">
+              <a:spcAft>
+                <a:spcPts val="0"/>
+              </a:spcAft>
+            </a:pPr>
+            <a:r>
+              <a:rPr sz="2600" b="0">
+                <a:solidFill>
+                  <a:srgbClr val="5A6065"/>
+                </a:solidFill>
+                <a:latin typeface="Verdana"/>
+              </a:rPr>
+              <a:t>3</a:t>
+            </a:r>
+          </a:p>
+        </p:txBody>
+      </p:sp>
+      <p:sp>
+        <p:nvSpPr>
+          <p:cNvPr id="22" name="Rectangle 21"/>
           <p:cNvSpPr/>
           <p:nvPr/>
         </p:nvSpPr>
         <p:spPr>
           <a:xfrm>
-            <a:off x="704088" y="3493008"/>
-            <a:ext cx="1828800" cy="1051560"/>
+            <a:off x="704088" y="5669280"/>
+            <a:ext cx="10789920" cy="9525"/>
           </a:xfrm>
           <a:prstGeom prst="rect">
             <a:avLst/>
           </a:prstGeom>
-          <a:noFill/>
+          <a:solidFill>
+            <a:srgbClr val="D6D7D8"/>
+          </a:solidFill>
           <a:ln>
             <a:noFill/>
           </a:ln>
@@ -51165,740 +52179,10 @@
           </a:fontRef>
         </p:style>
         <p:txBody>
-          <a:bodyPr rtlCol="0" anchor="ctr" wrap="square" lIns="109728" rIns="109728" tIns="73152" bIns="73152"/>
-          <a:lstStyle/>
-          <a:p>
-            <a:pPr algn="l"/>
-            <a:r>
-              <a:rPr sz="1200" b="1">
-                <a:solidFill>
-                  <a:srgbClr val="5A6065"/>
-                </a:solidFill>
-              </a:rPr>
-              <a:t>Logik</a:t>
-            </a:r>
-          </a:p>
-        </p:txBody>
-      </p:sp>
-      <p:sp>
-        <p:nvSpPr>
-          <p:cNvPr id="10" name="Rectangle 9"/>
-          <p:cNvSpPr/>
-          <p:nvPr/>
-        </p:nvSpPr>
-        <p:spPr>
-          <a:xfrm>
-            <a:off x="2514600" y="3602736"/>
-            <a:ext cx="1203960" cy="832103"/>
-          </a:xfrm>
-          <a:prstGeom prst="rect">
-            <a:avLst/>
-          </a:prstGeom>
-          <a:noFill/>
-          <a:ln w="9525">
-            <a:solidFill>
-              <a:srgbClr val="212427"/>
-            </a:solidFill>
-          </a:ln>
-          <a:effectLst/>
-        </p:spPr>
-        <p:style>
-          <a:lnRef idx="1">
-            <a:schemeClr val="accent1"/>
-          </a:lnRef>
-          <a:fillRef idx="3">
-            <a:schemeClr val="accent1"/>
-          </a:fillRef>
-          <a:effectRef idx="2">
-            <a:schemeClr val="accent1"/>
-          </a:effectRef>
-          <a:fontRef idx="minor">
-            <a:schemeClr val="lt1"/>
-          </a:fontRef>
-        </p:style>
-        <p:txBody>
-          <a:bodyPr rtlCol="0" anchor="ctr" wrap="square" lIns="109728" rIns="109728" tIns="73152" bIns="73152"/>
+          <a:bodyPr rtlCol="0" anchor="ctr"/>
           <a:lstStyle/>
           <a:p>
             <a:pPr algn="ctr"/>
-            <a:r>
-              <a:rPr sz="1000" b="0">
-                <a:solidFill>
-                  <a:srgbClr val="212427"/>
-                </a:solidFill>
-              </a:rPr>
-              <a:t>Strategie (A1)</a:t>
-            </a:r>
-          </a:p>
-        </p:txBody>
-      </p:sp>
-      <p:sp>
-        <p:nvSpPr>
-          <p:cNvPr id="11" name="Rectangle 10"/>
-          <p:cNvSpPr/>
-          <p:nvPr/>
-        </p:nvSpPr>
-        <p:spPr>
-          <a:xfrm>
-            <a:off x="3810000" y="3602736"/>
-            <a:ext cx="1203960" cy="832103"/>
-          </a:xfrm>
-          <a:prstGeom prst="rect">
-            <a:avLst/>
-          </a:prstGeom>
-          <a:noFill/>
-          <a:ln w="9525">
-            <a:solidFill>
-              <a:srgbClr val="212427"/>
-            </a:solidFill>
-          </a:ln>
-          <a:effectLst/>
-        </p:spPr>
-        <p:style>
-          <a:lnRef idx="1">
-            <a:schemeClr val="accent1"/>
-          </a:lnRef>
-          <a:fillRef idx="3">
-            <a:schemeClr val="accent1"/>
-          </a:fillRef>
-          <a:effectRef idx="2">
-            <a:schemeClr val="accent1"/>
-          </a:effectRef>
-          <a:fontRef idx="minor">
-            <a:schemeClr val="lt1"/>
-          </a:fontRef>
-        </p:style>
-        <p:txBody>
-          <a:bodyPr rtlCol="0" anchor="ctr" wrap="square" lIns="109728" rIns="109728" tIns="73152" bIns="73152"/>
-          <a:lstStyle/>
-          <a:p>
-            <a:pPr algn="ctr"/>
-            <a:r>
-              <a:rPr sz="1000" b="0">
-                <a:solidFill>
-                  <a:srgbClr val="212427"/>
-                </a:solidFill>
-              </a:rPr>
-              <a:t>Richtlinie (A2)</a:t>
-            </a:r>
-          </a:p>
-        </p:txBody>
-      </p:sp>
-      <p:sp>
-        <p:nvSpPr>
-          <p:cNvPr id="12" name="Rectangle 11"/>
-          <p:cNvSpPr/>
-          <p:nvPr/>
-        </p:nvSpPr>
-        <p:spPr>
-          <a:xfrm>
-            <a:off x="5105400" y="3602736"/>
-            <a:ext cx="1203960" cy="832103"/>
-          </a:xfrm>
-          <a:prstGeom prst="rect">
-            <a:avLst/>
-          </a:prstGeom>
-          <a:noFill/>
-          <a:ln w="9525">
-            <a:solidFill>
-              <a:srgbClr val="212427"/>
-            </a:solidFill>
-          </a:ln>
-          <a:effectLst/>
-        </p:spPr>
-        <p:style>
-          <a:lnRef idx="1">
-            <a:schemeClr val="accent1"/>
-          </a:lnRef>
-          <a:fillRef idx="3">
-            <a:schemeClr val="accent1"/>
-          </a:fillRef>
-          <a:effectRef idx="2">
-            <a:schemeClr val="accent1"/>
-          </a:effectRef>
-          <a:fontRef idx="minor">
-            <a:schemeClr val="lt1"/>
-          </a:fontRef>
-        </p:style>
-        <p:txBody>
-          <a:bodyPr rtlCol="0" anchor="ctr" wrap="square" lIns="109728" rIns="109728" tIns="73152" bIns="73152"/>
-          <a:lstStyle/>
-          <a:p>
-            <a:pPr algn="ctr"/>
-            <a:r>
-              <a:rPr sz="1000" b="0">
-                <a:solidFill>
-                  <a:srgbClr val="212427"/>
-                </a:solidFill>
-              </a:rPr>
-              <a:t>Service-Definitionen (A3)</a:t>
-            </a:r>
-          </a:p>
-        </p:txBody>
-      </p:sp>
-      <p:sp>
-        <p:nvSpPr>
-          <p:cNvPr id="13" name="Rectangle 12"/>
-          <p:cNvSpPr/>
-          <p:nvPr/>
-        </p:nvSpPr>
-        <p:spPr>
-          <a:xfrm>
-            <a:off x="6400800" y="3602736"/>
-            <a:ext cx="1203960" cy="832103"/>
-          </a:xfrm>
-          <a:prstGeom prst="rect">
-            <a:avLst/>
-          </a:prstGeom>
-          <a:noFill/>
-          <a:ln w="9525">
-            <a:solidFill>
-              <a:srgbClr val="212427"/>
-            </a:solidFill>
-          </a:ln>
-          <a:effectLst/>
-        </p:spPr>
-        <p:style>
-          <a:lnRef idx="1">
-            <a:schemeClr val="accent1"/>
-          </a:lnRef>
-          <a:fillRef idx="3">
-            <a:schemeClr val="accent1"/>
-          </a:fillRef>
-          <a:effectRef idx="2">
-            <a:schemeClr val="accent1"/>
-          </a:effectRef>
-          <a:fontRef idx="minor">
-            <a:schemeClr val="lt1"/>
-          </a:fontRef>
-        </p:style>
-        <p:txBody>
-          <a:bodyPr rtlCol="0" anchor="ctr" wrap="square" lIns="109728" rIns="109728" tIns="73152" bIns="73152"/>
-          <a:lstStyle/>
-          <a:p>
-            <a:pPr algn="ctr"/>
-            <a:r>
-              <a:rPr sz="1000" b="0">
-                <a:solidFill>
-                  <a:srgbClr val="212427"/>
-                </a:solidFill>
-              </a:rPr>
-              <a:t>Zuständigkeiten (A4)</a:t>
-            </a:r>
-          </a:p>
-        </p:txBody>
-      </p:sp>
-      <p:sp>
-        <p:nvSpPr>
-          <p:cNvPr id="14" name="Rectangle 13"/>
-          <p:cNvSpPr/>
-          <p:nvPr/>
-        </p:nvSpPr>
-        <p:spPr>
-          <a:xfrm>
-            <a:off x="7696200" y="3602736"/>
-            <a:ext cx="1203960" cy="832103"/>
-          </a:xfrm>
-          <a:prstGeom prst="rect">
-            <a:avLst/>
-          </a:prstGeom>
-          <a:noFill/>
-          <a:ln w="9525">
-            <a:solidFill>
-              <a:srgbClr val="212427"/>
-            </a:solidFill>
-          </a:ln>
-          <a:effectLst/>
-        </p:spPr>
-        <p:style>
-          <a:lnRef idx="1">
-            <a:schemeClr val="accent1"/>
-          </a:lnRef>
-          <a:fillRef idx="3">
-            <a:schemeClr val="accent1"/>
-          </a:fillRef>
-          <a:effectRef idx="2">
-            <a:schemeClr val="accent1"/>
-          </a:effectRef>
-          <a:fontRef idx="minor">
-            <a:schemeClr val="lt1"/>
-          </a:fontRef>
-        </p:style>
-        <p:txBody>
-          <a:bodyPr rtlCol="0" anchor="ctr" wrap="square" lIns="109728" rIns="109728" tIns="73152" bIns="73152"/>
-          <a:lstStyle/>
-          <a:p>
-            <a:pPr algn="ctr"/>
-            <a:r>
-              <a:rPr sz="1000" b="0">
-                <a:solidFill>
-                  <a:srgbClr val="212427"/>
-                </a:solidFill>
-              </a:rPr>
-              <a:t>vorrangig erfüllen</a:t>
-            </a:r>
-          </a:p>
-        </p:txBody>
-      </p:sp>
-      <p:sp>
-        <p:nvSpPr>
-          <p:cNvPr id="15" name="Rectangle 14"/>
-          <p:cNvSpPr/>
-          <p:nvPr/>
-        </p:nvSpPr>
-        <p:spPr>
-          <a:xfrm>
-            <a:off x="8991600" y="3602736"/>
-            <a:ext cx="1203960" cy="832103"/>
-          </a:xfrm>
-          <a:prstGeom prst="rect">
-            <a:avLst/>
-          </a:prstGeom>
-          <a:noFill/>
-          <a:ln w="9525">
-            <a:solidFill>
-              <a:srgbClr val="212427"/>
-            </a:solidFill>
-          </a:ln>
-          <a:effectLst/>
-        </p:spPr>
-        <p:style>
-          <a:lnRef idx="1">
-            <a:schemeClr val="accent1"/>
-          </a:lnRef>
-          <a:fillRef idx="3">
-            <a:schemeClr val="accent1"/>
-          </a:fillRef>
-          <a:effectRef idx="2">
-            <a:schemeClr val="accent1"/>
-          </a:effectRef>
-          <a:fontRef idx="minor">
-            <a:schemeClr val="lt1"/>
-          </a:fontRef>
-        </p:style>
-        <p:txBody>
-          <a:bodyPr rtlCol="0" anchor="ctr" wrap="square" lIns="109728" rIns="109728" tIns="73152" bIns="73152"/>
-          <a:lstStyle/>
-          <a:p>
-            <a:pPr algn="ctr"/>
-            <a:r>
-              <a:rPr sz="1000" b="0">
-                <a:solidFill>
-                  <a:srgbClr val="212427"/>
-                </a:solidFill>
-              </a:rPr>
-              <a:t>es sind vier</a:t>
-            </a:r>
-          </a:p>
-        </p:txBody>
-      </p:sp>
-      <p:sp>
-        <p:nvSpPr>
-          <p:cNvPr id="16" name="Rectangle 15"/>
-          <p:cNvSpPr/>
-          <p:nvPr/>
-        </p:nvSpPr>
-        <p:spPr>
-          <a:xfrm>
-            <a:off x="10332720" y="3493008"/>
-            <a:ext cx="1188720" cy="1051560"/>
-          </a:xfrm>
-          <a:prstGeom prst="rect">
-            <a:avLst/>
-          </a:prstGeom>
-          <a:noFill/>
-          <a:ln>
-            <a:noFill/>
-          </a:ln>
-          <a:effectLst/>
-        </p:spPr>
-        <p:style>
-          <a:lnRef idx="1">
-            <a:schemeClr val="accent1"/>
-          </a:lnRef>
-          <a:fillRef idx="3">
-            <a:schemeClr val="accent1"/>
-          </a:fillRef>
-          <a:effectRef idx="2">
-            <a:schemeClr val="accent1"/>
-          </a:effectRef>
-          <a:fontRef idx="minor">
-            <a:schemeClr val="lt1"/>
-          </a:fontRef>
-        </p:style>
-        <p:txBody>
-          <a:bodyPr rtlCol="0" anchor="ctr" wrap="square" lIns="109728" rIns="109728" tIns="73152" bIns="73152"/>
-          <a:lstStyle/>
-          <a:p>
-            <a:pPr algn="r"/>
-            <a:r>
-              <a:rPr sz="2400" b="1">
-                <a:solidFill>
-                  <a:srgbClr val="212427"/>
-                </a:solidFill>
-              </a:rPr>
-              <a:t>5 bis 6</a:t>
-            </a:r>
-          </a:p>
-        </p:txBody>
-      </p:sp>
-      <p:sp>
-        <p:nvSpPr>
-          <p:cNvPr id="17" name="Rectangle 16"/>
-          <p:cNvSpPr/>
-          <p:nvPr/>
-        </p:nvSpPr>
-        <p:spPr>
-          <a:xfrm>
-            <a:off x="704088" y="4654296"/>
-            <a:ext cx="1828800" cy="1051560"/>
-          </a:xfrm>
-          <a:prstGeom prst="rect">
-            <a:avLst/>
-          </a:prstGeom>
-          <a:noFill/>
-          <a:ln>
-            <a:noFill/>
-          </a:ln>
-          <a:effectLst/>
-        </p:spPr>
-        <p:style>
-          <a:lnRef idx="1">
-            <a:schemeClr val="accent1"/>
-          </a:lnRef>
-          <a:fillRef idx="3">
-            <a:schemeClr val="accent1"/>
-          </a:fillRef>
-          <a:effectRef idx="2">
-            <a:schemeClr val="accent1"/>
-          </a:effectRef>
-          <a:fontRef idx="minor">
-            <a:schemeClr val="lt1"/>
-          </a:fontRef>
-        </p:style>
-        <p:txBody>
-          <a:bodyPr rtlCol="0" anchor="ctr" wrap="square" lIns="109728" rIns="109728" tIns="73152" bIns="73152"/>
-          <a:lstStyle/>
-          <a:p>
-            <a:pPr algn="l"/>
-            <a:r>
-              <a:rPr sz="1200" b="1">
-                <a:solidFill>
-                  <a:srgbClr val="5A6065"/>
-                </a:solidFill>
-              </a:rPr>
-              <a:t>Arbeitsdefinition</a:t>
-            </a:r>
-          </a:p>
-        </p:txBody>
-      </p:sp>
-      <p:sp>
-        <p:nvSpPr>
-          <p:cNvPr id="18" name="Rectangle 17"/>
-          <p:cNvSpPr/>
-          <p:nvPr/>
-        </p:nvSpPr>
-        <p:spPr>
-          <a:xfrm>
-            <a:off x="2514600" y="4764024"/>
-            <a:ext cx="1463040" cy="832103"/>
-          </a:xfrm>
-          <a:prstGeom prst="rect">
-            <a:avLst/>
-          </a:prstGeom>
-          <a:noFill/>
-          <a:ln w="9525">
-            <a:solidFill>
-              <a:srgbClr val="212427"/>
-            </a:solidFill>
-          </a:ln>
-          <a:effectLst/>
-        </p:spPr>
-        <p:style>
-          <a:lnRef idx="1">
-            <a:schemeClr val="accent1"/>
-          </a:lnRef>
-          <a:fillRef idx="3">
-            <a:schemeClr val="accent1"/>
-          </a:fillRef>
-          <a:effectRef idx="2">
-            <a:schemeClr val="accent1"/>
-          </a:effectRef>
-          <a:fontRef idx="minor">
-            <a:schemeClr val="lt1"/>
-          </a:fontRef>
-        </p:style>
-        <p:txBody>
-          <a:bodyPr rtlCol="0" anchor="ctr" wrap="square" lIns="109728" rIns="109728" tIns="73152" bIns="73152"/>
-          <a:lstStyle/>
-          <a:p>
-            <a:pPr algn="ctr"/>
-            <a:r>
-              <a:rPr sz="1000" b="0">
-                <a:solidFill>
-                  <a:srgbClr val="212427"/>
-                </a:solidFill>
-              </a:rPr>
-              <a:t>Strategie (A1)</a:t>
-            </a:r>
-          </a:p>
-        </p:txBody>
-      </p:sp>
-      <p:sp>
-        <p:nvSpPr>
-          <p:cNvPr id="19" name="Rectangle 18"/>
-          <p:cNvSpPr/>
-          <p:nvPr/>
-        </p:nvSpPr>
-        <p:spPr>
-          <a:xfrm>
-            <a:off x="4069080" y="4764024"/>
-            <a:ext cx="1463040" cy="832103"/>
-          </a:xfrm>
-          <a:prstGeom prst="rect">
-            <a:avLst/>
-          </a:prstGeom>
-          <a:noFill/>
-          <a:ln w="9525">
-            <a:solidFill>
-              <a:srgbClr val="212427"/>
-            </a:solidFill>
-          </a:ln>
-          <a:effectLst/>
-        </p:spPr>
-        <p:style>
-          <a:lnRef idx="1">
-            <a:schemeClr val="accent1"/>
-          </a:lnRef>
-          <a:fillRef idx="3">
-            <a:schemeClr val="accent1"/>
-          </a:fillRef>
-          <a:effectRef idx="2">
-            <a:schemeClr val="accent1"/>
-          </a:effectRef>
-          <a:fontRef idx="minor">
-            <a:schemeClr val="lt1"/>
-          </a:fontRef>
-        </p:style>
-        <p:txBody>
-          <a:bodyPr rtlCol="0" anchor="ctr" wrap="square" lIns="109728" rIns="109728" tIns="73152" bIns="73152"/>
-          <a:lstStyle/>
-          <a:p>
-            <a:pPr algn="ctr"/>
-            <a:r>
-              <a:rPr sz="1000" b="0">
-                <a:solidFill>
-                  <a:srgbClr val="212427"/>
-                </a:solidFill>
-              </a:rPr>
-              <a:t>Richtlinie (A2)</a:t>
-            </a:r>
-          </a:p>
-        </p:txBody>
-      </p:sp>
-      <p:sp>
-        <p:nvSpPr>
-          <p:cNvPr id="20" name="Rectangle 19"/>
-          <p:cNvSpPr/>
-          <p:nvPr/>
-        </p:nvSpPr>
-        <p:spPr>
-          <a:xfrm>
-            <a:off x="5623560" y="4764024"/>
-            <a:ext cx="1463040" cy="832103"/>
-          </a:xfrm>
-          <a:prstGeom prst="rect">
-            <a:avLst/>
-          </a:prstGeom>
-          <a:noFill/>
-          <a:ln w="9525">
-            <a:solidFill>
-              <a:srgbClr val="212427"/>
-            </a:solidFill>
-          </a:ln>
-          <a:effectLst/>
-        </p:spPr>
-        <p:style>
-          <a:lnRef idx="1">
-            <a:schemeClr val="accent1"/>
-          </a:lnRef>
-          <a:fillRef idx="3">
-            <a:schemeClr val="accent1"/>
-          </a:fillRef>
-          <a:effectRef idx="2">
-            <a:schemeClr val="accent1"/>
-          </a:effectRef>
-          <a:fontRef idx="minor">
-            <a:schemeClr val="lt1"/>
-          </a:fontRef>
-        </p:style>
-        <p:txBody>
-          <a:bodyPr rtlCol="0" anchor="ctr" wrap="square" lIns="109728" rIns="109728" tIns="73152" bIns="73152"/>
-          <a:lstStyle/>
-          <a:p>
-            <a:pPr algn="ctr"/>
-            <a:r>
-              <a:rPr sz="1000" b="0">
-                <a:solidFill>
-                  <a:srgbClr val="212427"/>
-                </a:solidFill>
-              </a:rPr>
-              <a:t>Service-Definitionen (A3)</a:t>
-            </a:r>
-          </a:p>
-        </p:txBody>
-      </p:sp>
-      <p:sp>
-        <p:nvSpPr>
-          <p:cNvPr id="21" name="Rectangle 20"/>
-          <p:cNvSpPr/>
-          <p:nvPr/>
-        </p:nvSpPr>
-        <p:spPr>
-          <a:xfrm>
-            <a:off x="7178040" y="4764024"/>
-            <a:ext cx="1463040" cy="832103"/>
-          </a:xfrm>
-          <a:prstGeom prst="rect">
-            <a:avLst/>
-          </a:prstGeom>
-          <a:noFill/>
-          <a:ln w="9525">
-            <a:solidFill>
-              <a:srgbClr val="212427"/>
-            </a:solidFill>
-          </a:ln>
-          <a:effectLst/>
-        </p:spPr>
-        <p:style>
-          <a:lnRef idx="1">
-            <a:schemeClr val="accent1"/>
-          </a:lnRef>
-          <a:fillRef idx="3">
-            <a:schemeClr val="accent1"/>
-          </a:fillRef>
-          <a:effectRef idx="2">
-            <a:schemeClr val="accent1"/>
-          </a:effectRef>
-          <a:fontRef idx="minor">
-            <a:schemeClr val="lt1"/>
-          </a:fontRef>
-        </p:style>
-        <p:txBody>
-          <a:bodyPr rtlCol="0" anchor="ctr" wrap="square" lIns="109728" rIns="109728" tIns="73152" bIns="73152"/>
-          <a:lstStyle/>
-          <a:p>
-            <a:pPr algn="ctr"/>
-            <a:r>
-              <a:rPr sz="1000" b="0">
-                <a:solidFill>
-                  <a:srgbClr val="212427"/>
-                </a:solidFill>
-              </a:rPr>
-              <a:t>Zuständigkeiten (A4)</a:t>
-            </a:r>
-          </a:p>
-        </p:txBody>
-      </p:sp>
-      <p:sp>
-        <p:nvSpPr>
-          <p:cNvPr id="22" name="Rectangle 21"/>
-          <p:cNvSpPr/>
-          <p:nvPr/>
-        </p:nvSpPr>
-        <p:spPr>
-          <a:xfrm>
-            <a:off x="8732520" y="4764024"/>
-            <a:ext cx="1463040" cy="832103"/>
-          </a:xfrm>
-          <a:prstGeom prst="rect">
-            <a:avLst/>
-          </a:prstGeom>
-          <a:noFill/>
-          <a:ln w="9525">
-            <a:solidFill>
-              <a:srgbClr val="212427"/>
-            </a:solidFill>
-          </a:ln>
-          <a:effectLst/>
-        </p:spPr>
-        <p:style>
-          <a:lnRef idx="1">
-            <a:schemeClr val="accent1"/>
-          </a:lnRef>
-          <a:fillRef idx="3">
-            <a:schemeClr val="accent1"/>
-          </a:fillRef>
-          <a:effectRef idx="2">
-            <a:schemeClr val="accent1"/>
-          </a:effectRef>
-          <a:fontRef idx="minor">
-            <a:schemeClr val="lt1"/>
-          </a:fontRef>
-        </p:style>
-        <p:txBody>
-          <a:bodyPr rtlCol="0" anchor="ctr" wrap="square" lIns="109728" rIns="109728" tIns="73152" bIns="73152"/>
-          <a:lstStyle/>
-          <a:p>
-            <a:pPr algn="ctr"/>
-            <a:r>
-              <a:rPr sz="1000" b="0">
-                <a:solidFill>
-                  <a:srgbClr val="212427"/>
-                </a:solidFill>
-              </a:rPr>
-              <a:t>vorrangig erfüllen</a:t>
-            </a:r>
-          </a:p>
-        </p:txBody>
-      </p:sp>
-      <p:sp>
-        <p:nvSpPr>
-          <p:cNvPr id="23" name="Rectangle 22"/>
-          <p:cNvSpPr/>
-          <p:nvPr/>
-        </p:nvSpPr>
-        <p:spPr>
-          <a:xfrm>
-            <a:off x="10332720" y="4654296"/>
-            <a:ext cx="1188720" cy="1051560"/>
-          </a:xfrm>
-          <a:prstGeom prst="rect">
-            <a:avLst/>
-          </a:prstGeom>
-          <a:noFill/>
-          <a:ln>
-            <a:noFill/>
-          </a:ln>
-          <a:effectLst/>
-        </p:spPr>
-        <p:style>
-          <a:lnRef idx="1">
-            <a:schemeClr val="accent1"/>
-          </a:lnRef>
-          <a:fillRef idx="3">
-            <a:schemeClr val="accent1"/>
-          </a:fillRef>
-          <a:effectRef idx="2">
-            <a:schemeClr val="accent1"/>
-          </a:effectRef>
-          <a:fontRef idx="minor">
-            <a:schemeClr val="lt1"/>
-          </a:fontRef>
-        </p:style>
-        <p:txBody>
-          <a:bodyPr rtlCol="0" anchor="ctr" wrap="square" lIns="109728" rIns="109728" tIns="73152" bIns="73152"/>
-          <a:lstStyle/>
-          <a:p>
-            <a:pPr algn="r"/>
-            <a:r>
-              <a:rPr sz="2400" b="1">
-                <a:solidFill>
-                  <a:srgbClr val="212427"/>
-                </a:solidFill>
-              </a:rPr>
-              <a:t>5</a:t>
-            </a:r>
           </a:p>
         </p:txBody>
       </p:sp>
@@ -51930,13 +52214,21 @@
             <p:ph type="title"/>
           </p:nvPr>
         </p:nvSpPr>
-        <p:spPr/>
+        <p:spPr>
+          <a:effectLst/>
+        </p:spPr>
         <p:txBody>
           <a:bodyPr/>
           <a:lstStyle/>
           <a:p>
             <a:r>
-              <a:t>Beispiel 3: Wie viele Aussagen?</a:t>
+              <a:rPr b="0" sz="2800" cap="none">
+                <a:solidFill>
+                  <a:srgbClr val="212427"/>
+                </a:solidFill>
+                <a:latin typeface="Verdana"/>
+              </a:rPr>
+              <a:t>Beispiel C: Wie viele Aussagen?</a:t>
             </a:r>
           </a:p>
         </p:txBody>
@@ -51949,17 +52241,17 @@
         </p:nvSpPr>
         <p:spPr>
           <a:xfrm>
-            <a:off x="704088" y="1143000"/>
-            <a:ext cx="10789920" cy="960120"/>
+            <a:off x="704088" y="1115568"/>
+            <a:ext cx="609600" cy="38100"/>
           </a:xfrm>
           <a:prstGeom prst="rect">
             <a:avLst/>
           </a:prstGeom>
-          <a:noFill/>
-          <a:ln w="9525">
-            <a:solidFill>
-              <a:srgbClr val="D6D7D8"/>
-            </a:solidFill>
+          <a:solidFill>
+            <a:srgbClr val="B1063A"/>
+          </a:solidFill>
+          <a:ln>
+            <a:noFill/>
           </a:ln>
           <a:effectLst/>
         </p:spPr>
@@ -51978,36 +52270,70 @@
           </a:fontRef>
         </p:style>
         <p:txBody>
-          <a:bodyPr rtlCol="0" anchor="ctr" wrap="square" lIns="109728" rIns="109728" tIns="73152" bIns="73152"/>
+          <a:bodyPr rtlCol="0" anchor="ctr"/>
           <a:lstStyle/>
           <a:p>
-            <a:pPr algn="l"/>
+            <a:pPr algn="ctr"/>
+          </a:p>
+        </p:txBody>
+      </p:sp>
+      <p:sp>
+        <p:nvSpPr>
+          <p:cNvPr id="5" name="TextBox 4"/>
+          <p:cNvSpPr txBox="1"/>
+          <p:nvPr/>
+        </p:nvSpPr>
+        <p:spPr>
+          <a:xfrm>
+            <a:off x="704088" y="1188720"/>
+            <a:ext cx="10789920" cy="685800"/>
+          </a:xfrm>
+          <a:prstGeom prst="rect">
+            <a:avLst/>
+          </a:prstGeom>
+          <a:noFill/>
+          <a:effectLst/>
+        </p:spPr>
+        <p:txBody>
+          <a:bodyPr wrap="square" anchor="ctr" lIns="36576" rIns="36576" tIns="27432" bIns="27432">
+            <a:spAutoFit/>
+          </a:bodyPr>
+          <a:lstStyle/>
+          <a:p>
+            <a:pPr algn="l">
+              <a:spcAft>
+                <a:spcPts val="0"/>
+              </a:spcAft>
+            </a:pPr>
             <a:r>
-              <a:rPr sz="1400" b="0">
+              <a:rPr sz="1500" b="0">
                 <a:solidFill>
                   <a:srgbClr val="212427"/>
                 </a:solidFill>
+                <a:latin typeface="Verdana"/>
               </a:rPr>
-              <a:t>Bei personellen Veränderungen müssen nicht mehr benötigte Benutzendenkennungen und Berechtigungen unverzüglich entfernt werden, um unberechtigte Zugriffe ehemaliger oder versetzter Mitarbeitender zu vermeiden. Es dürfen Berechtigungen nur hinsichtlich des tatsächlichen Bedarfs zur Aufgabenerfüllung vergeben werden.</a:t>
+              <a:t>Ausgabe und Entzug von Zutritts-, Zugangs- und Zugriffsmitteln sind zu dokumentieren und bei Kompromittierung sofort zu ersetzen.</a:t>
             </a:r>
           </a:p>
         </p:txBody>
       </p:sp>
       <p:sp>
         <p:nvSpPr>
-          <p:cNvPr id="5" name="Rectangle 4"/>
+          <p:cNvPr id="6" name="Rectangle 5"/>
           <p:cNvSpPr/>
           <p:nvPr/>
         </p:nvSpPr>
         <p:spPr>
           <a:xfrm>
-            <a:off x="704088" y="2331720"/>
-            <a:ext cx="1828800" cy="1051560"/>
+            <a:off x="704088" y="1920240"/>
+            <a:ext cx="10789920" cy="9525"/>
           </a:xfrm>
           <a:prstGeom prst="rect">
             <a:avLst/>
           </a:prstGeom>
-          <a:noFill/>
+          <a:solidFill>
+            <a:srgbClr val="D6D7D8"/>
+          </a:solidFill>
           <a:ln>
             <a:noFill/>
           </a:ln>
@@ -52028,40 +52354,152 @@
           </a:fontRef>
         </p:style>
         <p:txBody>
-          <a:bodyPr rtlCol="0" anchor="ctr" wrap="square" lIns="109728" rIns="109728" tIns="73152" bIns="73152"/>
+          <a:bodyPr rtlCol="0" anchor="ctr"/>
           <a:lstStyle/>
           <a:p>
-            <a:pPr algn="l"/>
+            <a:pPr algn="ctr"/>
+          </a:p>
+        </p:txBody>
+      </p:sp>
+      <p:sp>
+        <p:nvSpPr>
+          <p:cNvPr id="7" name="TextBox 6"/>
+          <p:cNvSpPr txBox="1"/>
+          <p:nvPr/>
+        </p:nvSpPr>
+        <p:spPr>
+          <a:xfrm>
+            <a:off x="704088" y="1965960"/>
+            <a:ext cx="2103120" cy="457200"/>
+          </a:xfrm>
+          <a:prstGeom prst="rect">
+            <a:avLst/>
+          </a:prstGeom>
+          <a:noFill/>
+          <a:effectLst/>
+        </p:spPr>
+        <p:txBody>
+          <a:bodyPr wrap="square" anchor="ctr" lIns="36576" rIns="36576" tIns="27432" bIns="27432">
+            <a:spAutoFit/>
+          </a:bodyPr>
+          <a:lstStyle/>
+          <a:p>
+            <a:pPr algn="l">
+              <a:spcAft>
+                <a:spcPts val="0"/>
+              </a:spcAft>
+            </a:pPr>
             <a:r>
-              <a:rPr sz="1200" b="1">
+              <a:rPr sz="1200" b="0">
                 <a:solidFill>
                   <a:srgbClr val="5A6065"/>
                 </a:solidFill>
+                <a:latin typeface="Verdana"/>
               </a:rPr>
-              <a:t>Alltag</a:t>
+              <a:t>Alltag, ganz</a:t>
             </a:r>
           </a:p>
         </p:txBody>
       </p:sp>
       <p:sp>
         <p:nvSpPr>
-          <p:cNvPr id="6" name="Rectangle 5"/>
+          <p:cNvPr id="8" name="TextBox 7"/>
+          <p:cNvSpPr txBox="1"/>
+          <p:nvPr/>
+        </p:nvSpPr>
+        <p:spPr>
+          <a:xfrm>
+            <a:off x="2898648" y="1965960"/>
+            <a:ext cx="7589520" cy="457200"/>
+          </a:xfrm>
+          <a:prstGeom prst="rect">
+            <a:avLst/>
+          </a:prstGeom>
+          <a:noFill/>
+          <a:effectLst/>
+        </p:spPr>
+        <p:txBody>
+          <a:bodyPr wrap="square" anchor="ctr" lIns="36576" rIns="36576" tIns="27432" bIns="27432">
+            <a:spAutoFit/>
+          </a:bodyPr>
+          <a:lstStyle/>
+          <a:p>
+            <a:pPr algn="l">
+              <a:spcAft>
+                <a:spcPts val="100"/>
+              </a:spcAft>
+            </a:pPr>
+            <a:r>
+              <a:rPr sz="1100" b="0">
+                <a:solidFill>
+                  <a:srgbClr val="212427"/>
+                </a:solidFill>
+                <a:latin typeface="Verdana"/>
+              </a:rPr>
+              <a:t>der ganze Satz</a:t>
+            </a:r>
+          </a:p>
+        </p:txBody>
+      </p:sp>
+      <p:sp>
+        <p:nvSpPr>
+          <p:cNvPr id="9" name="TextBox 8"/>
+          <p:cNvSpPr txBox="1"/>
+          <p:nvPr/>
+        </p:nvSpPr>
+        <p:spPr>
+          <a:xfrm>
+            <a:off x="10579608" y="1965960"/>
+            <a:ext cx="914400" cy="457200"/>
+          </a:xfrm>
+          <a:prstGeom prst="rect">
+            <a:avLst/>
+          </a:prstGeom>
+          <a:noFill/>
+          <a:effectLst/>
+        </p:spPr>
+        <p:txBody>
+          <a:bodyPr wrap="square" anchor="ctr" lIns="36576" rIns="36576" tIns="27432" bIns="27432">
+            <a:spAutoFit/>
+          </a:bodyPr>
+          <a:lstStyle/>
+          <a:p>
+            <a:pPr algn="r">
+              <a:spcAft>
+                <a:spcPts val="0"/>
+              </a:spcAft>
+            </a:pPr>
+            <a:r>
+              <a:rPr sz="2600" b="0">
+                <a:solidFill>
+                  <a:srgbClr val="5A6065"/>
+                </a:solidFill>
+                <a:latin typeface="Verdana"/>
+              </a:rPr>
+              <a:t>1</a:t>
+            </a:r>
+          </a:p>
+        </p:txBody>
+      </p:sp>
+      <p:sp>
+        <p:nvSpPr>
+          <p:cNvPr id="10" name="Rectangle 9"/>
           <p:cNvSpPr/>
           <p:nvPr/>
         </p:nvSpPr>
         <p:spPr>
           <a:xfrm>
-            <a:off x="2514600" y="2441448"/>
-            <a:ext cx="3794760" cy="832103"/>
+            <a:off x="704088" y="2423160"/>
+            <a:ext cx="10789920" cy="9525"/>
           </a:xfrm>
           <a:prstGeom prst="rect">
             <a:avLst/>
           </a:prstGeom>
-          <a:noFill/>
-          <a:ln w="9525">
-            <a:solidFill>
-              <a:srgbClr val="212427"/>
-            </a:solidFill>
+          <a:solidFill>
+            <a:srgbClr val="D6D7D8"/>
+          </a:solidFill>
+          <a:ln>
+            <a:noFill/>
           </a:ln>
           <a:effectLst/>
         </p:spPr>
@@ -52080,40 +52518,168 @@
           </a:fontRef>
         </p:style>
         <p:txBody>
-          <a:bodyPr rtlCol="0" anchor="ctr" wrap="square" lIns="109728" rIns="109728" tIns="73152" bIns="73152"/>
+          <a:bodyPr rtlCol="0" anchor="ctr"/>
           <a:lstStyle/>
           <a:p>
             <a:pPr algn="ctr"/>
+          </a:p>
+        </p:txBody>
+      </p:sp>
+      <p:sp>
+        <p:nvSpPr>
+          <p:cNvPr id="11" name="TextBox 10"/>
+          <p:cNvSpPr txBox="1"/>
+          <p:nvPr/>
+        </p:nvSpPr>
+        <p:spPr>
+          <a:xfrm>
+            <a:off x="704088" y="2423160"/>
+            <a:ext cx="2103120" cy="731520"/>
+          </a:xfrm>
+          <a:prstGeom prst="rect">
+            <a:avLst/>
+          </a:prstGeom>
+          <a:noFill/>
+          <a:effectLst/>
+        </p:spPr>
+        <p:txBody>
+          <a:bodyPr wrap="square" anchor="ctr" lIns="36576" rIns="36576" tIns="27432" bIns="27432">
+            <a:spAutoFit/>
+          </a:bodyPr>
+          <a:lstStyle/>
+          <a:p>
+            <a:pPr algn="l">
+              <a:spcAft>
+                <a:spcPts val="0"/>
+              </a:spcAft>
+            </a:pPr>
             <a:r>
               <a:rPr sz="1200" b="0">
                 <a:solidFill>
-                  <a:srgbClr val="212427"/>
+                  <a:srgbClr val="5A6065"/>
                 </a:solidFill>
+                <a:latin typeface="Verdana"/>
               </a:rPr>
-              <a:t>Bei personellen Veränderungen ... zu vermeiden.</a:t>
+              <a:t>Alltag, feiner</a:t>
             </a:r>
           </a:p>
         </p:txBody>
       </p:sp>
       <p:sp>
         <p:nvSpPr>
-          <p:cNvPr id="7" name="Rectangle 6"/>
+          <p:cNvPr id="12" name="TextBox 11"/>
+          <p:cNvSpPr txBox="1"/>
+          <p:nvPr/>
+        </p:nvSpPr>
+        <p:spPr>
+          <a:xfrm>
+            <a:off x="2898648" y="2423160"/>
+            <a:ext cx="7589520" cy="731520"/>
+          </a:xfrm>
+          <a:prstGeom prst="rect">
+            <a:avLst/>
+          </a:prstGeom>
+          <a:noFill/>
+          <a:effectLst/>
+        </p:spPr>
+        <p:txBody>
+          <a:bodyPr wrap="square" anchor="ctr" lIns="36576" rIns="36576" tIns="27432" bIns="27432">
+            <a:spAutoFit/>
+          </a:bodyPr>
+          <a:lstStyle/>
+          <a:p>
+            <a:pPr algn="l">
+              <a:spcAft>
+                <a:spcPts val="100"/>
+              </a:spcAft>
+            </a:pPr>
+            <a:r>
+              <a:rPr sz="1100" b="0">
+                <a:solidFill>
+                  <a:srgbClr val="212427"/>
+                </a:solidFill>
+                <a:latin typeface="Verdana"/>
+              </a:rPr>
+              <a:t>1) Ausgabe und Entzug von Zutritts-, Zugangs- und Zugriffsmitteln sind zu dokumentieren</a:t>
+            </a:r>
+          </a:p>
+          <a:p>
+            <a:pPr algn="l">
+              <a:spcAft>
+                <a:spcPts val="100"/>
+              </a:spcAft>
+            </a:pPr>
+            <a:r>
+              <a:rPr sz="1100" b="0">
+                <a:solidFill>
+                  <a:srgbClr val="212427"/>
+                </a:solidFill>
+                <a:latin typeface="Verdana"/>
+              </a:rPr>
+              <a:t>2) und bei Kompromittierung sofort zu ersetzen</a:t>
+            </a:r>
+          </a:p>
+        </p:txBody>
+      </p:sp>
+      <p:sp>
+        <p:nvSpPr>
+          <p:cNvPr id="13" name="TextBox 12"/>
+          <p:cNvSpPr txBox="1"/>
+          <p:nvPr/>
+        </p:nvSpPr>
+        <p:spPr>
+          <a:xfrm>
+            <a:off x="10579608" y="2423160"/>
+            <a:ext cx="914400" cy="731520"/>
+          </a:xfrm>
+          <a:prstGeom prst="rect">
+            <a:avLst/>
+          </a:prstGeom>
+          <a:noFill/>
+          <a:effectLst/>
+        </p:spPr>
+        <p:txBody>
+          <a:bodyPr wrap="square" anchor="ctr" lIns="36576" rIns="36576" tIns="27432" bIns="27432">
+            <a:spAutoFit/>
+          </a:bodyPr>
+          <a:lstStyle/>
+          <a:p>
+            <a:pPr algn="r">
+              <a:spcAft>
+                <a:spcPts val="0"/>
+              </a:spcAft>
+            </a:pPr>
+            <a:r>
+              <a:rPr sz="2600" b="0">
+                <a:solidFill>
+                  <a:srgbClr val="5A6065"/>
+                </a:solidFill>
+                <a:latin typeface="Verdana"/>
+              </a:rPr>
+              <a:t>2</a:t>
+            </a:r>
+          </a:p>
+        </p:txBody>
+      </p:sp>
+      <p:sp>
+        <p:nvSpPr>
+          <p:cNvPr id="14" name="Rectangle 13"/>
           <p:cNvSpPr/>
           <p:nvPr/>
         </p:nvSpPr>
         <p:spPr>
           <a:xfrm>
-            <a:off x="6400800" y="2441448"/>
-            <a:ext cx="3794760" cy="832103"/>
+            <a:off x="704088" y="3154680"/>
+            <a:ext cx="10789920" cy="9525"/>
           </a:xfrm>
           <a:prstGeom prst="rect">
             <a:avLst/>
           </a:prstGeom>
-          <a:noFill/>
-          <a:ln w="9525">
-            <a:solidFill>
-              <a:srgbClr val="212427"/>
-            </a:solidFill>
+          <a:solidFill>
+            <a:srgbClr val="D6D7D8"/>
+          </a:solidFill>
+          <a:ln>
+            <a:noFill/>
           </a:ln>
           <a:effectLst/>
         </p:spPr>
@@ -52132,36 +52698,278 @@
           </a:fontRef>
         </p:style>
         <p:txBody>
-          <a:bodyPr rtlCol="0" anchor="ctr" wrap="square" lIns="109728" rIns="109728" tIns="73152" bIns="73152"/>
+          <a:bodyPr rtlCol="0" anchor="ctr"/>
           <a:lstStyle/>
           <a:p>
             <a:pPr algn="ctr"/>
+          </a:p>
+        </p:txBody>
+      </p:sp>
+      <p:sp>
+        <p:nvSpPr>
+          <p:cNvPr id="15" name="TextBox 14"/>
+          <p:cNvSpPr txBox="1"/>
+          <p:nvPr/>
+        </p:nvSpPr>
+        <p:spPr>
+          <a:xfrm>
+            <a:off x="704088" y="3154680"/>
+            <a:ext cx="2103120" cy="1554480"/>
+          </a:xfrm>
+          <a:prstGeom prst="rect">
+            <a:avLst/>
+          </a:prstGeom>
+          <a:noFill/>
+          <a:effectLst/>
+        </p:spPr>
+        <p:txBody>
+          <a:bodyPr wrap="square" anchor="ctr" lIns="36576" rIns="36576" tIns="27432" bIns="27432">
+            <a:spAutoFit/>
+          </a:bodyPr>
+          <a:lstStyle/>
+          <a:p>
+            <a:pPr algn="l">
+              <a:spcAft>
+                <a:spcPts val="0"/>
+              </a:spcAft>
+            </a:pPr>
             <a:r>
               <a:rPr sz="1200" b="0">
                 <a:solidFill>
-                  <a:srgbClr val="212427"/>
+                  <a:srgbClr val="5A6065"/>
                 </a:solidFill>
+                <a:latin typeface="Verdana"/>
               </a:rPr>
-              <a:t>Es dürfen Berechtigungen nur ... vergeben werden.</a:t>
+              <a:t>Logik</a:t>
             </a:r>
           </a:p>
         </p:txBody>
       </p:sp>
       <p:sp>
         <p:nvSpPr>
-          <p:cNvPr id="8" name="Rectangle 7"/>
+          <p:cNvPr id="16" name="TextBox 15"/>
+          <p:cNvSpPr txBox="1"/>
+          <p:nvPr/>
+        </p:nvSpPr>
+        <p:spPr>
+          <a:xfrm>
+            <a:off x="2898648" y="3154680"/>
+            <a:ext cx="7589520" cy="1554480"/>
+          </a:xfrm>
+          <a:prstGeom prst="rect">
+            <a:avLst/>
+          </a:prstGeom>
+          <a:noFill/>
+          <a:effectLst/>
+        </p:spPr>
+        <p:txBody>
+          <a:bodyPr wrap="square" anchor="ctr" lIns="36576" rIns="36576" tIns="27432" bIns="27432">
+            <a:spAutoFit/>
+          </a:bodyPr>
+          <a:lstStyle/>
+          <a:p>
+            <a:pPr algn="l">
+              <a:spcAft>
+                <a:spcPts val="100"/>
+              </a:spcAft>
+            </a:pPr>
+            <a:r>
+              <a:rPr sz="900" b="0">
+                <a:solidFill>
+                  <a:srgbClr val="212427"/>
+                </a:solidFill>
+                <a:latin typeface="Verdana"/>
+              </a:rPr>
+              <a:t>1) Die Ausgabe von Zutrittsmitteln ist zu dokumentieren.</a:t>
+            </a:r>
+          </a:p>
+          <a:p>
+            <a:pPr algn="l">
+              <a:spcAft>
+                <a:spcPts val="100"/>
+              </a:spcAft>
+            </a:pPr>
+            <a:r>
+              <a:rPr sz="900" b="0">
+                <a:solidFill>
+                  <a:srgbClr val="212427"/>
+                </a:solidFill>
+                <a:latin typeface="Verdana"/>
+              </a:rPr>
+              <a:t>2) ... Zugangsmitteln ...</a:t>
+            </a:r>
+          </a:p>
+          <a:p>
+            <a:pPr algn="l">
+              <a:spcAft>
+                <a:spcPts val="100"/>
+              </a:spcAft>
+            </a:pPr>
+            <a:r>
+              <a:rPr sz="900" b="0">
+                <a:solidFill>
+                  <a:srgbClr val="212427"/>
+                </a:solidFill>
+                <a:latin typeface="Verdana"/>
+              </a:rPr>
+              <a:t>3) ... Zugriffsmitteln ...</a:t>
+            </a:r>
+          </a:p>
+          <a:p>
+            <a:pPr algn="l">
+              <a:spcAft>
+                <a:spcPts val="100"/>
+              </a:spcAft>
+            </a:pPr>
+            <a:r>
+              <a:rPr sz="900" b="0">
+                <a:solidFill>
+                  <a:srgbClr val="212427"/>
+                </a:solidFill>
+                <a:latin typeface="Verdana"/>
+              </a:rPr>
+              <a:t>4) Der Entzug von Zutrittsmitteln ist zu dokumentieren.</a:t>
+            </a:r>
+          </a:p>
+          <a:p>
+            <a:pPr algn="l">
+              <a:spcAft>
+                <a:spcPts val="100"/>
+              </a:spcAft>
+            </a:pPr>
+            <a:r>
+              <a:rPr sz="900" b="0">
+                <a:solidFill>
+                  <a:srgbClr val="212427"/>
+                </a:solidFill>
+                <a:latin typeface="Verdana"/>
+              </a:rPr>
+              <a:t>5) ... Zugangsmitteln ...</a:t>
+            </a:r>
+          </a:p>
+          <a:p>
+            <a:pPr algn="l">
+              <a:spcAft>
+                <a:spcPts val="100"/>
+              </a:spcAft>
+            </a:pPr>
+            <a:r>
+              <a:rPr sz="900" b="0">
+                <a:solidFill>
+                  <a:srgbClr val="212427"/>
+                </a:solidFill>
+                <a:latin typeface="Verdana"/>
+              </a:rPr>
+              <a:t>6) ... Zugriffsmitteln ...</a:t>
+            </a:r>
+          </a:p>
+          <a:p>
+            <a:pPr algn="l">
+              <a:spcAft>
+                <a:spcPts val="100"/>
+              </a:spcAft>
+            </a:pPr>
+            <a:r>
+              <a:rPr sz="900" b="0">
+                <a:solidFill>
+                  <a:srgbClr val="212427"/>
+                </a:solidFill>
+                <a:latin typeface="Verdana"/>
+              </a:rPr>
+              <a:t>7) Zutrittsmittel sind bei Kompromittierung sofort zu ersetzen.</a:t>
+            </a:r>
+          </a:p>
+          <a:p>
+            <a:pPr algn="l">
+              <a:spcAft>
+                <a:spcPts val="100"/>
+              </a:spcAft>
+            </a:pPr>
+            <a:r>
+              <a:rPr sz="900" b="0">
+                <a:solidFill>
+                  <a:srgbClr val="212427"/>
+                </a:solidFill>
+                <a:latin typeface="Verdana"/>
+              </a:rPr>
+              <a:t>8) Zugangsmittel ...</a:t>
+            </a:r>
+          </a:p>
+          <a:p>
+            <a:pPr algn="l">
+              <a:spcAft>
+                <a:spcPts val="100"/>
+              </a:spcAft>
+            </a:pPr>
+            <a:r>
+              <a:rPr sz="900" b="0">
+                <a:solidFill>
+                  <a:srgbClr val="212427"/>
+                </a:solidFill>
+                <a:latin typeface="Verdana"/>
+              </a:rPr>
+              <a:t>9) Zugriffsmittel ...</a:t>
+            </a:r>
+          </a:p>
+        </p:txBody>
+      </p:sp>
+      <p:sp>
+        <p:nvSpPr>
+          <p:cNvPr id="17" name="TextBox 16"/>
+          <p:cNvSpPr txBox="1"/>
+          <p:nvPr/>
+        </p:nvSpPr>
+        <p:spPr>
+          <a:xfrm>
+            <a:off x="10579608" y="3154680"/>
+            <a:ext cx="914400" cy="1554480"/>
+          </a:xfrm>
+          <a:prstGeom prst="rect">
+            <a:avLst/>
+          </a:prstGeom>
+          <a:noFill/>
+          <a:effectLst/>
+        </p:spPr>
+        <p:txBody>
+          <a:bodyPr wrap="square" anchor="ctr" lIns="36576" rIns="36576" tIns="27432" bIns="27432">
+            <a:spAutoFit/>
+          </a:bodyPr>
+          <a:lstStyle/>
+          <a:p>
+            <a:pPr algn="r">
+              <a:spcAft>
+                <a:spcPts val="0"/>
+              </a:spcAft>
+            </a:pPr>
+            <a:r>
+              <a:rPr sz="2600" b="0">
+                <a:solidFill>
+                  <a:srgbClr val="5A6065"/>
+                </a:solidFill>
+                <a:latin typeface="Verdana"/>
+              </a:rPr>
+              <a:t>9</a:t>
+            </a:r>
+          </a:p>
+        </p:txBody>
+      </p:sp>
+      <p:sp>
+        <p:nvSpPr>
+          <p:cNvPr id="18" name="Rectangle 17"/>
           <p:cNvSpPr/>
           <p:nvPr/>
         </p:nvSpPr>
         <p:spPr>
           <a:xfrm>
-            <a:off x="10332720" y="2331720"/>
-            <a:ext cx="1188720" cy="1051560"/>
+            <a:off x="704088" y="4709160"/>
+            <a:ext cx="10789920" cy="9525"/>
           </a:xfrm>
           <a:prstGeom prst="rect">
             <a:avLst/>
           </a:prstGeom>
-          <a:noFill/>
+          <a:solidFill>
+            <a:srgbClr val="D6D7D8"/>
+          </a:solidFill>
           <a:ln>
             <a:noFill/>
           </a:ln>
@@ -52182,36 +52990,182 @@
           </a:fontRef>
         </p:style>
         <p:txBody>
-          <a:bodyPr rtlCol="0" anchor="ctr" wrap="square" lIns="109728" rIns="109728" tIns="73152" bIns="73152"/>
+          <a:bodyPr rtlCol="0" anchor="ctr"/>
           <a:lstStyle/>
           <a:p>
-            <a:pPr algn="r"/>
+            <a:pPr algn="ctr"/>
+          </a:p>
+        </p:txBody>
+      </p:sp>
+      <p:sp>
+        <p:nvSpPr>
+          <p:cNvPr id="19" name="TextBox 18"/>
+          <p:cNvSpPr txBox="1"/>
+          <p:nvPr/>
+        </p:nvSpPr>
+        <p:spPr>
+          <a:xfrm>
+            <a:off x="704088" y="4709160"/>
+            <a:ext cx="2103120" cy="960120"/>
+          </a:xfrm>
+          <a:prstGeom prst="rect">
+            <a:avLst/>
+          </a:prstGeom>
+          <a:noFill/>
+          <a:effectLst/>
+        </p:spPr>
+        <p:txBody>
+          <a:bodyPr wrap="square" anchor="ctr" lIns="36576" rIns="36576" tIns="27432" bIns="27432">
+            <a:spAutoFit/>
+          </a:bodyPr>
+          <a:lstStyle/>
+          <a:p>
+            <a:pPr algn="l">
+              <a:spcAft>
+                <a:spcPts val="0"/>
+              </a:spcAft>
+            </a:pPr>
             <a:r>
-              <a:rPr sz="2400" b="1">
+              <a:rPr sz="1200" b="0">
                 <a:solidFill>
-                  <a:srgbClr val="212427"/>
+                  <a:srgbClr val="5A6065"/>
                 </a:solidFill>
+                <a:latin typeface="Verdana"/>
               </a:rPr>
-              <a:t>2</a:t>
+              <a:t>Arbeitsdefinition</a:t>
             </a:r>
           </a:p>
         </p:txBody>
       </p:sp>
       <p:sp>
         <p:nvSpPr>
-          <p:cNvPr id="9" name="Rectangle 8"/>
+          <p:cNvPr id="20" name="TextBox 19"/>
+          <p:cNvSpPr txBox="1"/>
+          <p:nvPr/>
+        </p:nvSpPr>
+        <p:spPr>
+          <a:xfrm>
+            <a:off x="2898648" y="4709160"/>
+            <a:ext cx="7589520" cy="960120"/>
+          </a:xfrm>
+          <a:prstGeom prst="rect">
+            <a:avLst/>
+          </a:prstGeom>
+          <a:noFill/>
+          <a:effectLst/>
+        </p:spPr>
+        <p:txBody>
+          <a:bodyPr wrap="square" anchor="ctr" lIns="36576" rIns="36576" tIns="27432" bIns="27432">
+            <a:spAutoFit/>
+          </a:bodyPr>
+          <a:lstStyle/>
+          <a:p>
+            <a:pPr algn="l">
+              <a:spcAft>
+                <a:spcPts val="100"/>
+              </a:spcAft>
+            </a:pPr>
+            <a:r>
+              <a:rPr sz="1100" b="0">
+                <a:solidFill>
+                  <a:srgbClr val="212427"/>
+                </a:solidFill>
+                <a:latin typeface="Verdana"/>
+              </a:rPr>
+              <a:t>1) Die Ausgabe von Zutritts-, Zugangs- und Zugriffsmitteln ist zu dokumentieren.</a:t>
+            </a:r>
+          </a:p>
+          <a:p>
+            <a:pPr algn="l">
+              <a:spcAft>
+                <a:spcPts val="100"/>
+              </a:spcAft>
+            </a:pPr>
+            <a:r>
+              <a:rPr sz="1100" b="0">
+                <a:solidFill>
+                  <a:srgbClr val="212427"/>
+                </a:solidFill>
+                <a:latin typeface="Verdana"/>
+              </a:rPr>
+              <a:t>2) Der Entzug von Zutritts-, Zugangs- und Zugriffsmitteln ist zu dokumentieren.</a:t>
+            </a:r>
+          </a:p>
+          <a:p>
+            <a:pPr algn="l">
+              <a:spcAft>
+                <a:spcPts val="100"/>
+              </a:spcAft>
+            </a:pPr>
+            <a:r>
+              <a:rPr sz="1100" b="0">
+                <a:solidFill>
+                  <a:srgbClr val="212427"/>
+                </a:solidFill>
+                <a:latin typeface="Verdana"/>
+              </a:rPr>
+              <a:t>3) Zutritts-, Zugangs- und Zugriffsmittel sind bei Kompromittierung sofort zu ersetzen.</a:t>
+            </a:r>
+          </a:p>
+        </p:txBody>
+      </p:sp>
+      <p:sp>
+        <p:nvSpPr>
+          <p:cNvPr id="21" name="TextBox 20"/>
+          <p:cNvSpPr txBox="1"/>
+          <p:nvPr/>
+        </p:nvSpPr>
+        <p:spPr>
+          <a:xfrm>
+            <a:off x="10579608" y="4709160"/>
+            <a:ext cx="914400" cy="960120"/>
+          </a:xfrm>
+          <a:prstGeom prst="rect">
+            <a:avLst/>
+          </a:prstGeom>
+          <a:noFill/>
+          <a:effectLst/>
+        </p:spPr>
+        <p:txBody>
+          <a:bodyPr wrap="square" anchor="ctr" lIns="36576" rIns="36576" tIns="27432" bIns="27432">
+            <a:spAutoFit/>
+          </a:bodyPr>
+          <a:lstStyle/>
+          <a:p>
+            <a:pPr algn="r">
+              <a:spcAft>
+                <a:spcPts val="0"/>
+              </a:spcAft>
+            </a:pPr>
+            <a:r>
+              <a:rPr sz="2600" b="0">
+                <a:solidFill>
+                  <a:srgbClr val="5A6065"/>
+                </a:solidFill>
+                <a:latin typeface="Verdana"/>
+              </a:rPr>
+              <a:t>3</a:t>
+            </a:r>
+          </a:p>
+        </p:txBody>
+      </p:sp>
+      <p:sp>
+        <p:nvSpPr>
+          <p:cNvPr id="22" name="Rectangle 21"/>
           <p:cNvSpPr/>
           <p:nvPr/>
         </p:nvSpPr>
         <p:spPr>
           <a:xfrm>
-            <a:off x="704088" y="3493008"/>
-            <a:ext cx="1828800" cy="1051560"/>
+            <a:off x="704088" y="5669280"/>
+            <a:ext cx="10789920" cy="9525"/>
           </a:xfrm>
           <a:prstGeom prst="rect">
             <a:avLst/>
           </a:prstGeom>
-          <a:noFill/>
+          <a:solidFill>
+            <a:srgbClr val="D6D7D8"/>
+          </a:solidFill>
           <a:ln>
             <a:noFill/>
           </a:ln>
@@ -52232,636 +53186,10 @@
           </a:fontRef>
         </p:style>
         <p:txBody>
-          <a:bodyPr rtlCol="0" anchor="ctr" wrap="square" lIns="109728" rIns="109728" tIns="73152" bIns="73152"/>
-          <a:lstStyle/>
-          <a:p>
-            <a:pPr algn="l"/>
-            <a:r>
-              <a:rPr sz="1200" b="1">
-                <a:solidFill>
-                  <a:srgbClr val="5A6065"/>
-                </a:solidFill>
-              </a:rPr>
-              <a:t>Logik</a:t>
-            </a:r>
-          </a:p>
-        </p:txBody>
-      </p:sp>
-      <p:sp>
-        <p:nvSpPr>
-          <p:cNvPr id="10" name="Rectangle 9"/>
-          <p:cNvSpPr/>
-          <p:nvPr/>
-        </p:nvSpPr>
-        <p:spPr>
-          <a:xfrm>
-            <a:off x="2514600" y="3602736"/>
-            <a:ext cx="1463040" cy="832103"/>
-          </a:xfrm>
-          <a:prstGeom prst="rect">
-            <a:avLst/>
-          </a:prstGeom>
-          <a:noFill/>
-          <a:ln w="9525">
-            <a:solidFill>
-              <a:srgbClr val="212427"/>
-            </a:solidFill>
-          </a:ln>
-          <a:effectLst/>
-        </p:spPr>
-        <p:style>
-          <a:lnRef idx="1">
-            <a:schemeClr val="accent1"/>
-          </a:lnRef>
-          <a:fillRef idx="3">
-            <a:schemeClr val="accent1"/>
-          </a:fillRef>
-          <a:effectRef idx="2">
-            <a:schemeClr val="accent1"/>
-          </a:effectRef>
-          <a:fontRef idx="minor">
-            <a:schemeClr val="lt1"/>
-          </a:fontRef>
-        </p:style>
-        <p:txBody>
-          <a:bodyPr rtlCol="0" anchor="ctr" wrap="square" lIns="109728" rIns="109728" tIns="73152" bIns="73152"/>
+          <a:bodyPr rtlCol="0" anchor="ctr"/>
           <a:lstStyle/>
           <a:p>
             <a:pPr algn="ctr"/>
-            <a:r>
-              <a:rPr sz="1000" b="0">
-                <a:solidFill>
-                  <a:srgbClr val="212427"/>
-                </a:solidFill>
-              </a:rPr>
-              <a:t>Kennungen entfernen</a:t>
-            </a:r>
-          </a:p>
-        </p:txBody>
-      </p:sp>
-      <p:sp>
-        <p:nvSpPr>
-          <p:cNvPr id="11" name="Rectangle 10"/>
-          <p:cNvSpPr/>
-          <p:nvPr/>
-        </p:nvSpPr>
-        <p:spPr>
-          <a:xfrm>
-            <a:off x="4069080" y="3602736"/>
-            <a:ext cx="1463040" cy="832103"/>
-          </a:xfrm>
-          <a:prstGeom prst="rect">
-            <a:avLst/>
-          </a:prstGeom>
-          <a:noFill/>
-          <a:ln w="9525">
-            <a:solidFill>
-              <a:srgbClr val="212427"/>
-            </a:solidFill>
-          </a:ln>
-          <a:effectLst/>
-        </p:spPr>
-        <p:style>
-          <a:lnRef idx="1">
-            <a:schemeClr val="accent1"/>
-          </a:lnRef>
-          <a:fillRef idx="3">
-            <a:schemeClr val="accent1"/>
-          </a:fillRef>
-          <a:effectRef idx="2">
-            <a:schemeClr val="accent1"/>
-          </a:effectRef>
-          <a:fontRef idx="minor">
-            <a:schemeClr val="lt1"/>
-          </a:fontRef>
-        </p:style>
-        <p:txBody>
-          <a:bodyPr rtlCol="0" anchor="ctr" wrap="square" lIns="109728" rIns="109728" tIns="73152" bIns="73152"/>
-          <a:lstStyle/>
-          <a:p>
-            <a:pPr algn="ctr"/>
-            <a:r>
-              <a:rPr sz="1000" b="0">
-                <a:solidFill>
-                  <a:srgbClr val="212427"/>
-                </a:solidFill>
-              </a:rPr>
-              <a:t>Berechtigungen entfernen</a:t>
-            </a:r>
-          </a:p>
-        </p:txBody>
-      </p:sp>
-      <p:sp>
-        <p:nvSpPr>
-          <p:cNvPr id="12" name="Rectangle 11"/>
-          <p:cNvSpPr/>
-          <p:nvPr/>
-        </p:nvSpPr>
-        <p:spPr>
-          <a:xfrm>
-            <a:off x="5623560" y="3602736"/>
-            <a:ext cx="1463040" cy="832103"/>
-          </a:xfrm>
-          <a:prstGeom prst="rect">
-            <a:avLst/>
-          </a:prstGeom>
-          <a:noFill/>
-          <a:ln w="9525">
-            <a:solidFill>
-              <a:srgbClr val="212427"/>
-            </a:solidFill>
-          </a:ln>
-          <a:effectLst/>
-        </p:spPr>
-        <p:style>
-          <a:lnRef idx="1">
-            <a:schemeClr val="accent1"/>
-          </a:lnRef>
-          <a:fillRef idx="3">
-            <a:schemeClr val="accent1"/>
-          </a:fillRef>
-          <a:effectRef idx="2">
-            <a:schemeClr val="accent1"/>
-          </a:effectRef>
-          <a:fontRef idx="minor">
-            <a:schemeClr val="lt1"/>
-          </a:fontRef>
-        </p:style>
-        <p:txBody>
-          <a:bodyPr rtlCol="0" anchor="ctr" wrap="square" lIns="109728" rIns="109728" tIns="73152" bIns="73152"/>
-          <a:lstStyle/>
-          <a:p>
-            <a:pPr algn="ctr"/>
-            <a:r>
-              <a:rPr sz="1000" b="0">
-                <a:solidFill>
-                  <a:srgbClr val="212427"/>
-                </a:solidFill>
-              </a:rPr>
-              <a:t>unverzüglich</a:t>
-            </a:r>
-          </a:p>
-        </p:txBody>
-      </p:sp>
-      <p:sp>
-        <p:nvSpPr>
-          <p:cNvPr id="13" name="Rectangle 12"/>
-          <p:cNvSpPr/>
-          <p:nvPr/>
-        </p:nvSpPr>
-        <p:spPr>
-          <a:xfrm>
-            <a:off x="7178040" y="3602736"/>
-            <a:ext cx="1463040" cy="832103"/>
-          </a:xfrm>
-          <a:prstGeom prst="rect">
-            <a:avLst/>
-          </a:prstGeom>
-          <a:noFill/>
-          <a:ln w="9525">
-            <a:solidFill>
-              <a:srgbClr val="212427"/>
-            </a:solidFill>
-          </a:ln>
-          <a:effectLst/>
-        </p:spPr>
-        <p:style>
-          <a:lnRef idx="1">
-            <a:schemeClr val="accent1"/>
-          </a:lnRef>
-          <a:fillRef idx="3">
-            <a:schemeClr val="accent1"/>
-          </a:fillRef>
-          <a:effectRef idx="2">
-            <a:schemeClr val="accent1"/>
-          </a:effectRef>
-          <a:fontRef idx="minor">
-            <a:schemeClr val="lt1"/>
-          </a:fontRef>
-        </p:style>
-        <p:txBody>
-          <a:bodyPr rtlCol="0" anchor="ctr" wrap="square" lIns="109728" rIns="109728" tIns="73152" bIns="73152"/>
-          <a:lstStyle/>
-          <a:p>
-            <a:pPr algn="ctr"/>
-            <a:r>
-              <a:rPr sz="1000" b="0">
-                <a:solidFill>
-                  <a:srgbClr val="212427"/>
-                </a:solidFill>
-              </a:rPr>
-              <a:t>Zweck: unberechtigte Zugriffe vermeiden</a:t>
-            </a:r>
-          </a:p>
-        </p:txBody>
-      </p:sp>
-      <p:sp>
-        <p:nvSpPr>
-          <p:cNvPr id="14" name="Rectangle 13"/>
-          <p:cNvSpPr/>
-          <p:nvPr/>
-        </p:nvSpPr>
-        <p:spPr>
-          <a:xfrm>
-            <a:off x="8732520" y="3602736"/>
-            <a:ext cx="1463040" cy="832103"/>
-          </a:xfrm>
-          <a:prstGeom prst="rect">
-            <a:avLst/>
-          </a:prstGeom>
-          <a:noFill/>
-          <a:ln w="9525">
-            <a:solidFill>
-              <a:srgbClr val="212427"/>
-            </a:solidFill>
-          </a:ln>
-          <a:effectLst/>
-        </p:spPr>
-        <p:style>
-          <a:lnRef idx="1">
-            <a:schemeClr val="accent1"/>
-          </a:lnRef>
-          <a:fillRef idx="3">
-            <a:schemeClr val="accent1"/>
-          </a:fillRef>
-          <a:effectRef idx="2">
-            <a:schemeClr val="accent1"/>
-          </a:effectRef>
-          <a:fontRef idx="minor">
-            <a:schemeClr val="lt1"/>
-          </a:fontRef>
-        </p:style>
-        <p:txBody>
-          <a:bodyPr rtlCol="0" anchor="ctr" wrap="square" lIns="109728" rIns="109728" tIns="73152" bIns="73152"/>
-          <a:lstStyle/>
-          <a:p>
-            <a:pPr algn="ctr"/>
-            <a:r>
-              <a:rPr sz="1000" b="0">
-                <a:solidFill>
-                  <a:srgbClr val="212427"/>
-                </a:solidFill>
-              </a:rPr>
-              <a:t>Berechtigungen nur nach Bedarf</a:t>
-            </a:r>
-          </a:p>
-        </p:txBody>
-      </p:sp>
-      <p:sp>
-        <p:nvSpPr>
-          <p:cNvPr id="15" name="Rectangle 14"/>
-          <p:cNvSpPr/>
-          <p:nvPr/>
-        </p:nvSpPr>
-        <p:spPr>
-          <a:xfrm>
-            <a:off x="10332720" y="3493008"/>
-            <a:ext cx="1188720" cy="1051560"/>
-          </a:xfrm>
-          <a:prstGeom prst="rect">
-            <a:avLst/>
-          </a:prstGeom>
-          <a:noFill/>
-          <a:ln>
-            <a:noFill/>
-          </a:ln>
-          <a:effectLst/>
-        </p:spPr>
-        <p:style>
-          <a:lnRef idx="1">
-            <a:schemeClr val="accent1"/>
-          </a:lnRef>
-          <a:fillRef idx="3">
-            <a:schemeClr val="accent1"/>
-          </a:fillRef>
-          <a:effectRef idx="2">
-            <a:schemeClr val="accent1"/>
-          </a:effectRef>
-          <a:fontRef idx="minor">
-            <a:schemeClr val="lt1"/>
-          </a:fontRef>
-        </p:style>
-        <p:txBody>
-          <a:bodyPr rtlCol="0" anchor="ctr" wrap="square" lIns="109728" rIns="109728" tIns="73152" bIns="73152"/>
-          <a:lstStyle/>
-          <a:p>
-            <a:pPr algn="r"/>
-            <a:r>
-              <a:rPr sz="2400" b="1">
-                <a:solidFill>
-                  <a:srgbClr val="212427"/>
-                </a:solidFill>
-              </a:rPr>
-              <a:t>4 bis 5</a:t>
-            </a:r>
-          </a:p>
-        </p:txBody>
-      </p:sp>
-      <p:sp>
-        <p:nvSpPr>
-          <p:cNvPr id="16" name="Rectangle 15"/>
-          <p:cNvSpPr/>
-          <p:nvPr/>
-        </p:nvSpPr>
-        <p:spPr>
-          <a:xfrm>
-            <a:off x="704088" y="4654296"/>
-            <a:ext cx="1828800" cy="1051560"/>
-          </a:xfrm>
-          <a:prstGeom prst="rect">
-            <a:avLst/>
-          </a:prstGeom>
-          <a:noFill/>
-          <a:ln>
-            <a:noFill/>
-          </a:ln>
-          <a:effectLst/>
-        </p:spPr>
-        <p:style>
-          <a:lnRef idx="1">
-            <a:schemeClr val="accent1"/>
-          </a:lnRef>
-          <a:fillRef idx="3">
-            <a:schemeClr val="accent1"/>
-          </a:fillRef>
-          <a:effectRef idx="2">
-            <a:schemeClr val="accent1"/>
-          </a:effectRef>
-          <a:fontRef idx="minor">
-            <a:schemeClr val="lt1"/>
-          </a:fontRef>
-        </p:style>
-        <p:txBody>
-          <a:bodyPr rtlCol="0" anchor="ctr" wrap="square" lIns="109728" rIns="109728" tIns="73152" bIns="73152"/>
-          <a:lstStyle/>
-          <a:p>
-            <a:pPr algn="l"/>
-            <a:r>
-              <a:rPr sz="1200" b="1">
-                <a:solidFill>
-                  <a:srgbClr val="5A6065"/>
-                </a:solidFill>
-              </a:rPr>
-              <a:t>Arbeitsdefinition</a:t>
-            </a:r>
-          </a:p>
-        </p:txBody>
-      </p:sp>
-      <p:sp>
-        <p:nvSpPr>
-          <p:cNvPr id="17" name="Rectangle 16"/>
-          <p:cNvSpPr/>
-          <p:nvPr/>
-        </p:nvSpPr>
-        <p:spPr>
-          <a:xfrm>
-            <a:off x="2514600" y="4764024"/>
-            <a:ext cx="1851660" cy="832103"/>
-          </a:xfrm>
-          <a:prstGeom prst="rect">
-            <a:avLst/>
-          </a:prstGeom>
-          <a:noFill/>
-          <a:ln w="9525">
-            <a:solidFill>
-              <a:srgbClr val="212427"/>
-            </a:solidFill>
-          </a:ln>
-          <a:effectLst/>
-        </p:spPr>
-        <p:style>
-          <a:lnRef idx="1">
-            <a:schemeClr val="accent1"/>
-          </a:lnRef>
-          <a:fillRef idx="3">
-            <a:schemeClr val="accent1"/>
-          </a:fillRef>
-          <a:effectRef idx="2">
-            <a:schemeClr val="accent1"/>
-          </a:effectRef>
-          <a:fontRef idx="minor">
-            <a:schemeClr val="lt1"/>
-          </a:fontRef>
-        </p:style>
-        <p:txBody>
-          <a:bodyPr rtlCol="0" anchor="ctr" wrap="square" lIns="109728" rIns="109728" tIns="73152" bIns="73152"/>
-          <a:lstStyle/>
-          <a:p>
-            <a:pPr algn="ctr"/>
-            <a:r>
-              <a:rPr sz="1100" b="0">
-                <a:solidFill>
-                  <a:srgbClr val="212427"/>
-                </a:solidFill>
-              </a:rPr>
-              <a:t>Kennungen und Berechtigungen entfernen</a:t>
-            </a:r>
-          </a:p>
-        </p:txBody>
-      </p:sp>
-      <p:sp>
-        <p:nvSpPr>
-          <p:cNvPr id="18" name="Rectangle 17"/>
-          <p:cNvSpPr/>
-          <p:nvPr/>
-        </p:nvSpPr>
-        <p:spPr>
-          <a:xfrm>
-            <a:off x="4457700" y="4764024"/>
-            <a:ext cx="1851660" cy="832103"/>
-          </a:xfrm>
-          <a:prstGeom prst="rect">
-            <a:avLst/>
-          </a:prstGeom>
-          <a:noFill/>
-          <a:ln w="9525">
-            <a:solidFill>
-              <a:srgbClr val="212427"/>
-            </a:solidFill>
-          </a:ln>
-          <a:effectLst/>
-        </p:spPr>
-        <p:style>
-          <a:lnRef idx="1">
-            <a:schemeClr val="accent1"/>
-          </a:lnRef>
-          <a:fillRef idx="3">
-            <a:schemeClr val="accent1"/>
-          </a:fillRef>
-          <a:effectRef idx="2">
-            <a:schemeClr val="accent1"/>
-          </a:effectRef>
-          <a:fontRef idx="minor">
-            <a:schemeClr val="lt1"/>
-          </a:fontRef>
-        </p:style>
-        <p:txBody>
-          <a:bodyPr rtlCol="0" anchor="ctr" wrap="square" lIns="109728" rIns="109728" tIns="73152" bIns="73152"/>
-          <a:lstStyle/>
-          <a:p>
-            <a:pPr algn="ctr"/>
-            <a:r>
-              <a:rPr sz="1100" b="0">
-                <a:solidFill>
-                  <a:srgbClr val="212427"/>
-                </a:solidFill>
-              </a:rPr>
-              <a:t>unverzüglich</a:t>
-            </a:r>
-          </a:p>
-        </p:txBody>
-      </p:sp>
-      <p:sp>
-        <p:nvSpPr>
-          <p:cNvPr id="19" name="Rectangle 18"/>
-          <p:cNvSpPr/>
-          <p:nvPr/>
-        </p:nvSpPr>
-        <p:spPr>
-          <a:xfrm>
-            <a:off x="6400800" y="4764024"/>
-            <a:ext cx="1851660" cy="832103"/>
-          </a:xfrm>
-          <a:prstGeom prst="rect">
-            <a:avLst/>
-          </a:prstGeom>
-          <a:noFill/>
-          <a:ln w="9525">
-            <a:solidFill>
-              <a:srgbClr val="212427"/>
-            </a:solidFill>
-          </a:ln>
-          <a:effectLst/>
-        </p:spPr>
-        <p:style>
-          <a:lnRef idx="1">
-            <a:schemeClr val="accent1"/>
-          </a:lnRef>
-          <a:fillRef idx="3">
-            <a:schemeClr val="accent1"/>
-          </a:fillRef>
-          <a:effectRef idx="2">
-            <a:schemeClr val="accent1"/>
-          </a:effectRef>
-          <a:fontRef idx="minor">
-            <a:schemeClr val="lt1"/>
-          </a:fontRef>
-        </p:style>
-        <p:txBody>
-          <a:bodyPr rtlCol="0" anchor="ctr" wrap="square" lIns="109728" rIns="109728" tIns="73152" bIns="73152"/>
-          <a:lstStyle/>
-          <a:p>
-            <a:pPr algn="ctr"/>
-            <a:r>
-              <a:rPr sz="1100" b="0">
-                <a:solidFill>
-                  <a:srgbClr val="212427"/>
-                </a:solidFill>
-              </a:rPr>
-              <a:t>Zweck: unberechtigte Zugriffe vermeiden</a:t>
-            </a:r>
-          </a:p>
-        </p:txBody>
-      </p:sp>
-      <p:sp>
-        <p:nvSpPr>
-          <p:cNvPr id="20" name="Rectangle 19"/>
-          <p:cNvSpPr/>
-          <p:nvPr/>
-        </p:nvSpPr>
-        <p:spPr>
-          <a:xfrm>
-            <a:off x="8343900" y="4764024"/>
-            <a:ext cx="1851660" cy="832103"/>
-          </a:xfrm>
-          <a:prstGeom prst="rect">
-            <a:avLst/>
-          </a:prstGeom>
-          <a:noFill/>
-          <a:ln w="9525">
-            <a:solidFill>
-              <a:srgbClr val="212427"/>
-            </a:solidFill>
-          </a:ln>
-          <a:effectLst/>
-        </p:spPr>
-        <p:style>
-          <a:lnRef idx="1">
-            <a:schemeClr val="accent1"/>
-          </a:lnRef>
-          <a:fillRef idx="3">
-            <a:schemeClr val="accent1"/>
-          </a:fillRef>
-          <a:effectRef idx="2">
-            <a:schemeClr val="accent1"/>
-          </a:effectRef>
-          <a:fontRef idx="minor">
-            <a:schemeClr val="lt1"/>
-          </a:fontRef>
-        </p:style>
-        <p:txBody>
-          <a:bodyPr rtlCol="0" anchor="ctr" wrap="square" lIns="109728" rIns="109728" tIns="73152" bIns="73152"/>
-          <a:lstStyle/>
-          <a:p>
-            <a:pPr algn="ctr"/>
-            <a:r>
-              <a:rPr sz="1100" b="0">
-                <a:solidFill>
-                  <a:srgbClr val="212427"/>
-                </a:solidFill>
-              </a:rPr>
-              <a:t>Berechtigungen nur nach Bedarf</a:t>
-            </a:r>
-          </a:p>
-        </p:txBody>
-      </p:sp>
-      <p:sp>
-        <p:nvSpPr>
-          <p:cNvPr id="21" name="Rectangle 20"/>
-          <p:cNvSpPr/>
-          <p:nvPr/>
-        </p:nvSpPr>
-        <p:spPr>
-          <a:xfrm>
-            <a:off x="10332720" y="4654296"/>
-            <a:ext cx="1188720" cy="1051560"/>
-          </a:xfrm>
-          <a:prstGeom prst="rect">
-            <a:avLst/>
-          </a:prstGeom>
-          <a:noFill/>
-          <a:ln>
-            <a:noFill/>
-          </a:ln>
-          <a:effectLst/>
-        </p:spPr>
-        <p:style>
-          <a:lnRef idx="1">
-            <a:schemeClr val="accent1"/>
-          </a:lnRef>
-          <a:fillRef idx="3">
-            <a:schemeClr val="accent1"/>
-          </a:fillRef>
-          <a:effectRef idx="2">
-            <a:schemeClr val="accent1"/>
-          </a:effectRef>
-          <a:fontRef idx="minor">
-            <a:schemeClr val="lt1"/>
-          </a:fontRef>
-        </p:style>
-        <p:txBody>
-          <a:bodyPr rtlCol="0" anchor="ctr" wrap="square" lIns="109728" rIns="109728" tIns="73152" bIns="73152"/>
-          <a:lstStyle/>
-          <a:p>
-            <a:pPr algn="r"/>
-            <a:r>
-              <a:rPr sz="2400" b="1">
-                <a:solidFill>
-                  <a:srgbClr val="212427"/>
-                </a:solidFill>
-              </a:rPr>
-              <a:t>4</a:t>
-            </a:r>
           </a:p>
         </p:txBody>
       </p:sp>
@@ -52893,12 +53221,20 @@
             <p:ph type="title"/>
           </p:nvPr>
         </p:nvSpPr>
-        <p:spPr/>
+        <p:spPr>
+          <a:effectLst/>
+        </p:spPr>
         <p:txBody>
           <a:bodyPr/>
           <a:lstStyle/>
           <a:p>
             <a:r>
+              <a:rPr b="0" sz="2800" cap="none">
+                <a:solidFill>
+                  <a:srgbClr val="212427"/>
+                </a:solidFill>
+                <a:latin typeface="Verdana"/>
+              </a:rPr>
               <a:t>Errate die Zahl, Runde 2</a:t>
             </a:r>
           </a:p>
@@ -52912,14 +53248,14 @@
         </p:nvSpPr>
         <p:spPr>
           <a:xfrm>
-            <a:off x="704088" y="1188720"/>
-            <a:ext cx="10789920" cy="868680"/>
+            <a:off x="704088" y="1115568"/>
+            <a:ext cx="609600" cy="38100"/>
           </a:xfrm>
           <a:prstGeom prst="rect">
             <a:avLst/>
           </a:prstGeom>
           <a:solidFill>
-            <a:srgbClr val="FDE9BF"/>
+            <a:srgbClr val="B1063A"/>
           </a:solidFill>
           <a:ln>
             <a:noFill/>
@@ -52941,36 +53277,158 @@
           </a:fontRef>
         </p:style>
         <p:txBody>
-          <a:bodyPr rtlCol="0" anchor="ctr" wrap="square" lIns="109728" rIns="109728" tIns="73152" bIns="73152"/>
+          <a:bodyPr rtlCol="0" anchor="ctr"/>
           <a:lstStyle/>
           <a:p>
-            <a:pPr algn="l"/>
+            <a:pPr algn="ctr"/>
+          </a:p>
+        </p:txBody>
+      </p:sp>
+      <p:sp>
+        <p:nvSpPr>
+          <p:cNvPr id="5" name="TextBox 4"/>
+          <p:cNvSpPr txBox="1"/>
+          <p:nvPr/>
+        </p:nvSpPr>
+        <p:spPr>
+          <a:xfrm>
+            <a:off x="704088" y="1234440"/>
+            <a:ext cx="10789920" cy="457200"/>
+          </a:xfrm>
+          <a:prstGeom prst="rect">
+            <a:avLst/>
+          </a:prstGeom>
+          <a:noFill/>
+          <a:effectLst/>
+        </p:spPr>
+        <p:txBody>
+          <a:bodyPr wrap="square" anchor="t" lIns="36576" rIns="36576" tIns="27432" bIns="27432">
+            <a:spAutoFit/>
+          </a:bodyPr>
+          <a:lstStyle/>
+          <a:p>
+            <a:pPr algn="l">
+              <a:spcAft>
+                <a:spcPts val="0"/>
+              </a:spcAft>
+            </a:pPr>
             <a:r>
-              <a:rPr sz="1500" b="0">
+              <a:rPr sz="1400" b="0">
                 <a:solidFill>
                   <a:srgbClr val="212427"/>
                 </a:solidFill>
+                <a:latin typeface="Verdana"/>
               </a:rPr>
-              <a:t>Eine Aussage ist der kleinste Teil der Referenzantwort, der sich für sich allein gegen das Kompendium prüfen lässt.</a:t>
+              <a:t>Eine Aussage ist der kleinste Teil der Referenzantwort, der sich an einer Stelle im Kompendium prüfen lässt.</a:t>
             </a:r>
           </a:p>
         </p:txBody>
       </p:sp>
       <p:sp>
         <p:nvSpPr>
-          <p:cNvPr id="5" name="Rectangle 4"/>
+          <p:cNvPr id="6" name="TextBox 5"/>
+          <p:cNvSpPr txBox="1"/>
+          <p:nvPr/>
+        </p:nvSpPr>
+        <p:spPr>
+          <a:xfrm>
+            <a:off x="704088" y="1691640"/>
+            <a:ext cx="10789920" cy="1143000"/>
+          </a:xfrm>
+          <a:prstGeom prst="rect">
+            <a:avLst/>
+          </a:prstGeom>
+          <a:noFill/>
+          <a:effectLst/>
+        </p:spPr>
+        <p:txBody>
+          <a:bodyPr wrap="square" anchor="t" lIns="36576" rIns="36576" tIns="27432" bIns="27432">
+            <a:spAutoFit/>
+          </a:bodyPr>
+          <a:lstStyle/>
+          <a:p>
+            <a:pPr algn="l">
+              <a:spcAft>
+                <a:spcPts val="200"/>
+              </a:spcAft>
+            </a:pPr>
+            <a:r>
+              <a:rPr sz="1100" b="0">
+                <a:solidFill>
+                  <a:srgbClr val="5A6065"/>
+                </a:solidFill>
+                <a:latin typeface="Verdana"/>
+              </a:rPr>
+              <a:t>1. Jede Handlung (dokumentieren, ersetzen) ist eine eigene Aussage.</a:t>
+            </a:r>
+          </a:p>
+          <a:p>
+            <a:pPr algn="l">
+              <a:spcAft>
+                <a:spcPts val="200"/>
+              </a:spcAft>
+            </a:pPr>
+            <a:r>
+              <a:rPr sz="1100" b="0">
+                <a:solidFill>
+                  <a:srgbClr val="5A6065"/>
+                </a:solidFill>
+                <a:latin typeface="Verdana"/>
+              </a:rPr>
+              <a:t>2. Jede Begründung (weil, da) und jeder Zweck (damit, um zu) ist eine eigene Aussage.</a:t>
+            </a:r>
+          </a:p>
+          <a:p>
+            <a:pPr algn="l">
+              <a:spcAft>
+                <a:spcPts val="200"/>
+              </a:spcAft>
+            </a:pPr>
+            <a:r>
+              <a:rPr sz="1100" b="0">
+                <a:solidFill>
+                  <a:srgbClr val="5A6065"/>
+                </a:solidFill>
+                <a:latin typeface="Verdana"/>
+              </a:rPr>
+              <a:t>3. Eine Aufzählung, die das Kompendium als eine Liste nennt, bleibt eine Aussage.</a:t>
+            </a:r>
+          </a:p>
+          <a:p>
+            <a:pPr algn="l">
+              <a:spcAft>
+                <a:spcPts val="200"/>
+              </a:spcAft>
+            </a:pPr>
+            <a:r>
+              <a:rPr sz="1100" b="0">
+                <a:solidFill>
+                  <a:srgbClr val="5A6065"/>
+                </a:solidFill>
+                <a:latin typeface="Verdana"/>
+              </a:rPr>
+              <a:t>4. Wiederholungen und Füllwörter zählen nicht.</a:t>
+            </a:r>
+          </a:p>
+        </p:txBody>
+      </p:sp>
+      <p:sp>
+        <p:nvSpPr>
+          <p:cNvPr id="7" name="Rectangle 6"/>
           <p:cNvSpPr/>
           <p:nvPr/>
         </p:nvSpPr>
         <p:spPr>
           <a:xfrm>
-            <a:off x="704088" y="2240280"/>
-            <a:ext cx="1097280" cy="1005840"/>
+            <a:off x="704088" y="2926080"/>
+            <a:ext cx="10789920" cy="9525"/>
           </a:xfrm>
           <a:prstGeom prst="rect">
             <a:avLst/>
           </a:prstGeom>
-          <a:noFill/>
+          <a:solidFill>
+            <a:srgbClr val="D6D7D8"/>
+          </a:solidFill>
           <a:ln>
             <a:noFill/>
           </a:ln>
@@ -52991,40 +53449,112 @@
           </a:fontRef>
         </p:style>
         <p:txBody>
-          <a:bodyPr rtlCol="0" anchor="t" wrap="square" lIns="109728" rIns="109728" tIns="73152" bIns="73152"/>
+          <a:bodyPr rtlCol="0" anchor="ctr"/>
           <a:lstStyle/>
           <a:p>
-            <a:pPr algn="l"/>
+            <a:pPr algn="ctr"/>
+          </a:p>
+        </p:txBody>
+      </p:sp>
+      <p:sp>
+        <p:nvSpPr>
+          <p:cNvPr id="8" name="TextBox 7"/>
+          <p:cNvSpPr txBox="1"/>
+          <p:nvPr/>
+        </p:nvSpPr>
+        <p:spPr>
+          <a:xfrm>
+            <a:off x="704088" y="3063240"/>
+            <a:ext cx="548640" cy="899160"/>
+          </a:xfrm>
+          <a:prstGeom prst="rect">
+            <a:avLst/>
+          </a:prstGeom>
+          <a:noFill/>
+          <a:effectLst/>
+        </p:spPr>
+        <p:txBody>
+          <a:bodyPr wrap="square" anchor="ctr" lIns="36576" rIns="36576" tIns="27432" bIns="27432">
+            <a:spAutoFit/>
+          </a:bodyPr>
+          <a:lstStyle/>
+          <a:p>
+            <a:pPr algn="l">
+              <a:spcAft>
+                <a:spcPts val="0"/>
+              </a:spcAft>
+            </a:pPr>
             <a:r>
-              <a:rPr sz="1400" b="1">
+              <a:rPr sz="2000" b="0">
                 <a:solidFill>
                   <a:srgbClr val="5A6065"/>
                 </a:solidFill>
+                <a:latin typeface="Verdana"/>
               </a:rPr>
-              <a:t>Text 1</a:t>
+              <a:t>A</a:t>
             </a:r>
           </a:p>
         </p:txBody>
       </p:sp>
       <p:sp>
         <p:nvSpPr>
-          <p:cNvPr id="6" name="Rectangle 5"/>
+          <p:cNvPr id="9" name="TextBox 8"/>
+          <p:cNvSpPr txBox="1"/>
+          <p:nvPr/>
+        </p:nvSpPr>
+        <p:spPr>
+          <a:xfrm>
+            <a:off x="1344168" y="3063240"/>
+            <a:ext cx="10149840" cy="899160"/>
+          </a:xfrm>
+          <a:prstGeom prst="rect">
+            <a:avLst/>
+          </a:prstGeom>
+          <a:noFill/>
+          <a:effectLst/>
+        </p:spPr>
+        <p:txBody>
+          <a:bodyPr wrap="square" anchor="ctr" lIns="36576" rIns="36576" tIns="27432" bIns="27432">
+            <a:spAutoFit/>
+          </a:bodyPr>
+          <a:lstStyle/>
+          <a:p>
+            <a:pPr algn="l">
+              <a:spcAft>
+                <a:spcPts val="0"/>
+              </a:spcAft>
+            </a:pPr>
+            <a:r>
+              <a:rPr sz="1400" b="0">
+                <a:solidFill>
+                  <a:srgbClr val="212427"/>
+                </a:solidFill>
+                <a:latin typeface="Verdana"/>
+              </a:rPr>
+              <a:t>Die Anforderungen müssen dokumentiert werden, damit sie identifiziert und bei Planung, Betrieb und Beschaffung berücksichtigt werden können.</a:t>
+            </a:r>
+          </a:p>
+        </p:txBody>
+      </p:sp>
+      <p:sp>
+        <p:nvSpPr>
+          <p:cNvPr id="10" name="Rectangle 9"/>
           <p:cNvSpPr/>
           <p:nvPr/>
         </p:nvSpPr>
         <p:spPr>
           <a:xfrm>
-            <a:off x="1828800" y="2240280"/>
-            <a:ext cx="9692640" cy="1005840"/>
+            <a:off x="704088" y="3962399"/>
+            <a:ext cx="10789920" cy="9525"/>
           </a:xfrm>
           <a:prstGeom prst="rect">
             <a:avLst/>
           </a:prstGeom>
-          <a:noFill/>
-          <a:ln w="9525">
-            <a:solidFill>
-              <a:srgbClr val="D6D7D8"/>
-            </a:solidFill>
+          <a:solidFill>
+            <a:srgbClr val="D6D7D8"/>
+          </a:solidFill>
+          <a:ln>
+            <a:noFill/>
           </a:ln>
           <a:effectLst/>
         </p:spPr>
@@ -53043,36 +53573,110 @@
           </a:fontRef>
         </p:style>
         <p:txBody>
-          <a:bodyPr rtlCol="0" anchor="ctr" wrap="square" lIns="109728" rIns="109728" tIns="73152" bIns="73152"/>
+          <a:bodyPr rtlCol="0" anchor="ctr"/>
           <a:lstStyle/>
           <a:p>
-            <a:pPr algn="l"/>
+            <a:pPr algn="ctr"/>
+          </a:p>
+        </p:txBody>
+      </p:sp>
+      <p:sp>
+        <p:nvSpPr>
+          <p:cNvPr id="11" name="TextBox 10"/>
+          <p:cNvSpPr txBox="1"/>
+          <p:nvPr/>
+        </p:nvSpPr>
+        <p:spPr>
+          <a:xfrm>
+            <a:off x="704088" y="3962399"/>
+            <a:ext cx="548640" cy="899160"/>
+          </a:xfrm>
+          <a:prstGeom prst="rect">
+            <a:avLst/>
+          </a:prstGeom>
+          <a:noFill/>
+          <a:effectLst/>
+        </p:spPr>
+        <p:txBody>
+          <a:bodyPr wrap="square" anchor="ctr" lIns="36576" rIns="36576" tIns="27432" bIns="27432">
+            <a:spAutoFit/>
+          </a:bodyPr>
+          <a:lstStyle/>
+          <a:p>
+            <a:pPr algn="l">
+              <a:spcAft>
+                <a:spcPts val="0"/>
+              </a:spcAft>
+            </a:pPr>
             <a:r>
-              <a:rPr sz="1400" b="0">
+              <a:rPr sz="2000" b="0">
                 <a:solidFill>
-                  <a:srgbClr val="212427"/>
+                  <a:srgbClr val="5A6065"/>
                 </a:solidFill>
+                <a:latin typeface="Verdana"/>
               </a:rPr>
-              <a:t>Administrationskonten sollten durch Mehr-Faktor-Authentisierung geschützt werden, da sie ein besonders hohes Schadenspotenzial besitzen und bevorzugtes Angriffsziel darstellen.</a:t>
+              <a:t>B</a:t>
             </a:r>
           </a:p>
         </p:txBody>
       </p:sp>
       <p:sp>
         <p:nvSpPr>
-          <p:cNvPr id="7" name="Rectangle 6"/>
+          <p:cNvPr id="12" name="TextBox 11"/>
+          <p:cNvSpPr txBox="1"/>
+          <p:nvPr/>
+        </p:nvSpPr>
+        <p:spPr>
+          <a:xfrm>
+            <a:off x="1344168" y="3962399"/>
+            <a:ext cx="10149840" cy="899160"/>
+          </a:xfrm>
+          <a:prstGeom prst="rect">
+            <a:avLst/>
+          </a:prstGeom>
+          <a:noFill/>
+          <a:effectLst/>
+        </p:spPr>
+        <p:txBody>
+          <a:bodyPr wrap="square" anchor="ctr" lIns="36576" rIns="36576" tIns="27432" bIns="27432">
+            <a:spAutoFit/>
+          </a:bodyPr>
+          <a:lstStyle/>
+          <a:p>
+            <a:pPr algn="l">
+              <a:spcAft>
+                <a:spcPts val="0"/>
+              </a:spcAft>
+            </a:pPr>
+            <a:r>
+              <a:rPr sz="1400" b="0">
+                <a:solidFill>
+                  <a:srgbClr val="212427"/>
+                </a:solidFill>
+                <a:latin typeface="Verdana"/>
+              </a:rPr>
+              <a:t>Ohne verbindliche Passwortregeln besteht die Gefahr schwacher oder mehrfach genutzter Passwörter, die leicht kompromittiert werden können.</a:t>
+            </a:r>
+          </a:p>
+        </p:txBody>
+      </p:sp>
+      <p:sp>
+        <p:nvSpPr>
+          <p:cNvPr id="13" name="Rectangle 12"/>
           <p:cNvSpPr/>
           <p:nvPr/>
         </p:nvSpPr>
         <p:spPr>
           <a:xfrm>
-            <a:off x="704088" y="3383280"/>
-            <a:ext cx="1097280" cy="1005840"/>
+            <a:off x="704088" y="4861560"/>
+            <a:ext cx="10789920" cy="9525"/>
           </a:xfrm>
           <a:prstGeom prst="rect">
             <a:avLst/>
           </a:prstGeom>
-          <a:noFill/>
+          <a:solidFill>
+            <a:srgbClr val="D6D7D8"/>
+          </a:solidFill>
           <a:ln>
             <a:noFill/>
           </a:ln>
@@ -53093,219 +53697,127 @@
           </a:fontRef>
         </p:style>
         <p:txBody>
-          <a:bodyPr rtlCol="0" anchor="t" wrap="square" lIns="109728" rIns="109728" tIns="73152" bIns="73152"/>
+          <a:bodyPr rtlCol="0" anchor="ctr"/>
           <a:lstStyle/>
           <a:p>
-            <a:pPr algn="l"/>
+            <a:pPr algn="ctr"/>
+          </a:p>
+        </p:txBody>
+      </p:sp>
+      <p:sp>
+        <p:nvSpPr>
+          <p:cNvPr id="14" name="TextBox 13"/>
+          <p:cNvSpPr txBox="1"/>
+          <p:nvPr/>
+        </p:nvSpPr>
+        <p:spPr>
+          <a:xfrm>
+            <a:off x="704088" y="4861560"/>
+            <a:ext cx="548640" cy="899160"/>
+          </a:xfrm>
+          <a:prstGeom prst="rect">
+            <a:avLst/>
+          </a:prstGeom>
+          <a:noFill/>
+          <a:effectLst/>
+        </p:spPr>
+        <p:txBody>
+          <a:bodyPr wrap="square" anchor="ctr" lIns="36576" rIns="36576" tIns="27432" bIns="27432">
+            <a:spAutoFit/>
+          </a:bodyPr>
+          <a:lstStyle/>
+          <a:p>
+            <a:pPr algn="l">
+              <a:spcAft>
+                <a:spcPts val="0"/>
+              </a:spcAft>
+            </a:pPr>
             <a:r>
-              <a:rPr sz="1400" b="1">
+              <a:rPr sz="2000" b="0">
                 <a:solidFill>
                   <a:srgbClr val="5A6065"/>
                 </a:solidFill>
+                <a:latin typeface="Verdana"/>
               </a:rPr>
-              <a:t>Text 2</a:t>
+              <a:t>C</a:t>
             </a:r>
           </a:p>
         </p:txBody>
       </p:sp>
       <p:sp>
         <p:nvSpPr>
-          <p:cNvPr id="8" name="Rectangle 7"/>
-          <p:cNvSpPr/>
+          <p:cNvPr id="15" name="TextBox 14"/>
+          <p:cNvSpPr txBox="1"/>
           <p:nvPr/>
         </p:nvSpPr>
         <p:spPr>
           <a:xfrm>
-            <a:off x="1828800" y="3383280"/>
-            <a:ext cx="9692640" cy="1005840"/>
+            <a:off x="1344168" y="4861560"/>
+            <a:ext cx="10149840" cy="899160"/>
           </a:xfrm>
           <a:prstGeom prst="rect">
             <a:avLst/>
           </a:prstGeom>
           <a:noFill/>
-          <a:ln w="9525">
-            <a:solidFill>
-              <a:srgbClr val="D6D7D8"/>
-            </a:solidFill>
-          </a:ln>
           <a:effectLst/>
         </p:spPr>
-        <p:style>
-          <a:lnRef idx="1">
-            <a:schemeClr val="accent1"/>
-          </a:lnRef>
-          <a:fillRef idx="3">
-            <a:schemeClr val="accent1"/>
-          </a:fillRef>
-          <a:effectRef idx="2">
-            <a:schemeClr val="accent1"/>
-          </a:effectRef>
-          <a:fontRef idx="minor">
-            <a:schemeClr val="lt1"/>
-          </a:fontRef>
-        </p:style>
         <p:txBody>
-          <a:bodyPr rtlCol="0" anchor="ctr" wrap="square" lIns="109728" rIns="109728" tIns="73152" bIns="73152"/>
+          <a:bodyPr wrap="square" anchor="ctr" lIns="36576" rIns="36576" tIns="27432" bIns="27432">
+            <a:spAutoFit/>
+          </a:bodyPr>
           <a:lstStyle/>
           <a:p>
-            <a:pPr algn="l"/>
+            <a:pPr algn="l">
+              <a:spcAft>
+                <a:spcPts val="0"/>
+              </a:spcAft>
+            </a:pPr>
             <a:r>
               <a:rPr sz="1400" b="0">
                 <a:solidFill>
                   <a:srgbClr val="212427"/>
                 </a:solidFill>
+                <a:latin typeface="Verdana"/>
               </a:rPr>
-              <a:t>Erstellen Sie eine Cloud-Nutzungsstrategie (A1), eine Sicherheitsrichtlinie (A2), Service-Definitionen (A3) und legen Sie Verantwortungsbereiche sowie Schnittstellen fest (A4). Diese vier Basis-Anforderungen müssen vorrangig erfüllt werden.</a:t>
+              <a:t>Ausgabe und Entzug von Zutritts-, Zugangs- und Zugriffsmitteln sind zu dokumentieren und bei Kompromittierung sofort zu ersetzen.</a:t>
             </a:r>
           </a:p>
         </p:txBody>
       </p:sp>
       <p:sp>
         <p:nvSpPr>
-          <p:cNvPr id="9" name="Rectangle 8"/>
-          <p:cNvSpPr/>
+          <p:cNvPr id="16" name="TextBox 15"/>
+          <p:cNvSpPr txBox="1"/>
           <p:nvPr/>
         </p:nvSpPr>
         <p:spPr>
           <a:xfrm>
-            <a:off x="704088" y="4526280"/>
-            <a:ext cx="1097280" cy="1005840"/>
+            <a:off x="7836408" y="5897880"/>
+            <a:ext cx="3657600" cy="365760"/>
           </a:xfrm>
           <a:prstGeom prst="rect">
             <a:avLst/>
           </a:prstGeom>
           <a:noFill/>
-          <a:ln>
-            <a:noFill/>
-          </a:ln>
           <a:effectLst/>
         </p:spPr>
-        <p:style>
-          <a:lnRef idx="1">
-            <a:schemeClr val="accent1"/>
-          </a:lnRef>
-          <a:fillRef idx="3">
-            <a:schemeClr val="accent1"/>
-          </a:fillRef>
-          <a:effectRef idx="2">
-            <a:schemeClr val="accent1"/>
-          </a:effectRef>
-          <a:fontRef idx="minor">
-            <a:schemeClr val="lt1"/>
-          </a:fontRef>
-        </p:style>
         <p:txBody>
-          <a:bodyPr rtlCol="0" anchor="t" wrap="square" lIns="109728" rIns="109728" tIns="73152" bIns="73152"/>
+          <a:bodyPr wrap="square" anchor="t" lIns="36576" rIns="36576" tIns="27432" bIns="27432">
+            <a:spAutoFit/>
+          </a:bodyPr>
           <a:lstStyle/>
           <a:p>
-            <a:pPr algn="l"/>
+            <a:pPr algn="r">
+              <a:spcAft>
+                <a:spcPts val="0"/>
+              </a:spcAft>
+            </a:pPr>
             <a:r>
-              <a:rPr sz="1400" b="1">
+              <a:rPr sz="1400" b="0">
                 <a:solidFill>
                   <a:srgbClr val="5A6065"/>
                 </a:solidFill>
-              </a:rPr>
-              <a:t>Text 3</a:t>
-            </a:r>
-          </a:p>
-        </p:txBody>
-      </p:sp>
-      <p:sp>
-        <p:nvSpPr>
-          <p:cNvPr id="10" name="Rectangle 9"/>
-          <p:cNvSpPr/>
-          <p:nvPr/>
-        </p:nvSpPr>
-        <p:spPr>
-          <a:xfrm>
-            <a:off x="1828800" y="4526280"/>
-            <a:ext cx="9692640" cy="1005840"/>
-          </a:xfrm>
-          <a:prstGeom prst="rect">
-            <a:avLst/>
-          </a:prstGeom>
-          <a:noFill/>
-          <a:ln w="9525">
-            <a:solidFill>
-              <a:srgbClr val="D6D7D8"/>
-            </a:solidFill>
-          </a:ln>
-          <a:effectLst/>
-        </p:spPr>
-        <p:style>
-          <a:lnRef idx="1">
-            <a:schemeClr val="accent1"/>
-          </a:lnRef>
-          <a:fillRef idx="3">
-            <a:schemeClr val="accent1"/>
-          </a:fillRef>
-          <a:effectRef idx="2">
-            <a:schemeClr val="accent1"/>
-          </a:effectRef>
-          <a:fontRef idx="minor">
-            <a:schemeClr val="lt1"/>
-          </a:fontRef>
-        </p:style>
-        <p:txBody>
-          <a:bodyPr rtlCol="0" anchor="ctr" wrap="square" lIns="109728" rIns="109728" tIns="73152" bIns="73152"/>
-          <a:lstStyle/>
-          <a:p>
-            <a:pPr algn="l"/>
-            <a:r>
-              <a:rPr sz="1400" b="0">
-                <a:solidFill>
-                  <a:srgbClr val="212427"/>
-                </a:solidFill>
-              </a:rPr>
-              <a:t>Bei personellen Veränderungen müssen nicht mehr benötigte Benutzendenkennungen und Berechtigungen unverzüglich entfernt werden, um unberechtigte Zugriffe ehemaliger oder versetzter Mitarbeitender zu vermeiden. Es dürfen Berechtigungen nur hinsichtlich des tatsächlichen Bedarfs zur Aufgabenerfüllung vergeben werden.</a:t>
-            </a:r>
-          </a:p>
-        </p:txBody>
-      </p:sp>
-      <p:sp>
-        <p:nvSpPr>
-          <p:cNvPr id="11" name="Rectangle 10"/>
-          <p:cNvSpPr/>
-          <p:nvPr/>
-        </p:nvSpPr>
-        <p:spPr>
-          <a:xfrm>
-            <a:off x="7863840" y="5806440"/>
-            <a:ext cx="3657600" cy="411480"/>
-          </a:xfrm>
-          <a:prstGeom prst="rect">
-            <a:avLst/>
-          </a:prstGeom>
-          <a:noFill/>
-          <a:ln>
-            <a:noFill/>
-          </a:ln>
-          <a:effectLst/>
-        </p:spPr>
-        <p:style>
-          <a:lnRef idx="1">
-            <a:schemeClr val="accent1"/>
-          </a:lnRef>
-          <a:fillRef idx="3">
-            <a:schemeClr val="accent1"/>
-          </a:fillRef>
-          <a:effectRef idx="2">
-            <a:schemeClr val="accent1"/>
-          </a:effectRef>
-          <a:fontRef idx="minor">
-            <a:schemeClr val="lt1"/>
-          </a:fontRef>
-        </p:style>
-        <p:txBody>
-          <a:bodyPr rtlCol="0" anchor="t" wrap="square" lIns="109728" rIns="109728" tIns="73152" bIns="73152"/>
-          <a:lstStyle/>
-          <a:p>
-            <a:pPr algn="r"/>
-            <a:r>
-              <a:rPr sz="1400" b="1">
-                <a:solidFill>
-                  <a:srgbClr val="B1063A"/>
-                </a:solidFill>
+                <a:latin typeface="Verdana"/>
               </a:rPr>
               <a:t>Mentimeter-Code: ____</a:t>
             </a:r>
@@ -53340,12 +53852,20 @@
             <p:ph type="title"/>
           </p:nvPr>
         </p:nvSpPr>
-        <p:spPr/>
+        <p:spPr>
+          <a:effectLst/>
+        </p:spPr>
         <p:txBody>
           <a:bodyPr/>
           <a:lstStyle/>
           <a:p>
             <a:r>
+              <a:rPr b="0" sz="2800" cap="none">
+                <a:solidFill>
+                  <a:srgbClr val="212427"/>
+                </a:solidFill>
+                <a:latin typeface="Verdana"/>
+              </a:rPr>
               <a:t>Was RAGAS dem Richter sagt</a:t>
             </a:r>
           </a:p>
@@ -53359,13 +53879,15 @@
         </p:nvSpPr>
         <p:spPr>
           <a:xfrm>
-            <a:off x="704088" y="1188720"/>
-            <a:ext cx="10789920" cy="365760"/>
+            <a:off x="704088" y="1115568"/>
+            <a:ext cx="609600" cy="38100"/>
           </a:xfrm>
           <a:prstGeom prst="rect">
             <a:avLst/>
           </a:prstGeom>
-          <a:noFill/>
+          <a:solidFill>
+            <a:srgbClr val="B1063A"/>
+          </a:solidFill>
           <a:ln>
             <a:noFill/>
           </a:ln>
@@ -53386,15 +53908,47 @@
           </a:fontRef>
         </p:style>
         <p:txBody>
-          <a:bodyPr rtlCol="0" anchor="t" wrap="square" lIns="109728" rIns="109728" tIns="73152" bIns="73152"/>
+          <a:bodyPr rtlCol="0" anchor="ctr"/>
           <a:lstStyle/>
           <a:p>
-            <a:pPr algn="l"/>
+            <a:pPr algn="ctr"/>
+          </a:p>
+        </p:txBody>
+      </p:sp>
+      <p:sp>
+        <p:nvSpPr>
+          <p:cNvPr id="5" name="TextBox 4"/>
+          <p:cNvSpPr txBox="1"/>
+          <p:nvPr/>
+        </p:nvSpPr>
+        <p:spPr>
+          <a:xfrm>
+            <a:off x="704088" y="1280160"/>
+            <a:ext cx="10789920" cy="365760"/>
+          </a:xfrm>
+          <a:prstGeom prst="rect">
+            <a:avLst/>
+          </a:prstGeom>
+          <a:noFill/>
+          <a:effectLst/>
+        </p:spPr>
+        <p:txBody>
+          <a:bodyPr wrap="square" anchor="t" lIns="36576" rIns="36576" tIns="27432" bIns="27432">
+            <a:spAutoFit/>
+          </a:bodyPr>
+          <a:lstStyle/>
+          <a:p>
+            <a:pPr algn="l">
+              <a:spcAft>
+                <a:spcPts val="0"/>
+              </a:spcAft>
+            </a:pPr>
             <a:r>
               <a:rPr sz="1400" b="0">
                 <a:solidFill>
                   <a:srgbClr val="5A6065"/>
                 </a:solidFill>
+                <a:latin typeface="Verdana"/>
               </a:rPr>
               <a:t>Die Anweisung an den Richter, wörtlich:</a:t>
             </a:r>
@@ -53403,23 +53957,63 @@
       </p:sp>
       <p:sp>
         <p:nvSpPr>
-          <p:cNvPr id="5" name="Rectangle 4"/>
+          <p:cNvPr id="6" name="TextBox 5"/>
+          <p:cNvSpPr txBox="1"/>
+          <p:nvPr/>
+        </p:nvSpPr>
+        <p:spPr>
+          <a:xfrm>
+            <a:off x="704088" y="1645920"/>
+            <a:ext cx="10789920" cy="731520"/>
+          </a:xfrm>
+          <a:prstGeom prst="rect">
+            <a:avLst/>
+          </a:prstGeom>
+          <a:noFill/>
+          <a:effectLst/>
+        </p:spPr>
+        <p:txBody>
+          <a:bodyPr wrap="square" anchor="ctr" lIns="36576" rIns="36576" tIns="27432" bIns="27432">
+            <a:spAutoFit/>
+          </a:bodyPr>
+          <a:lstStyle/>
+          <a:p>
+            <a:pPr algn="l">
+              <a:spcAft>
+                <a:spcPts val="0"/>
+              </a:spcAft>
+            </a:pPr>
+            <a:r>
+              <a:rPr sz="1600" b="0">
+                <a:solidFill>
+                  <a:srgbClr val="212427"/>
+                </a:solidFill>
+                <a:latin typeface="Verdana"/>
+              </a:rPr>
+              <a:t>Given a context, and an answer, analyze each statement in the answer and classify if the statement can be attributed to the given context or not.</a:t>
+            </a:r>
+          </a:p>
+        </p:txBody>
+      </p:sp>
+      <p:sp>
+        <p:nvSpPr>
+          <p:cNvPr id="7" name="Rectangle 6"/>
           <p:cNvSpPr/>
           <p:nvPr/>
         </p:nvSpPr>
         <p:spPr>
           <a:xfrm>
-            <a:off x="704088" y="1600200"/>
-            <a:ext cx="10789920" cy="914400"/>
+            <a:off x="704088" y="2468880"/>
+            <a:ext cx="10789920" cy="9525"/>
           </a:xfrm>
           <a:prstGeom prst="rect">
             <a:avLst/>
           </a:prstGeom>
-          <a:noFill/>
-          <a:ln w="9525">
-            <a:solidFill>
-              <a:srgbClr val="D6D7D8"/>
-            </a:solidFill>
+          <a:solidFill>
+            <a:srgbClr val="D6D7D8"/>
+          </a:solidFill>
+          <a:ln>
+            <a:noFill/>
           </a:ln>
           <a:effectLst/>
         </p:spPr>
@@ -53438,36 +54032,110 @@
           </a:fontRef>
         </p:style>
         <p:txBody>
-          <a:bodyPr rtlCol="0" anchor="ctr" wrap="square" lIns="109728" rIns="109728" tIns="73152" bIns="73152"/>
+          <a:bodyPr rtlCol="0" anchor="ctr"/>
           <a:lstStyle/>
           <a:p>
-            <a:pPr algn="l"/>
+            <a:pPr algn="ctr"/>
+          </a:p>
+        </p:txBody>
+      </p:sp>
+      <p:sp>
+        <p:nvSpPr>
+          <p:cNvPr id="8" name="TextBox 7"/>
+          <p:cNvSpPr txBox="1"/>
+          <p:nvPr/>
+        </p:nvSpPr>
+        <p:spPr>
+          <a:xfrm>
+            <a:off x="704088" y="2560320"/>
+            <a:ext cx="10789920" cy="411480"/>
+          </a:xfrm>
+          <a:prstGeom prst="rect">
+            <a:avLst/>
+          </a:prstGeom>
+          <a:noFill/>
+          <a:effectLst/>
+        </p:spPr>
+        <p:txBody>
+          <a:bodyPr wrap="square" anchor="t" lIns="36576" rIns="36576" tIns="27432" bIns="27432">
+            <a:spAutoFit/>
+          </a:bodyPr>
+          <a:lstStyle/>
+          <a:p>
+            <a:pPr algn="l">
+              <a:spcAft>
+                <a:spcPts val="0"/>
+              </a:spcAft>
+            </a:pPr>
             <a:r>
-              <a:rPr sz="1500" b="0">
+              <a:rPr sz="1600" b="0">
                 <a:solidFill>
                   <a:srgbClr val="212427"/>
                 </a:solidFill>
+                <a:latin typeface="Verdana"/>
               </a:rPr>
-              <a:t>Given a context, and an answer, analyze each statement in the answer and classify if the statement can be attributed to the given context or not.</a:t>
+              <a:t>Keine Definition. Der Richter entscheidet selbst, was eine Aussage ist.</a:t>
             </a:r>
           </a:p>
         </p:txBody>
       </p:sp>
       <p:sp>
         <p:nvSpPr>
-          <p:cNvPr id="6" name="Rectangle 5"/>
+          <p:cNvPr id="9" name="TextBox 8"/>
+          <p:cNvSpPr txBox="1"/>
+          <p:nvPr/>
+        </p:nvSpPr>
+        <p:spPr>
+          <a:xfrm>
+            <a:off x="704088" y="3017520"/>
+            <a:ext cx="10789920" cy="640080"/>
+          </a:xfrm>
+          <a:prstGeom prst="rect">
+            <a:avLst/>
+          </a:prstGeom>
+          <a:noFill/>
+          <a:effectLst/>
+        </p:spPr>
+        <p:txBody>
+          <a:bodyPr wrap="square" anchor="ctr" lIns="36576" rIns="36576" tIns="27432" bIns="27432">
+            <a:spAutoFit/>
+          </a:bodyPr>
+          <a:lstStyle/>
+          <a:p>
+            <a:pPr algn="l">
+              <a:spcAft>
+                <a:spcPts val="0"/>
+              </a:spcAft>
+            </a:pPr>
+            <a:r>
+              <a:rPr sz="1300" b="0">
+                <a:solidFill>
+                  <a:srgbClr val="5A6065"/>
+                </a:solidFill>
+                <a:latin typeface="Verdana"/>
+              </a:rPr>
+              <a:t>Unternehmen können sich für Pilotprojekte bewerben und erhalten 2-3 Tage pro Woche aktive Projektbegleitung, um gemeinsam einen Prototypen zu entwickeln. Dabei können sie auch die Recheninfrastruktur nutzen.</a:t>
+            </a:r>
+          </a:p>
+        </p:txBody>
+      </p:sp>
+      <p:sp>
+        <p:nvSpPr>
+          <p:cNvPr id="10" name="Rectangle 9"/>
           <p:cNvSpPr/>
           <p:nvPr/>
         </p:nvSpPr>
         <p:spPr>
           <a:xfrm>
-            <a:off x="704088" y="2651760"/>
-            <a:ext cx="10789920" cy="457200"/>
+            <a:off x="704088" y="3749039"/>
+            <a:ext cx="10789920" cy="9525"/>
           </a:xfrm>
           <a:prstGeom prst="rect">
             <a:avLst/>
           </a:prstGeom>
-          <a:noFill/>
+          <a:solidFill>
+            <a:srgbClr val="D6D7D8"/>
+          </a:solidFill>
           <a:ln>
             <a:noFill/>
           </a:ln>
@@ -53488,117 +54156,47 @@
           </a:fontRef>
         </p:style>
         <p:txBody>
-          <a:bodyPr rtlCol="0" anchor="t" wrap="square" lIns="109728" rIns="109728" tIns="73152" bIns="73152"/>
+          <a:bodyPr rtlCol="0" anchor="ctr"/>
           <a:lstStyle/>
           <a:p>
-            <a:pPr algn="l"/>
-            <a:r>
-              <a:rPr sz="1600" b="1">
-                <a:solidFill>
-                  <a:srgbClr val="212427"/>
-                </a:solidFill>
-              </a:rPr>
-              <a:t>Keine Definition. Der Richter entscheidet selbst, was eine Aussage ist.</a:t>
-            </a:r>
+            <a:pPr algn="ctr"/>
           </a:p>
         </p:txBody>
       </p:sp>
       <p:sp>
         <p:nvSpPr>
-          <p:cNvPr id="7" name="Rectangle 6"/>
-          <p:cNvSpPr/>
+          <p:cNvPr id="11" name="TextBox 10"/>
+          <p:cNvSpPr txBox="1"/>
           <p:nvPr/>
         </p:nvSpPr>
         <p:spPr>
           <a:xfrm>
-            <a:off x="704088" y="3200400"/>
-            <a:ext cx="10789920" cy="822960"/>
+            <a:off x="704088" y="3840480"/>
+            <a:ext cx="5303520" cy="411480"/>
           </a:xfrm>
           <a:prstGeom prst="rect">
             <a:avLst/>
           </a:prstGeom>
           <a:noFill/>
-          <a:ln w="9525">
-            <a:solidFill>
-              <a:srgbClr val="D6D7D8"/>
-            </a:solidFill>
-          </a:ln>
           <a:effectLst/>
         </p:spPr>
-        <p:style>
-          <a:lnRef idx="1">
-            <a:schemeClr val="accent1"/>
-          </a:lnRef>
-          <a:fillRef idx="3">
-            <a:schemeClr val="accent1"/>
-          </a:fillRef>
-          <a:effectRef idx="2">
-            <a:schemeClr val="accent1"/>
-          </a:effectRef>
-          <a:fontRef idx="minor">
-            <a:schemeClr val="lt1"/>
-          </a:fontRef>
-        </p:style>
         <p:txBody>
-          <a:bodyPr rtlCol="0" anchor="ctr" wrap="square" lIns="109728" rIns="109728" tIns="73152" bIns="73152"/>
+          <a:bodyPr wrap="square" anchor="t" lIns="36576" rIns="36576" tIns="27432" bIns="27432">
+            <a:spAutoFit/>
+          </a:bodyPr>
           <a:lstStyle/>
           <a:p>
-            <a:pPr algn="l"/>
+            <a:pPr algn="l">
+              <a:spcAft>
+                <a:spcPts val="0"/>
+              </a:spcAft>
+            </a:pPr>
             <a:r>
-              <a:rPr sz="1300" b="0">
-                <a:solidFill>
-                  <a:srgbClr val="5A6065"/>
-                </a:solidFill>
-              </a:rPr>
-              <a:t>Unternehmen können sich für Pilotprojekte bewerben und erhalten 2-3 Tage pro Woche aktive Projektbegleitung, um gemeinsam einen Prototypen zu entwickeln. Dabei können sie auch die Recheninfrastruktur nutzen.</a:t>
-            </a:r>
-          </a:p>
-        </p:txBody>
-      </p:sp>
-      <p:sp>
-        <p:nvSpPr>
-          <p:cNvPr id="8" name="Rectangle 7"/>
-          <p:cNvSpPr/>
-          <p:nvPr/>
-        </p:nvSpPr>
-        <p:spPr>
-          <a:xfrm>
-            <a:off x="704088" y="4023360"/>
-            <a:ext cx="5303520" cy="411480"/>
-          </a:xfrm>
-          <a:prstGeom prst="rect">
-            <a:avLst/>
-          </a:prstGeom>
-          <a:noFill/>
-          <a:ln>
-            <a:noFill/>
-          </a:ln>
-          <a:effectLst/>
-        </p:spPr>
-        <p:style>
-          <a:lnRef idx="1">
-            <a:schemeClr val="accent1"/>
-          </a:lnRef>
-          <a:fillRef idx="3">
-            <a:schemeClr val="accent1"/>
-          </a:fillRef>
-          <a:effectRef idx="2">
-            <a:schemeClr val="accent1"/>
-          </a:effectRef>
-          <a:fontRef idx="minor">
-            <a:schemeClr val="lt1"/>
-          </a:fontRef>
-        </p:style>
-        <p:txBody>
-          <a:bodyPr rtlCol="0" anchor="t" wrap="square" lIns="109728" rIns="109728" tIns="73152" bIns="73152"/>
-          <a:lstStyle/>
-          <a:p>
-            <a:pPr algn="l"/>
-            <a:r>
-              <a:rPr sz="1600" b="1">
+              <a:rPr sz="1600" b="0">
                 <a:solidFill>
                   <a:srgbClr val="212427"/>
                 </a:solidFill>
+                <a:latin typeface="Verdana"/>
               </a:rPr>
               <a:t>gpt-oss-120b</a:t>
             </a:r>
@@ -53607,48 +54205,38 @@
       </p:sp>
       <p:sp>
         <p:nvSpPr>
-          <p:cNvPr id="9" name="Rectangle 8"/>
-          <p:cNvSpPr/>
+          <p:cNvPr id="12" name="TextBox 11"/>
+          <p:cNvSpPr txBox="1"/>
           <p:nvPr/>
         </p:nvSpPr>
         <p:spPr>
           <a:xfrm>
-            <a:off x="704088" y="4434840"/>
-            <a:ext cx="5303520" cy="594360"/>
+            <a:off x="704088" y="4251960"/>
+            <a:ext cx="5303520" cy="548640"/>
           </a:xfrm>
           <a:prstGeom prst="rect">
             <a:avLst/>
           </a:prstGeom>
           <a:noFill/>
-          <a:ln>
-            <a:noFill/>
-          </a:ln>
           <a:effectLst/>
         </p:spPr>
-        <p:style>
-          <a:lnRef idx="1">
-            <a:schemeClr val="accent1"/>
-          </a:lnRef>
-          <a:fillRef idx="3">
-            <a:schemeClr val="accent1"/>
-          </a:fillRef>
-          <a:effectRef idx="2">
-            <a:schemeClr val="accent1"/>
-          </a:effectRef>
-          <a:fontRef idx="minor">
-            <a:schemeClr val="lt1"/>
-          </a:fontRef>
-        </p:style>
         <p:txBody>
-          <a:bodyPr rtlCol="0" anchor="t" wrap="square" lIns="109728" rIns="109728" tIns="73152" bIns="73152"/>
+          <a:bodyPr wrap="square" anchor="t" lIns="36576" rIns="36576" tIns="27432" bIns="27432">
+            <a:spAutoFit/>
+          </a:bodyPr>
           <a:lstStyle/>
           <a:p>
-            <a:pPr algn="l"/>
+            <a:pPr algn="l">
+              <a:spcAft>
+                <a:spcPts val="0"/>
+              </a:spcAft>
+            </a:pPr>
             <a:r>
-              <a:rPr sz="2800" b="1">
+              <a:rPr sz="2800" b="0">
                 <a:solidFill>
-                  <a:srgbClr val="212427"/>
+                  <a:srgbClr val="5A6065"/>
                 </a:solidFill>
+                <a:latin typeface="Verdana"/>
               </a:rPr>
               <a:t>2 Aussagen</a:t>
             </a:r>
@@ -53657,48 +54245,38 @@
       </p:sp>
       <p:sp>
         <p:nvSpPr>
-          <p:cNvPr id="10" name="Rectangle 9"/>
-          <p:cNvSpPr/>
+          <p:cNvPr id="13" name="TextBox 12"/>
+          <p:cNvSpPr txBox="1"/>
           <p:nvPr/>
         </p:nvSpPr>
         <p:spPr>
           <a:xfrm>
-            <a:off x="704088" y="4983480"/>
+            <a:off x="704088" y="4800600"/>
             <a:ext cx="5303520" cy="365760"/>
           </a:xfrm>
           <a:prstGeom prst="rect">
             <a:avLst/>
           </a:prstGeom>
           <a:noFill/>
-          <a:ln>
-            <a:noFill/>
-          </a:ln>
           <a:effectLst/>
         </p:spPr>
-        <p:style>
-          <a:lnRef idx="1">
-            <a:schemeClr val="accent1"/>
-          </a:lnRef>
-          <a:fillRef idx="3">
-            <a:schemeClr val="accent1"/>
-          </a:fillRef>
-          <a:effectRef idx="2">
-            <a:schemeClr val="accent1"/>
-          </a:effectRef>
-          <a:fontRef idx="minor">
-            <a:schemeClr val="lt1"/>
-          </a:fontRef>
-        </p:style>
         <p:txBody>
-          <a:bodyPr rtlCol="0" anchor="t" wrap="square" lIns="109728" rIns="109728" tIns="73152" bIns="73152"/>
+          <a:bodyPr wrap="square" anchor="t" lIns="36576" rIns="36576" tIns="27432" bIns="27432">
+            <a:spAutoFit/>
+          </a:bodyPr>
           <a:lstStyle/>
           <a:p>
-            <a:pPr algn="l"/>
+            <a:pPr algn="l">
+              <a:spcAft>
+                <a:spcPts val="0"/>
+              </a:spcAft>
+            </a:pPr>
             <a:r>
               <a:rPr sz="1300" b="0">
                 <a:solidFill>
                   <a:srgbClr val="5A6065"/>
                 </a:solidFill>
+                <a:latin typeface="Verdana"/>
               </a:rPr>
               <a:t>zerlegt meist je Satz</a:t>
             </a:r>
@@ -53707,48 +54285,38 @@
       </p:sp>
       <p:sp>
         <p:nvSpPr>
-          <p:cNvPr id="11" name="Rectangle 10"/>
-          <p:cNvSpPr/>
+          <p:cNvPr id="14" name="TextBox 13"/>
+          <p:cNvSpPr txBox="1"/>
           <p:nvPr/>
         </p:nvSpPr>
         <p:spPr>
           <a:xfrm>
-            <a:off x="6190488" y="4023360"/>
+            <a:off x="6190488" y="3840480"/>
             <a:ext cx="5303520" cy="411480"/>
           </a:xfrm>
           <a:prstGeom prst="rect">
             <a:avLst/>
           </a:prstGeom>
           <a:noFill/>
-          <a:ln>
-            <a:noFill/>
-          </a:ln>
           <a:effectLst/>
         </p:spPr>
-        <p:style>
-          <a:lnRef idx="1">
-            <a:schemeClr val="accent1"/>
-          </a:lnRef>
-          <a:fillRef idx="3">
-            <a:schemeClr val="accent1"/>
-          </a:fillRef>
-          <a:effectRef idx="2">
-            <a:schemeClr val="accent1"/>
-          </a:effectRef>
-          <a:fontRef idx="minor">
-            <a:schemeClr val="lt1"/>
-          </a:fontRef>
-        </p:style>
         <p:txBody>
-          <a:bodyPr rtlCol="0" anchor="t" wrap="square" lIns="109728" rIns="109728" tIns="73152" bIns="73152"/>
+          <a:bodyPr wrap="square" anchor="t" lIns="36576" rIns="36576" tIns="27432" bIns="27432">
+            <a:spAutoFit/>
+          </a:bodyPr>
           <a:lstStyle/>
           <a:p>
-            <a:pPr algn="l"/>
+            <a:pPr algn="l">
+              <a:spcAft>
+                <a:spcPts val="0"/>
+              </a:spcAft>
+            </a:pPr>
             <a:r>
-              <a:rPr sz="1600" b="1">
+              <a:rPr sz="1600" b="0">
                 <a:solidFill>
                   <a:srgbClr val="212427"/>
                 </a:solidFill>
+                <a:latin typeface="Verdana"/>
               </a:rPr>
               <a:t>llama-3-3-70b</a:t>
             </a:r>
@@ -53757,48 +54325,38 @@
       </p:sp>
       <p:sp>
         <p:nvSpPr>
-          <p:cNvPr id="12" name="Rectangle 11"/>
-          <p:cNvSpPr/>
+          <p:cNvPr id="15" name="TextBox 14"/>
+          <p:cNvSpPr txBox="1"/>
           <p:nvPr/>
         </p:nvSpPr>
         <p:spPr>
           <a:xfrm>
-            <a:off x="6190488" y="4434840"/>
-            <a:ext cx="5303520" cy="594360"/>
+            <a:off x="6190488" y="4251960"/>
+            <a:ext cx="5303520" cy="548640"/>
           </a:xfrm>
           <a:prstGeom prst="rect">
             <a:avLst/>
           </a:prstGeom>
           <a:noFill/>
-          <a:ln>
-            <a:noFill/>
-          </a:ln>
           <a:effectLst/>
         </p:spPr>
-        <p:style>
-          <a:lnRef idx="1">
-            <a:schemeClr val="accent1"/>
-          </a:lnRef>
-          <a:fillRef idx="3">
-            <a:schemeClr val="accent1"/>
-          </a:fillRef>
-          <a:effectRef idx="2">
-            <a:schemeClr val="accent1"/>
-          </a:effectRef>
-          <a:fontRef idx="minor">
-            <a:schemeClr val="lt1"/>
-          </a:fontRef>
-        </p:style>
         <p:txBody>
-          <a:bodyPr rtlCol="0" anchor="t" wrap="square" lIns="109728" rIns="109728" tIns="73152" bIns="73152"/>
+          <a:bodyPr wrap="square" anchor="t" lIns="36576" rIns="36576" tIns="27432" bIns="27432">
+            <a:spAutoFit/>
+          </a:bodyPr>
           <a:lstStyle/>
           <a:p>
-            <a:pPr algn="l"/>
+            <a:pPr algn="l">
+              <a:spcAft>
+                <a:spcPts val="0"/>
+              </a:spcAft>
+            </a:pPr>
             <a:r>
-              <a:rPr sz="2800" b="1">
+              <a:rPr sz="2800" b="0">
                 <a:solidFill>
-                  <a:srgbClr val="212427"/>
+                  <a:srgbClr val="5A6065"/>
                 </a:solidFill>
+                <a:latin typeface="Verdana"/>
               </a:rPr>
               <a:t>4 Aussagen</a:t>
             </a:r>
@@ -53807,48 +54365,38 @@
       </p:sp>
       <p:sp>
         <p:nvSpPr>
-          <p:cNvPr id="13" name="Rectangle 12"/>
-          <p:cNvSpPr/>
+          <p:cNvPr id="16" name="TextBox 15"/>
+          <p:cNvSpPr txBox="1"/>
           <p:nvPr/>
         </p:nvSpPr>
         <p:spPr>
           <a:xfrm>
-            <a:off x="6190488" y="4983480"/>
+            <a:off x="6190488" y="4800600"/>
             <a:ext cx="5303520" cy="365760"/>
           </a:xfrm>
           <a:prstGeom prst="rect">
             <a:avLst/>
           </a:prstGeom>
           <a:noFill/>
-          <a:ln>
-            <a:noFill/>
-          </a:ln>
           <a:effectLst/>
         </p:spPr>
-        <p:style>
-          <a:lnRef idx="1">
-            <a:schemeClr val="accent1"/>
-          </a:lnRef>
-          <a:fillRef idx="3">
-            <a:schemeClr val="accent1"/>
-          </a:fillRef>
-          <a:effectRef idx="2">
-            <a:schemeClr val="accent1"/>
-          </a:effectRef>
-          <a:fontRef idx="minor">
-            <a:schemeClr val="lt1"/>
-          </a:fontRef>
-        </p:style>
         <p:txBody>
-          <a:bodyPr rtlCol="0" anchor="t" wrap="square" lIns="109728" rIns="109728" tIns="73152" bIns="73152"/>
+          <a:bodyPr wrap="square" anchor="t" lIns="36576" rIns="36576" tIns="27432" bIns="27432">
+            <a:spAutoFit/>
+          </a:bodyPr>
           <a:lstStyle/>
           <a:p>
-            <a:pPr algn="l"/>
+            <a:pPr algn="l">
+              <a:spcAft>
+                <a:spcPts val="0"/>
+              </a:spcAft>
+            </a:pPr>
             <a:r>
               <a:rPr sz="1300" b="0">
                 <a:solidFill>
                   <a:srgbClr val="5A6065"/>
                 </a:solidFill>
+                <a:latin typeface="Verdana"/>
               </a:rPr>
               <a:t>zerlegt feiner</a:t>
             </a:r>
@@ -53857,48 +54405,38 @@
       </p:sp>
       <p:sp>
         <p:nvSpPr>
-          <p:cNvPr id="14" name="Rectangle 13"/>
-          <p:cNvSpPr/>
+          <p:cNvPr id="17" name="TextBox 16"/>
+          <p:cNvSpPr txBox="1"/>
           <p:nvPr/>
         </p:nvSpPr>
         <p:spPr>
           <a:xfrm>
-            <a:off x="704088" y="5349240"/>
+            <a:off x="704088" y="5257800"/>
             <a:ext cx="10789920" cy="365760"/>
           </a:xfrm>
           <a:prstGeom prst="rect">
             <a:avLst/>
           </a:prstGeom>
           <a:noFill/>
-          <a:ln>
-            <a:noFill/>
-          </a:ln>
           <a:effectLst/>
         </p:spPr>
-        <p:style>
-          <a:lnRef idx="1">
-            <a:schemeClr val="accent1"/>
-          </a:lnRef>
-          <a:fillRef idx="3">
-            <a:schemeClr val="accent1"/>
-          </a:fillRef>
-          <a:effectRef idx="2">
-            <a:schemeClr val="accent1"/>
-          </a:effectRef>
-          <a:fontRef idx="minor">
-            <a:schemeClr val="lt1"/>
-          </a:fontRef>
-        </p:style>
         <p:txBody>
-          <a:bodyPr rtlCol="0" anchor="t" wrap="square" lIns="109728" rIns="109728" tIns="73152" bIns="73152"/>
+          <a:bodyPr wrap="square" anchor="t" lIns="36576" rIns="36576" tIns="27432" bIns="27432">
+            <a:spAutoFit/>
+          </a:bodyPr>
           <a:lstStyle/>
           <a:p>
-            <a:pPr algn="l"/>
+            <a:pPr algn="l">
+              <a:spcAft>
+                <a:spcPts val="0"/>
+              </a:spcAft>
+            </a:pPr>
             <a:r>
               <a:rPr sz="1200" b="0">
                 <a:solidFill>
                   <a:srgbClr val="5A6065"/>
                 </a:solidFill>
+                <a:latin typeface="Verdana"/>
               </a:rPr>
               <a:t>Dieselbe Referenzantwort aus Notebook 2, Abschnitt E b. Der Nenner von Context Recall hängt davon ab, wer zerlegt.</a:t>
             </a:r>

--- a/slides/src/rag_iii_claims_german.pptx
+++ b/slides/src/rag_iii_claims_german.pptx
@@ -49241,7 +49241,7 @@
                 </a:solidFill>
                 <a:latin typeface="Verdana"/>
               </a:rPr>
-              <a:t>Mentimeter-Code: ____</a:t>
+              <a:t>menti.com, Code 7946 2006</a:t>
             </a:r>
           </a:p>
         </p:txBody>
@@ -53819,7 +53819,7 @@
                 </a:solidFill>
                 <a:latin typeface="Verdana"/>
               </a:rPr>
-              <a:t>Mentimeter-Code: ____</a:t>
+              <a:t>menti.com, Code 7946 2006</a:t>
             </a:r>
           </a:p>
         </p:txBody>
